--- a/llm-coding-eval/LLM-Coding-Eval-Report.pptx
+++ b/llm-coding-eval/LLM-Coding-Eval-Report.pptx
@@ -18,9 +18,15 @@
     <p:sldId id="266" r:id="rId12"/>
     <p:sldId id="267" r:id="rId13"/>
     <p:sldId id="268" r:id="rId14"/>
+    <p:sldId id="269" r:id="rId15"/>
+    <p:sldId id="270" r:id="rId16"/>
+    <p:sldId id="271" r:id="rId17"/>
+    <p:sldId id="272" r:id="rId18"/>
+    <p:sldId id="273" r:id="rId19"/>
+    <p:sldId id="274" r:id="rId20"/>
   </p:sldIdLst>
   <p:notesMasterIdLst>
-    <p:notesMasterId r:id="rId15"/>
+    <p:notesMasterId r:id="rId21"/>
   </p:notesMasterIdLst>
   <p:sldSz cx="9144000" cy="5143500"/>
   <p:notesSz cx="5143500" cy="9144000"/>
@@ -451,6 +457,298 @@
 </c:chartSpace>
 </file>
 
+<file path=ppt/charts/chart10.xml><?xml version="1.0" encoding="utf-8"?>
+<c:chartSpace xmlns:c="http://schemas.openxmlformats.org/drawingml/2006/chart" xmlns:a="http://schemas.openxmlformats.org/drawingml/2006/main" xmlns:r="http://schemas.openxmlformats.org/officeDocument/2006/relationships">
+  <c:date1904 val="0"/>
+  <c:roundedCorners val="1"/>
+  <c:chart>
+    <c:autoTitleDeleted val="1"/>
+    <c:plotArea>
+      <c:layout/>
+      <c:barChart>
+        <c:barDir val="bar"/>
+        <c:grouping val="clustered"/>
+        <c:varyColors val="0"/>
+        <c:ser>
+          <c:idx val="0"/>
+          <c:order val="0"/>
+          <c:tx>
+            <c:strRef>
+              <c:f>Sheet1!$B$1</c:f>
+              <c:strCache>
+                <c:ptCount val="1"/>
+                <c:pt idx="0">
+                  <c:v>Latency (s)</c:v>
+                </c:pt>
+              </c:strCache>
+            </c:strRef>
+          </c:tx>
+          <c:spPr>
+            <a:solidFill>
+              <a:srgbClr val="FF6B35"/>
+            </a:solidFill>
+            <a:effectLst/>
+          </c:spPr>
+          <c:invertIfNegative val="0"/>
+          <c:dLbls>
+            <c:numFmt formatCode="#,##0" sourceLinked="0"/>
+            <c:txPr>
+              <a:bodyPr/>
+              <a:lstStyle/>
+              <a:p>
+                <a:pPr>
+                  <a:defRPr b="0" i="0" strike="noStrike" sz="900" u="none">
+                    <a:solidFill>
+                      <a:srgbClr val="0D1B2A"/>
+                    </a:solidFill>
+                    <a:latin typeface="Arial"/>
+                  </a:defRPr>
+                </a:pPr>
+              </a:p>
+            </c:txPr>
+            <c:showLegendKey val="0"/>
+            <c:showVal val="1"/>
+            <c:showCatName val="0"/>
+            <c:showSerName val="0"/>
+            <c:showPercent val="0"/>
+            <c:showBubbleSize val="0"/>
+            <c:showLeaderLines val="0"/>
+          </c:dLbls>
+          <c:dPt>
+            <c:idx val="0"/>
+            <c:invertIfNegative val="0"/>
+            <c:bubble3D val="0"/>
+            <c:spPr>
+              <a:solidFill>
+                <a:srgbClr val="FF6B35"/>
+              </a:solidFill>
+              <a:effectLst/>
+            </c:spPr>
+          </c:dPt>
+          <c:dPt>
+            <c:idx val="1"/>
+            <c:invertIfNegative val="0"/>
+            <c:bubble3D val="0"/>
+            <c:spPr>
+              <a:solidFill>
+                <a:srgbClr val="5E8BFF"/>
+              </a:solidFill>
+              <a:effectLst/>
+            </c:spPr>
+          </c:dPt>
+          <c:dPt>
+            <c:idx val="2"/>
+            <c:invertIfNegative val="0"/>
+            <c:bubble3D val="0"/>
+            <c:spPr>
+              <a:solidFill>
+                <a:srgbClr val="FF6B35"/>
+              </a:solidFill>
+              <a:effectLst/>
+            </c:spPr>
+          </c:dPt>
+          <c:dPt>
+            <c:idx val="3"/>
+            <c:invertIfNegative val="0"/>
+            <c:bubble3D val="0"/>
+            <c:spPr>
+              <a:solidFill>
+                <a:srgbClr val="5E8BFF"/>
+              </a:solidFill>
+              <a:effectLst/>
+            </c:spPr>
+          </c:dPt>
+          <c:cat>
+            <c:multiLvlStrRef>
+              <c:f>Sheet1!$A$2:$A$5</c:f>
+              <c:multiLvlStrCache>
+                <c:ptCount val="4"/>
+                <c:lvl>
+                  <c:pt idx="0">
+                    <c:v>Qwen 7B</c:v>
+                  </c:pt>
+                  <c:pt idx="1">
+                    <c:v>DeepSeek 6.7B</c:v>
+                  </c:pt>
+                  <c:pt idx="2">
+                    <c:v>Qwen 32B</c:v>
+                  </c:pt>
+                  <c:pt idx="3">
+                    <c:v>DeepSeek 33B</c:v>
+                  </c:pt>
+                </c:lvl>
+              </c:multiLvlStrCache>
+            </c:multiLvlStrRef>
+          </c:cat>
+          <c:val>
+            <c:numRef>
+              <c:f>Sheet1!$B$2:$B$5</c:f>
+              <c:numCache>
+                <c:formatCode>General</c:formatCode>
+                <c:ptCount val="4"/>
+                <c:pt idx="0">
+                  <c:v>2.3</c:v>
+                </c:pt>
+                <c:pt idx="1">
+                  <c:v>4.7</c:v>
+                </c:pt>
+                <c:pt idx="2">
+                  <c:v>35</c:v>
+                </c:pt>
+                <c:pt idx="3">
+                  <c:v>34</c:v>
+                </c:pt>
+              </c:numCache>
+            </c:numRef>
+          </c:val>
+        </c:ser>
+        <c:dLbls>
+          <c:numFmt formatCode="#,##0" sourceLinked="0"/>
+          <c:txPr>
+            <a:bodyPr/>
+            <a:lstStyle/>
+            <a:p>
+              <a:pPr>
+                <a:defRPr b="0" i="0" strike="noStrike" sz="900" u="none">
+                  <a:solidFill>
+                    <a:srgbClr val="0D1B2A"/>
+                  </a:solidFill>
+                  <a:latin typeface="Arial"/>
+                </a:defRPr>
+              </a:pPr>
+            </a:p>
+          </c:txPr>
+          <c:showLegendKey val="0"/>
+          <c:showVal val="1"/>
+          <c:showCatName val="0"/>
+          <c:showSerName val="0"/>
+          <c:showPercent val="0"/>
+          <c:showBubbleSize val="0"/>
+          <c:showLeaderLines val="0"/>
+        </c:dLbls>
+        <c:gapWidth val="150"/>
+        <c:overlap val="0"/>
+        <c:axId val="2094734554"/>
+        <c:axId val="2094734552"/>
+        <c:axId val="2094734556"/>
+      </c:barChart>
+      <c:catAx>
+        <c:axId val="2094734554"/>
+        <c:scaling>
+          <c:orientation val="minMax"/>
+        </c:scaling>
+        <c:delete val="0"/>
+        <c:axPos val="l"/>
+        <c:numFmt formatCode="General" sourceLinked="1"/>
+        <c:majorTickMark val="out"/>
+        <c:minorTickMark val="none"/>
+        <c:tickLblPos val="nextTo"/>
+        <c:spPr>
+          <a:ln w="12700" cap="flat">
+            <a:solidFill>
+              <a:srgbClr val="888888"/>
+            </a:solidFill>
+            <a:prstDash val="solid"/>
+            <a:round/>
+          </a:ln>
+        </c:spPr>
+        <c:txPr>
+          <a:bodyPr/>
+          <a:lstStyle/>
+          <a:p>
+            <a:pPr>
+              <a:defRPr sz="1200" b="0" i="0" u="none" strike="noStrike">
+                <a:solidFill>
+                  <a:srgbClr val="475569"/>
+                </a:solidFill>
+                <a:latin typeface="Arial"/>
+              </a:defRPr>
+            </a:pPr>
+            <a:endParaRPr lang="en-US"/>
+          </a:p>
+        </c:txPr>
+        <c:crossAx val="2094734552"/>
+        <c:crosses val="autoZero"/>
+        <c:auto val="1"/>
+        <c:lblAlgn val="ctr"/>
+        <c:noMultiLvlLbl val="1"/>
+      </c:catAx>
+      <c:valAx>
+        <c:axId val="2094734552"/>
+        <c:scaling>
+          <c:orientation val="minMax"/>
+        </c:scaling>
+        <c:delete val="0"/>
+        <c:axPos val="b"/>
+        <c:majorGridlines>
+          <c:spPr>
+            <a:ln w="6350" cap="flat">
+              <a:solidFill>
+                <a:srgbClr val="E2E8F0"/>
+              </a:solidFill>
+              <a:prstDash val="solid"/>
+              <a:round/>
+            </a:ln>
+          </c:spPr>
+        </c:majorGridlines>
+        <c:numFmt formatCode="General" sourceLinked="0"/>
+        <c:majorTickMark val="out"/>
+        <c:minorTickMark val="none"/>
+        <c:tickLblPos val="low"/>
+        <c:spPr>
+          <a:ln w="12700" cap="flat">
+            <a:solidFill>
+              <a:srgbClr val="888888"/>
+            </a:solidFill>
+            <a:prstDash val="solid"/>
+            <a:round/>
+          </a:ln>
+        </c:spPr>
+        <c:txPr>
+          <a:bodyPr/>
+          <a:lstStyle/>
+          <a:p>
+            <a:pPr>
+              <a:defRPr sz="1200" b="0" i="0" u="none" strike="noStrike">
+                <a:solidFill>
+                  <a:srgbClr val="94A3B8"/>
+                </a:solidFill>
+                <a:latin typeface="Arial"/>
+              </a:defRPr>
+            </a:pPr>
+            <a:endParaRPr lang="en-US"/>
+          </a:p>
+        </c:txPr>
+        <c:crossAx val="2094734554"/>
+        <c:crosses val="autoZero"/>
+        <c:crossBetween val="between"/>
+      </c:valAx>
+      <c:spPr>
+        <a:noFill/>
+        <a:ln>
+          <a:noFill/>
+        </a:ln>
+        <a:effectLst/>
+      </c:spPr>
+    </c:plotArea>
+    <c:plotVisOnly val="1"/>
+    <c:dispBlanksAs val="span"/>
+  </c:chart>
+  <c:spPr>
+    <a:solidFill>
+      <a:srgbClr val="F8FAFC"/>
+    </a:solidFill>
+    <a:ln>
+      <a:noFill/>
+    </a:ln>
+    <a:effectLst/>
+  </c:spPr>
+  <c:externalData r:id="rId1">
+    <c:autoUpdate val="0"/>
+  </c:externalData>
+</c:chartSpace>
+</file>
+
 <file path=ppt/charts/chart2.xml><?xml version="1.0" encoding="utf-8"?>
 <c:chartSpace xmlns:c="http://schemas.openxmlformats.org/drawingml/2006/chart" xmlns:a="http://schemas.openxmlformats.org/drawingml/2006/main" xmlns:r="http://schemas.openxmlformats.org/officeDocument/2006/relationships">
   <c:date1904 val="0"/>
@@ -2334,6 +2632,363 @@
 </c:chartSpace>
 </file>
 
+<file path=ppt/charts/chart9.xml><?xml version="1.0" encoding="utf-8"?>
+<c:chartSpace xmlns:c="http://schemas.openxmlformats.org/drawingml/2006/chart" xmlns:a="http://schemas.openxmlformats.org/drawingml/2006/main" xmlns:r="http://schemas.openxmlformats.org/officeDocument/2006/relationships">
+  <c:date1904 val="0"/>
+  <c:roundedCorners val="1"/>
+  <c:chart>
+    <c:autoTitleDeleted val="1"/>
+    <c:plotArea>
+      <c:layout/>
+      <c:barChart>
+        <c:barDir val="col"/>
+        <c:grouping val="clustered"/>
+        <c:varyColors val="0"/>
+        <c:ser>
+          <c:idx val="0"/>
+          <c:order val="0"/>
+          <c:tx>
+            <c:strRef>
+              <c:f>Sheet1!$B$1</c:f>
+              <c:strCache>
+                <c:ptCount val="1"/>
+                <c:pt idx="0">
+                  <c:v>LeetCode (% of 38 cases)</c:v>
+                </c:pt>
+              </c:strCache>
+            </c:strRef>
+          </c:tx>
+          <c:spPr>
+            <a:solidFill>
+              <a:srgbClr val="065A82"/>
+            </a:solidFill>
+            <a:effectLst/>
+          </c:spPr>
+          <c:invertIfNegative val="0"/>
+          <c:dLbls>
+            <c:numFmt formatCode="#,##0" sourceLinked="0"/>
+            <c:txPr>
+              <a:bodyPr/>
+              <a:lstStyle/>
+              <a:p>
+                <a:pPr>
+                  <a:defRPr b="0" i="0" strike="noStrike" sz="800" u="none">
+                    <a:solidFill>
+                      <a:srgbClr val="0D1B2A"/>
+                    </a:solidFill>
+                    <a:latin typeface="Arial"/>
+                  </a:defRPr>
+                </a:pPr>
+              </a:p>
+            </c:txPr>
+            <c:showLegendKey val="0"/>
+            <c:showVal val="1"/>
+            <c:showCatName val="0"/>
+            <c:showSerName val="0"/>
+            <c:showPercent val="0"/>
+            <c:showBubbleSize val="0"/>
+            <c:showLeaderLines val="0"/>
+          </c:dLbls>
+          <c:cat>
+            <c:multiLvlStrRef>
+              <c:f>Sheet1!$A$2:$A$5</c:f>
+              <c:multiLvlStrCache>
+                <c:ptCount val="4"/>
+                <c:lvl>
+                  <c:pt idx="0">
+                    <c:v>Qwen 7B</c:v>
+                  </c:pt>
+                  <c:pt idx="1">
+                    <c:v>DeepSeek 6.7B</c:v>
+                  </c:pt>
+                  <c:pt idx="2">
+                    <c:v>Qwen 32B</c:v>
+                  </c:pt>
+                  <c:pt idx="3">
+                    <c:v>DeepSeek 33B</c:v>
+                  </c:pt>
+                </c:lvl>
+              </c:multiLvlStrCache>
+            </c:multiLvlStrRef>
+          </c:cat>
+          <c:val>
+            <c:numRef>
+              <c:f>Sheet1!$B$2:$B$5</c:f>
+              <c:numCache>
+                <c:formatCode>General</c:formatCode>
+                <c:ptCount val="4"/>
+                <c:pt idx="0">
+                  <c:v>89</c:v>
+                </c:pt>
+                <c:pt idx="1">
+                  <c:v>97</c:v>
+                </c:pt>
+                <c:pt idx="2">
+                  <c:v>97</c:v>
+                </c:pt>
+                <c:pt idx="3">
+                  <c:v>97</c:v>
+                </c:pt>
+              </c:numCache>
+            </c:numRef>
+          </c:val>
+        </c:ser>
+        <c:ser>
+          <c:idx val="1"/>
+          <c:order val="1"/>
+          <c:tx>
+            <c:strRef>
+              <c:f>Sheet1!$C$1</c:f>
+              <c:strCache>
+                <c:ptCount val="1"/>
+                <c:pt idx="0">
+                  <c:v>Scheduler (% of 26 tests)</c:v>
+                </c:pt>
+              </c:strCache>
+            </c:strRef>
+          </c:tx>
+          <c:spPr>
+            <a:solidFill>
+              <a:srgbClr val="1C7293"/>
+            </a:solidFill>
+            <a:effectLst/>
+          </c:spPr>
+          <c:invertIfNegative val="0"/>
+          <c:dLbls>
+            <c:numFmt formatCode="#,##0" sourceLinked="0"/>
+            <c:txPr>
+              <a:bodyPr/>
+              <a:lstStyle/>
+              <a:p>
+                <a:pPr>
+                  <a:defRPr b="0" i="0" strike="noStrike" sz="800" u="none">
+                    <a:solidFill>
+                      <a:srgbClr val="0D1B2A"/>
+                    </a:solidFill>
+                    <a:latin typeface="Arial"/>
+                  </a:defRPr>
+                </a:pPr>
+              </a:p>
+            </c:txPr>
+            <c:showLegendKey val="0"/>
+            <c:showVal val="1"/>
+            <c:showCatName val="0"/>
+            <c:showSerName val="0"/>
+            <c:showPercent val="0"/>
+            <c:showBubbleSize val="0"/>
+            <c:showLeaderLines val="0"/>
+          </c:dLbls>
+          <c:cat>
+            <c:multiLvlStrRef>
+              <c:f>Sheet1!$A$2:$A$5</c:f>
+              <c:multiLvlStrCache>
+                <c:ptCount val="4"/>
+                <c:lvl>
+                  <c:pt idx="0">
+                    <c:v>Qwen 7B</c:v>
+                  </c:pt>
+                  <c:pt idx="1">
+                    <c:v>DeepSeek 6.7B</c:v>
+                  </c:pt>
+                  <c:pt idx="2">
+                    <c:v>Qwen 32B</c:v>
+                  </c:pt>
+                  <c:pt idx="3">
+                    <c:v>DeepSeek 33B</c:v>
+                  </c:pt>
+                </c:lvl>
+              </c:multiLvlStrCache>
+            </c:multiLvlStrRef>
+          </c:cat>
+          <c:val>
+            <c:numRef>
+              <c:f>Sheet1!$C$2:$C$5</c:f>
+              <c:numCache>
+                <c:formatCode>General</c:formatCode>
+                <c:ptCount val="4"/>
+                <c:pt idx="0">
+                  <c:v>19</c:v>
+                </c:pt>
+                <c:pt idx="1">
+                  <c:v>100</c:v>
+                </c:pt>
+                <c:pt idx="2">
+                  <c:v>100</c:v>
+                </c:pt>
+                <c:pt idx="3">
+                  <c:v>100</c:v>
+                </c:pt>
+              </c:numCache>
+            </c:numRef>
+          </c:val>
+        </c:ser>
+        <c:dLbls>
+          <c:numFmt formatCode="#,##0" sourceLinked="0"/>
+          <c:txPr>
+            <a:bodyPr/>
+            <a:lstStyle/>
+            <a:p>
+              <a:pPr>
+                <a:defRPr b="0" i="0" strike="noStrike" sz="800" u="none">
+                  <a:solidFill>
+                    <a:srgbClr val="0D1B2A"/>
+                  </a:solidFill>
+                  <a:latin typeface="Arial"/>
+                </a:defRPr>
+              </a:pPr>
+            </a:p>
+          </c:txPr>
+          <c:showLegendKey val="0"/>
+          <c:showVal val="1"/>
+          <c:showCatName val="0"/>
+          <c:showSerName val="0"/>
+          <c:showPercent val="0"/>
+          <c:showBubbleSize val="0"/>
+          <c:showLeaderLines val="0"/>
+        </c:dLbls>
+        <c:gapWidth val="150"/>
+        <c:overlap val="0"/>
+        <c:axId val="2094734554"/>
+        <c:axId val="2094734552"/>
+        <c:axId val="2094734556"/>
+      </c:barChart>
+      <c:catAx>
+        <c:axId val="2094734554"/>
+        <c:scaling>
+          <c:orientation val="minMax"/>
+        </c:scaling>
+        <c:delete val="0"/>
+        <c:axPos val="b"/>
+        <c:numFmt formatCode="General" sourceLinked="1"/>
+        <c:majorTickMark val="out"/>
+        <c:minorTickMark val="none"/>
+        <c:tickLblPos val="low"/>
+        <c:spPr>
+          <a:ln w="12700" cap="flat">
+            <a:solidFill>
+              <a:srgbClr val="888888"/>
+            </a:solidFill>
+            <a:prstDash val="solid"/>
+            <a:round/>
+          </a:ln>
+        </c:spPr>
+        <c:txPr>
+          <a:bodyPr/>
+          <a:lstStyle/>
+          <a:p>
+            <a:pPr>
+              <a:defRPr sz="1200" b="0" i="0" u="none" strike="noStrike">
+                <a:solidFill>
+                  <a:srgbClr val="475569"/>
+                </a:solidFill>
+                <a:latin typeface="Arial"/>
+              </a:defRPr>
+            </a:pPr>
+            <a:endParaRPr lang="en-US"/>
+          </a:p>
+        </c:txPr>
+        <c:crossAx val="2094734552"/>
+        <c:crosses val="autoZero"/>
+        <c:auto val="1"/>
+        <c:lblAlgn val="ctr"/>
+        <c:noMultiLvlLbl val="1"/>
+      </c:catAx>
+      <c:valAx>
+        <c:axId val="2094734552"/>
+        <c:scaling>
+          <c:orientation val="minMax"/>
+          <c:max val="100"/>
+          <c:min val="0"/>
+        </c:scaling>
+        <c:delete val="0"/>
+        <c:axPos val="l"/>
+        <c:majorGridlines>
+          <c:spPr>
+            <a:ln w="6350" cap="flat">
+              <a:solidFill>
+                <a:srgbClr val="E2E8F0"/>
+              </a:solidFill>
+              <a:prstDash val="solid"/>
+              <a:round/>
+            </a:ln>
+          </c:spPr>
+        </c:majorGridlines>
+        <c:numFmt formatCode="General" sourceLinked="0"/>
+        <c:majorTickMark val="out"/>
+        <c:minorTickMark val="none"/>
+        <c:tickLblPos val="nextTo"/>
+        <c:spPr>
+          <a:ln w="12700" cap="flat">
+            <a:solidFill>
+              <a:srgbClr val="888888"/>
+            </a:solidFill>
+            <a:prstDash val="solid"/>
+            <a:round/>
+          </a:ln>
+        </c:spPr>
+        <c:txPr>
+          <a:bodyPr/>
+          <a:lstStyle/>
+          <a:p>
+            <a:pPr>
+              <a:defRPr sz="1200" b="0" i="0" u="none" strike="noStrike">
+                <a:solidFill>
+                  <a:srgbClr val="94A3B8"/>
+                </a:solidFill>
+                <a:latin typeface="Arial"/>
+              </a:defRPr>
+            </a:pPr>
+            <a:endParaRPr lang="en-US"/>
+          </a:p>
+        </c:txPr>
+        <c:crossAx val="2094734554"/>
+        <c:crosses val="autoZero"/>
+        <c:crossBetween val="between"/>
+      </c:valAx>
+      <c:spPr>
+        <a:noFill/>
+        <a:ln>
+          <a:noFill/>
+        </a:ln>
+        <a:effectLst/>
+      </c:spPr>
+    </c:plotArea>
+    <c:legend>
+      <c:legendPos val="b"/>
+      <c:overlay val="0"/>
+      <c:txPr>
+        <a:bodyPr/>
+        <a:lstStyle/>
+        <a:p>
+          <a:pPr>
+            <a:defRPr sz="900">
+              <a:solidFill>
+                <a:srgbClr val="475569"/>
+              </a:solidFill>
+            </a:defRPr>
+          </a:pPr>
+          <a:endParaRPr lang="en-US"/>
+        </a:p>
+      </c:txPr>
+    </c:legend>
+    <c:plotVisOnly val="1"/>
+    <c:dispBlanksAs val="span"/>
+  </c:chart>
+  <c:spPr>
+    <a:solidFill>
+      <a:srgbClr val="F8FAFC"/>
+    </a:solidFill>
+    <a:ln>
+      <a:noFill/>
+    </a:ln>
+    <a:effectLst/>
+  </c:spPr>
+  <c:externalData r:id="rId1">
+    <c:autoUpdate val="0"/>
+  </c:externalData>
+</c:chartSpace>
+</file>
+
 <file path=ppt/notesMasters/notesMaster1.xml><?xml version="1.0" encoding="utf-8"?>
 <p:notesMaster xmlns:a="http://schemas.openxmlformats.org/drawingml/2006/main" xmlns:r="http://schemas.openxmlformats.org/officeDocument/2006/relationships" xmlns:p="http://schemas.openxmlformats.org/presentationml/2006/main">
   <p:cSld>
@@ -3105,6 +3760,534 @@
             <a:fld id="{F7021451-1387-4CA6-816F-3879F97B5CBC}" type="slidenum">
               <a:rPr lang="en-US"/>
               <a:t>13</a:t>
+            </a:fld>
+            <a:endParaRPr lang="en-US"/>
+          </a:p>
+        </p:txBody>
+      </p:sp>
+    </p:spTree>
+    <p:extLst>
+      <p:ext uri="{BB962C8B-B14F-4D97-AF65-F5344CB8AC3E}">
+        <p14:creationId xmlns:p14="http://schemas.microsoft.com/office/powerpoint/2010/main" val="1024086991"/>
+      </p:ext>
+    </p:extLst>
+  </p:cSld>
+  <p:clrMapOvr>
+    <a:masterClrMapping/>
+  </p:clrMapOvr>
+</p:notes>
+</file>
+
+<file path=ppt/notesSlides/notesSlide14.xml><?xml version="1.0" encoding="utf-8"?>
+<p:notes xmlns:a="http://schemas.openxmlformats.org/drawingml/2006/main" xmlns:r="http://schemas.openxmlformats.org/officeDocument/2006/relationships" xmlns:p="http://schemas.openxmlformats.org/presentationml/2006/main">
+  <p:cSld>
+    <p:spTree>
+      <p:nvGrpSpPr>
+        <p:cNvPr id="1" name=""/>
+        <p:cNvGrpSpPr/>
+        <p:nvPr/>
+      </p:nvGrpSpPr>
+      <p:grpSpPr>
+        <a:xfrm>
+          <a:off x="0" y="0"/>
+          <a:ext cx="0" cy="0"/>
+          <a:chOff x="0" y="0"/>
+          <a:chExt cx="0" cy="0"/>
+        </a:xfrm>
+      </p:grpSpPr>
+      <p:sp>
+        <p:nvSpPr>
+          <p:cNvPr id="2" name="Slide Image Placeholder 1"/>
+          <p:cNvSpPr>
+            <a:spLocks noGrp="1" noRot="1" noChangeAspect="1"/>
+          </p:cNvSpPr>
+          <p:nvPr>
+            <p:ph type="sldImg"/>
+          </p:nvPr>
+        </p:nvSpPr>
+        <p:spPr/>
+      </p:sp>
+      <p:sp>
+        <p:nvSpPr>
+          <p:cNvPr id="3" name="Notes Placeholder 2"/>
+          <p:cNvSpPr>
+            <a:spLocks noGrp="1"/>
+          </p:cNvSpPr>
+          <p:nvPr>
+            <p:ph type="body" idx="1"/>
+          </p:nvPr>
+        </p:nvSpPr>
+        <p:spPr/>
+        <p:txBody>
+          <a:bodyPr/>
+          <a:lstStyle/>
+          <a:p>
+            <a:r>
+              <a:rPr lang="en-US" dirty="0"/>
+              <a:t/>
+            </a:r>
+            <a:endParaRPr lang="en-US" dirty="0"/>
+          </a:p>
+        </p:txBody>
+      </p:sp>
+      <p:sp>
+        <p:nvSpPr>
+          <p:cNvPr id="4" name="Slide Number Placeholder 3"/>
+          <p:cNvSpPr>
+            <a:spLocks noGrp="1"/>
+          </p:cNvSpPr>
+          <p:nvPr>
+            <p:ph type="sldNum" sz="quarter" idx="10"/>
+          </p:nvPr>
+        </p:nvSpPr>
+        <p:spPr/>
+        <p:txBody>
+          <a:bodyPr/>
+          <a:lstStyle/>
+          <a:p>
+            <a:fld id="{F7021451-1387-4CA6-816F-3879F97B5CBC}" type="slidenum">
+              <a:rPr lang="en-US"/>
+              <a:t>14</a:t>
+            </a:fld>
+            <a:endParaRPr lang="en-US"/>
+          </a:p>
+        </p:txBody>
+      </p:sp>
+    </p:spTree>
+    <p:extLst>
+      <p:ext uri="{BB962C8B-B14F-4D97-AF65-F5344CB8AC3E}">
+        <p14:creationId xmlns:p14="http://schemas.microsoft.com/office/powerpoint/2010/main" val="1024086991"/>
+      </p:ext>
+    </p:extLst>
+  </p:cSld>
+  <p:clrMapOvr>
+    <a:masterClrMapping/>
+  </p:clrMapOvr>
+</p:notes>
+</file>
+
+<file path=ppt/notesSlides/notesSlide15.xml><?xml version="1.0" encoding="utf-8"?>
+<p:notes xmlns:a="http://schemas.openxmlformats.org/drawingml/2006/main" xmlns:r="http://schemas.openxmlformats.org/officeDocument/2006/relationships" xmlns:p="http://schemas.openxmlformats.org/presentationml/2006/main">
+  <p:cSld>
+    <p:spTree>
+      <p:nvGrpSpPr>
+        <p:cNvPr id="1" name=""/>
+        <p:cNvGrpSpPr/>
+        <p:nvPr/>
+      </p:nvGrpSpPr>
+      <p:grpSpPr>
+        <a:xfrm>
+          <a:off x="0" y="0"/>
+          <a:ext cx="0" cy="0"/>
+          <a:chOff x="0" y="0"/>
+          <a:chExt cx="0" cy="0"/>
+        </a:xfrm>
+      </p:grpSpPr>
+      <p:sp>
+        <p:nvSpPr>
+          <p:cNvPr id="2" name="Slide Image Placeholder 1"/>
+          <p:cNvSpPr>
+            <a:spLocks noGrp="1" noRot="1" noChangeAspect="1"/>
+          </p:cNvSpPr>
+          <p:nvPr>
+            <p:ph type="sldImg"/>
+          </p:nvPr>
+        </p:nvSpPr>
+        <p:spPr/>
+      </p:sp>
+      <p:sp>
+        <p:nvSpPr>
+          <p:cNvPr id="3" name="Notes Placeholder 2"/>
+          <p:cNvSpPr>
+            <a:spLocks noGrp="1"/>
+          </p:cNvSpPr>
+          <p:nvPr>
+            <p:ph type="body" idx="1"/>
+          </p:nvPr>
+        </p:nvSpPr>
+        <p:spPr/>
+        <p:txBody>
+          <a:bodyPr/>
+          <a:lstStyle/>
+          <a:p>
+            <a:r>
+              <a:rPr lang="en-US" dirty="0"/>
+              <a:t/>
+            </a:r>
+            <a:endParaRPr lang="en-US" dirty="0"/>
+          </a:p>
+        </p:txBody>
+      </p:sp>
+      <p:sp>
+        <p:nvSpPr>
+          <p:cNvPr id="4" name="Slide Number Placeholder 3"/>
+          <p:cNvSpPr>
+            <a:spLocks noGrp="1"/>
+          </p:cNvSpPr>
+          <p:nvPr>
+            <p:ph type="sldNum" sz="quarter" idx="10"/>
+          </p:nvPr>
+        </p:nvSpPr>
+        <p:spPr/>
+        <p:txBody>
+          <a:bodyPr/>
+          <a:lstStyle/>
+          <a:p>
+            <a:fld id="{F7021451-1387-4CA6-816F-3879F97B5CBC}" type="slidenum">
+              <a:rPr lang="en-US"/>
+              <a:t>15</a:t>
+            </a:fld>
+            <a:endParaRPr lang="en-US"/>
+          </a:p>
+        </p:txBody>
+      </p:sp>
+    </p:spTree>
+    <p:extLst>
+      <p:ext uri="{BB962C8B-B14F-4D97-AF65-F5344CB8AC3E}">
+        <p14:creationId xmlns:p14="http://schemas.microsoft.com/office/powerpoint/2010/main" val="1024086991"/>
+      </p:ext>
+    </p:extLst>
+  </p:cSld>
+  <p:clrMapOvr>
+    <a:masterClrMapping/>
+  </p:clrMapOvr>
+</p:notes>
+</file>
+
+<file path=ppt/notesSlides/notesSlide16.xml><?xml version="1.0" encoding="utf-8"?>
+<p:notes xmlns:a="http://schemas.openxmlformats.org/drawingml/2006/main" xmlns:r="http://schemas.openxmlformats.org/officeDocument/2006/relationships" xmlns:p="http://schemas.openxmlformats.org/presentationml/2006/main">
+  <p:cSld>
+    <p:spTree>
+      <p:nvGrpSpPr>
+        <p:cNvPr id="1" name=""/>
+        <p:cNvGrpSpPr/>
+        <p:nvPr/>
+      </p:nvGrpSpPr>
+      <p:grpSpPr>
+        <a:xfrm>
+          <a:off x="0" y="0"/>
+          <a:ext cx="0" cy="0"/>
+          <a:chOff x="0" y="0"/>
+          <a:chExt cx="0" cy="0"/>
+        </a:xfrm>
+      </p:grpSpPr>
+      <p:sp>
+        <p:nvSpPr>
+          <p:cNvPr id="2" name="Slide Image Placeholder 1"/>
+          <p:cNvSpPr>
+            <a:spLocks noGrp="1" noRot="1" noChangeAspect="1"/>
+          </p:cNvSpPr>
+          <p:nvPr>
+            <p:ph type="sldImg"/>
+          </p:nvPr>
+        </p:nvSpPr>
+        <p:spPr/>
+      </p:sp>
+      <p:sp>
+        <p:nvSpPr>
+          <p:cNvPr id="3" name="Notes Placeholder 2"/>
+          <p:cNvSpPr>
+            <a:spLocks noGrp="1"/>
+          </p:cNvSpPr>
+          <p:nvPr>
+            <p:ph type="body" idx="1"/>
+          </p:nvPr>
+        </p:nvSpPr>
+        <p:spPr/>
+        <p:txBody>
+          <a:bodyPr/>
+          <a:lstStyle/>
+          <a:p>
+            <a:r>
+              <a:rPr lang="en-US" dirty="0"/>
+              <a:t/>
+            </a:r>
+            <a:endParaRPr lang="en-US" dirty="0"/>
+          </a:p>
+        </p:txBody>
+      </p:sp>
+      <p:sp>
+        <p:nvSpPr>
+          <p:cNvPr id="4" name="Slide Number Placeholder 3"/>
+          <p:cNvSpPr>
+            <a:spLocks noGrp="1"/>
+          </p:cNvSpPr>
+          <p:nvPr>
+            <p:ph type="sldNum" sz="quarter" idx="10"/>
+          </p:nvPr>
+        </p:nvSpPr>
+        <p:spPr/>
+        <p:txBody>
+          <a:bodyPr/>
+          <a:lstStyle/>
+          <a:p>
+            <a:fld id="{F7021451-1387-4CA6-816F-3879F97B5CBC}" type="slidenum">
+              <a:rPr lang="en-US"/>
+              <a:t>16</a:t>
+            </a:fld>
+            <a:endParaRPr lang="en-US"/>
+          </a:p>
+        </p:txBody>
+      </p:sp>
+    </p:spTree>
+    <p:extLst>
+      <p:ext uri="{BB962C8B-B14F-4D97-AF65-F5344CB8AC3E}">
+        <p14:creationId xmlns:p14="http://schemas.microsoft.com/office/powerpoint/2010/main" val="1024086991"/>
+      </p:ext>
+    </p:extLst>
+  </p:cSld>
+  <p:clrMapOvr>
+    <a:masterClrMapping/>
+  </p:clrMapOvr>
+</p:notes>
+</file>
+
+<file path=ppt/notesSlides/notesSlide17.xml><?xml version="1.0" encoding="utf-8"?>
+<p:notes xmlns:a="http://schemas.openxmlformats.org/drawingml/2006/main" xmlns:r="http://schemas.openxmlformats.org/officeDocument/2006/relationships" xmlns:p="http://schemas.openxmlformats.org/presentationml/2006/main">
+  <p:cSld>
+    <p:spTree>
+      <p:nvGrpSpPr>
+        <p:cNvPr id="1" name=""/>
+        <p:cNvGrpSpPr/>
+        <p:nvPr/>
+      </p:nvGrpSpPr>
+      <p:grpSpPr>
+        <a:xfrm>
+          <a:off x="0" y="0"/>
+          <a:ext cx="0" cy="0"/>
+          <a:chOff x="0" y="0"/>
+          <a:chExt cx="0" cy="0"/>
+        </a:xfrm>
+      </p:grpSpPr>
+      <p:sp>
+        <p:nvSpPr>
+          <p:cNvPr id="2" name="Slide Image Placeholder 1"/>
+          <p:cNvSpPr>
+            <a:spLocks noGrp="1" noRot="1" noChangeAspect="1"/>
+          </p:cNvSpPr>
+          <p:nvPr>
+            <p:ph type="sldImg"/>
+          </p:nvPr>
+        </p:nvSpPr>
+        <p:spPr/>
+      </p:sp>
+      <p:sp>
+        <p:nvSpPr>
+          <p:cNvPr id="3" name="Notes Placeholder 2"/>
+          <p:cNvSpPr>
+            <a:spLocks noGrp="1"/>
+          </p:cNvSpPr>
+          <p:nvPr>
+            <p:ph type="body" idx="1"/>
+          </p:nvPr>
+        </p:nvSpPr>
+        <p:spPr/>
+        <p:txBody>
+          <a:bodyPr/>
+          <a:lstStyle/>
+          <a:p>
+            <a:r>
+              <a:rPr lang="en-US" dirty="0"/>
+              <a:t/>
+            </a:r>
+            <a:endParaRPr lang="en-US" dirty="0"/>
+          </a:p>
+        </p:txBody>
+      </p:sp>
+      <p:sp>
+        <p:nvSpPr>
+          <p:cNvPr id="4" name="Slide Number Placeholder 3"/>
+          <p:cNvSpPr>
+            <a:spLocks noGrp="1"/>
+          </p:cNvSpPr>
+          <p:nvPr>
+            <p:ph type="sldNum" sz="quarter" idx="10"/>
+          </p:nvPr>
+        </p:nvSpPr>
+        <p:spPr/>
+        <p:txBody>
+          <a:bodyPr/>
+          <a:lstStyle/>
+          <a:p>
+            <a:fld id="{F7021451-1387-4CA6-816F-3879F97B5CBC}" type="slidenum">
+              <a:rPr lang="en-US"/>
+              <a:t>17</a:t>
+            </a:fld>
+            <a:endParaRPr lang="en-US"/>
+          </a:p>
+        </p:txBody>
+      </p:sp>
+    </p:spTree>
+    <p:extLst>
+      <p:ext uri="{BB962C8B-B14F-4D97-AF65-F5344CB8AC3E}">
+        <p14:creationId xmlns:p14="http://schemas.microsoft.com/office/powerpoint/2010/main" val="1024086991"/>
+      </p:ext>
+    </p:extLst>
+  </p:cSld>
+  <p:clrMapOvr>
+    <a:masterClrMapping/>
+  </p:clrMapOvr>
+</p:notes>
+</file>
+
+<file path=ppt/notesSlides/notesSlide18.xml><?xml version="1.0" encoding="utf-8"?>
+<p:notes xmlns:a="http://schemas.openxmlformats.org/drawingml/2006/main" xmlns:r="http://schemas.openxmlformats.org/officeDocument/2006/relationships" xmlns:p="http://schemas.openxmlformats.org/presentationml/2006/main">
+  <p:cSld>
+    <p:spTree>
+      <p:nvGrpSpPr>
+        <p:cNvPr id="1" name=""/>
+        <p:cNvGrpSpPr/>
+        <p:nvPr/>
+      </p:nvGrpSpPr>
+      <p:grpSpPr>
+        <a:xfrm>
+          <a:off x="0" y="0"/>
+          <a:ext cx="0" cy="0"/>
+          <a:chOff x="0" y="0"/>
+          <a:chExt cx="0" cy="0"/>
+        </a:xfrm>
+      </p:grpSpPr>
+      <p:sp>
+        <p:nvSpPr>
+          <p:cNvPr id="2" name="Slide Image Placeholder 1"/>
+          <p:cNvSpPr>
+            <a:spLocks noGrp="1" noRot="1" noChangeAspect="1"/>
+          </p:cNvSpPr>
+          <p:nvPr>
+            <p:ph type="sldImg"/>
+          </p:nvPr>
+        </p:nvSpPr>
+        <p:spPr/>
+      </p:sp>
+      <p:sp>
+        <p:nvSpPr>
+          <p:cNvPr id="3" name="Notes Placeholder 2"/>
+          <p:cNvSpPr>
+            <a:spLocks noGrp="1"/>
+          </p:cNvSpPr>
+          <p:nvPr>
+            <p:ph type="body" idx="1"/>
+          </p:nvPr>
+        </p:nvSpPr>
+        <p:spPr/>
+        <p:txBody>
+          <a:bodyPr/>
+          <a:lstStyle/>
+          <a:p>
+            <a:r>
+              <a:rPr lang="en-US" dirty="0"/>
+              <a:t/>
+            </a:r>
+            <a:endParaRPr lang="en-US" dirty="0"/>
+          </a:p>
+        </p:txBody>
+      </p:sp>
+      <p:sp>
+        <p:nvSpPr>
+          <p:cNvPr id="4" name="Slide Number Placeholder 3"/>
+          <p:cNvSpPr>
+            <a:spLocks noGrp="1"/>
+          </p:cNvSpPr>
+          <p:nvPr>
+            <p:ph type="sldNum" sz="quarter" idx="10"/>
+          </p:nvPr>
+        </p:nvSpPr>
+        <p:spPr/>
+        <p:txBody>
+          <a:bodyPr/>
+          <a:lstStyle/>
+          <a:p>
+            <a:fld id="{F7021451-1387-4CA6-816F-3879F97B5CBC}" type="slidenum">
+              <a:rPr lang="en-US"/>
+              <a:t>18</a:t>
+            </a:fld>
+            <a:endParaRPr lang="en-US"/>
+          </a:p>
+        </p:txBody>
+      </p:sp>
+    </p:spTree>
+    <p:extLst>
+      <p:ext uri="{BB962C8B-B14F-4D97-AF65-F5344CB8AC3E}">
+        <p14:creationId xmlns:p14="http://schemas.microsoft.com/office/powerpoint/2010/main" val="1024086991"/>
+      </p:ext>
+    </p:extLst>
+  </p:cSld>
+  <p:clrMapOvr>
+    <a:masterClrMapping/>
+  </p:clrMapOvr>
+</p:notes>
+</file>
+
+<file path=ppt/notesSlides/notesSlide19.xml><?xml version="1.0" encoding="utf-8"?>
+<p:notes xmlns:a="http://schemas.openxmlformats.org/drawingml/2006/main" xmlns:r="http://schemas.openxmlformats.org/officeDocument/2006/relationships" xmlns:p="http://schemas.openxmlformats.org/presentationml/2006/main">
+  <p:cSld>
+    <p:spTree>
+      <p:nvGrpSpPr>
+        <p:cNvPr id="1" name=""/>
+        <p:cNvGrpSpPr/>
+        <p:nvPr/>
+      </p:nvGrpSpPr>
+      <p:grpSpPr>
+        <a:xfrm>
+          <a:off x="0" y="0"/>
+          <a:ext cx="0" cy="0"/>
+          <a:chOff x="0" y="0"/>
+          <a:chExt cx="0" cy="0"/>
+        </a:xfrm>
+      </p:grpSpPr>
+      <p:sp>
+        <p:nvSpPr>
+          <p:cNvPr id="2" name="Slide Image Placeholder 1"/>
+          <p:cNvSpPr>
+            <a:spLocks noGrp="1" noRot="1" noChangeAspect="1"/>
+          </p:cNvSpPr>
+          <p:nvPr>
+            <p:ph type="sldImg"/>
+          </p:nvPr>
+        </p:nvSpPr>
+        <p:spPr/>
+      </p:sp>
+      <p:sp>
+        <p:nvSpPr>
+          <p:cNvPr id="3" name="Notes Placeholder 2"/>
+          <p:cNvSpPr>
+            <a:spLocks noGrp="1"/>
+          </p:cNvSpPr>
+          <p:nvPr>
+            <p:ph type="body" idx="1"/>
+          </p:nvPr>
+        </p:nvSpPr>
+        <p:spPr/>
+        <p:txBody>
+          <a:bodyPr/>
+          <a:lstStyle/>
+          <a:p>
+            <a:r>
+              <a:rPr lang="en-US" dirty="0"/>
+              <a:t/>
+            </a:r>
+            <a:endParaRPr lang="en-US" dirty="0"/>
+          </a:p>
+        </p:txBody>
+      </p:sp>
+      <p:sp>
+        <p:nvSpPr>
+          <p:cNvPr id="4" name="Slide Number Placeholder 3"/>
+          <p:cNvSpPr>
+            <a:spLocks noGrp="1"/>
+          </p:cNvSpPr>
+          <p:nvPr>
+            <p:ph type="sldNum" sz="quarter" idx="10"/>
+          </p:nvPr>
+        </p:nvSpPr>
+        <p:spPr/>
+        <p:txBody>
+          <a:bodyPr/>
+          <a:lstStyle/>
+          <a:p>
+            <a:fld id="{F7021451-1387-4CA6-816F-3879F97B5CBC}" type="slidenum">
+              <a:rPr lang="en-US"/>
+              <a:t>19</a:t>
             </a:fld>
             <a:endParaRPr lang="en-US"/>
           </a:p>
@@ -10728,6 +11911,6455 @@
     <p:bg>
       <p:bgPr>
         <a:solidFill>
+          <a:srgbClr val="F8FAFC"/>
+        </a:solidFill>
+      </p:bgPr>
+    </p:bg>
+    <p:spTree>
+      <p:nvGrpSpPr>
+        <p:cNvPr id="1" name=""/>
+        <p:cNvGrpSpPr/>
+        <p:nvPr/>
+      </p:nvGrpSpPr>
+      <p:grpSpPr>
+        <a:xfrm>
+          <a:off x="0" y="0"/>
+          <a:ext cx="0" cy="0"/>
+          <a:chOff x="0" y="0"/>
+          <a:chExt cx="0" cy="0"/>
+        </a:xfrm>
+      </p:grpSpPr>
+      <p:sp>
+        <p:nvSpPr>
+          <p:cNvPr id="2" name="Text 0"/>
+          <p:cNvSpPr/>
+          <p:nvPr/>
+        </p:nvSpPr>
+        <p:spPr>
+          <a:xfrm>
+            <a:off x="457200" y="201168"/>
+            <a:ext cx="8229600" cy="256032"/>
+          </a:xfrm>
+          <a:prstGeom prst="rect">
+            <a:avLst/>
+          </a:prstGeom>
+          <a:noFill/>
+          <a:ln/>
+        </p:spPr>
+        <p:txBody>
+          <a:bodyPr wrap="square" lIns="0" tIns="0" rIns="0" bIns="0" rtlCol="0" anchor="ctr"/>
+          <a:lstStyle/>
+          <a:p>
+            <a:pPr indent="0" marL="0">
+              <a:buNone/>
+            </a:pPr>
+            <a:r>
+              <a:rPr lang="en-US" sz="900" b="1" spc="300" kern="0" dirty="0">
+                <a:solidFill>
+                  <a:srgbClr val="00B4D8"/>
+                </a:solidFill>
+              </a:rPr>
+              <a:t>LOCAL BENCHMARK — MEASURED ON-DEVICE</a:t>
+            </a:r>
+            <a:endParaRPr lang="en-US" sz="900" dirty="0"/>
+          </a:p>
+        </p:txBody>
+      </p:sp>
+      <p:sp>
+        <p:nvSpPr>
+          <p:cNvPr id="3" name="Text 1"/>
+          <p:cNvSpPr/>
+          <p:nvPr/>
+        </p:nvSpPr>
+        <p:spPr>
+          <a:xfrm>
+            <a:off x="457200" y="502920"/>
+            <a:ext cx="8229600" cy="457200"/>
+          </a:xfrm>
+          <a:prstGeom prst="rect">
+            <a:avLst/>
+          </a:prstGeom>
+          <a:noFill/>
+          <a:ln/>
+        </p:spPr>
+        <p:txBody>
+          <a:bodyPr wrap="square" lIns="0" tIns="0" rIns="0" bIns="0" rtlCol="0" anchor="ctr"/>
+          <a:lstStyle/>
+          <a:p>
+            <a:pPr indent="0" marL="0">
+              <a:buNone/>
+            </a:pPr>
+            <a:r>
+              <a:rPr lang="en-US" sz="2800" b="1" dirty="0">
+                <a:solidFill>
+                  <a:srgbClr val="0D1B2A"/>
+                </a:solidFill>
+                <a:latin typeface="Georgia" pitchFamily="34" charset="0"/>
+                <a:ea typeface="Georgia" pitchFamily="34" charset="-122"/>
+                <a:cs typeface="Georgia" pitchFamily="34" charset="-120"/>
+              </a:rPr>
+              <a:t>What We Actually Ran</a:t>
+            </a:r>
+            <a:endParaRPr lang="en-US" sz="2800" dirty="0"/>
+          </a:p>
+        </p:txBody>
+      </p:sp>
+      <p:sp>
+        <p:nvSpPr>
+          <p:cNvPr id="4" name="Text 2"/>
+          <p:cNvSpPr/>
+          <p:nvPr/>
+        </p:nvSpPr>
+        <p:spPr>
+          <a:xfrm>
+            <a:off x="457200" y="1024128"/>
+            <a:ext cx="8229600" cy="228600"/>
+          </a:xfrm>
+          <a:prstGeom prst="rect">
+            <a:avLst/>
+          </a:prstGeom>
+          <a:noFill/>
+          <a:ln/>
+        </p:spPr>
+        <p:txBody>
+          <a:bodyPr wrap="square" lIns="0" tIns="0" rIns="0" bIns="0" rtlCol="0" anchor="ctr"/>
+          <a:lstStyle/>
+          <a:p>
+            <a:pPr indent="0" marL="0">
+              <a:buNone/>
+            </a:pPr>
+            <a:r>
+              <a:rPr lang="en-US" sz="1100" i="1" dirty="0">
+                <a:solidFill>
+                  <a:srgbClr val="475569"/>
+                </a:solidFill>
+              </a:rPr>
+              <a:t>Hardware: NVIDIA RTX 4070 Ti Super (16 GB) · 47 GB RAM · Ollama · Windows 11</a:t>
+            </a:r>
+            <a:endParaRPr lang="en-US" sz="1100" dirty="0"/>
+          </a:p>
+        </p:txBody>
+      </p:sp>
+      <p:sp>
+        <p:nvSpPr>
+          <p:cNvPr id="5" name="Shape 3"/>
+          <p:cNvSpPr/>
+          <p:nvPr/>
+        </p:nvSpPr>
+        <p:spPr>
+          <a:xfrm>
+            <a:off x="457200" y="1371600"/>
+            <a:ext cx="4023360" cy="1554480"/>
+          </a:xfrm>
+          <a:prstGeom prst="rect">
+            <a:avLst/>
+          </a:prstGeom>
+          <a:solidFill>
+            <a:srgbClr val="FFFFFF"/>
+          </a:solidFill>
+          <a:ln w="6350">
+            <a:solidFill>
+              <a:srgbClr val="E2E8F0"/>
+            </a:solidFill>
+            <a:prstDash val="solid"/>
+          </a:ln>
+          <a:effectLst>
+            <a:outerShdw sx="100000" sy="100000" kx="0" ky="0" algn="bl" rotWithShape="0" blurRad="101600" dist="38100" dir="8100000">
+              <a:srgbClr val="000000">
+                <a:alpha val="10000"/>
+              </a:srgbClr>
+            </a:outerShdw>
+          </a:effectLst>
+        </p:spPr>
+      </p:sp>
+      <p:sp>
+        <p:nvSpPr>
+          <p:cNvPr id="6" name="Shape 4"/>
+          <p:cNvSpPr/>
+          <p:nvPr/>
+        </p:nvSpPr>
+        <p:spPr>
+          <a:xfrm>
+            <a:off x="457200" y="1371600"/>
+            <a:ext cx="54864" cy="1554480"/>
+          </a:xfrm>
+          <a:prstGeom prst="rect">
+            <a:avLst/>
+          </a:prstGeom>
+          <a:solidFill>
+            <a:srgbClr val="FF6B35"/>
+          </a:solidFill>
+          <a:ln w="12700">
+            <a:solidFill>
+              <a:srgbClr val="FF6B35"/>
+            </a:solidFill>
+            <a:prstDash val="solid"/>
+          </a:ln>
+        </p:spPr>
+      </p:sp>
+      <p:sp>
+        <p:nvSpPr>
+          <p:cNvPr id="7" name="Text 5"/>
+          <p:cNvSpPr/>
+          <p:nvPr/>
+        </p:nvSpPr>
+        <p:spPr>
+          <a:xfrm>
+            <a:off x="640080" y="1508760"/>
+            <a:ext cx="3657600" cy="274320"/>
+          </a:xfrm>
+          <a:prstGeom prst="rect">
+            <a:avLst/>
+          </a:prstGeom>
+          <a:noFill/>
+          <a:ln/>
+        </p:spPr>
+        <p:txBody>
+          <a:bodyPr wrap="square" lIns="0" tIns="0" rIns="0" bIns="0" rtlCol="0" anchor="ctr"/>
+          <a:lstStyle/>
+          <a:p>
+            <a:pPr indent="0" marL="0">
+              <a:buNone/>
+            </a:pPr>
+            <a:r>
+              <a:rPr lang="en-US" sz="1400" b="1" dirty="0">
+                <a:solidFill>
+                  <a:srgbClr val="0D1B2A"/>
+                </a:solidFill>
+              </a:rPr>
+              <a:t>Qwen2.5-Coder 7B</a:t>
+            </a:r>
+            <a:endParaRPr lang="en-US" sz="1400" dirty="0"/>
+          </a:p>
+        </p:txBody>
+      </p:sp>
+      <p:sp>
+        <p:nvSpPr>
+          <p:cNvPr id="8" name="Text 6"/>
+          <p:cNvSpPr/>
+          <p:nvPr/>
+        </p:nvSpPr>
+        <p:spPr>
+          <a:xfrm>
+            <a:off x="640080" y="1828800"/>
+            <a:ext cx="3657600" cy="228600"/>
+          </a:xfrm>
+          <a:prstGeom prst="rect">
+            <a:avLst/>
+          </a:prstGeom>
+          <a:noFill/>
+          <a:ln/>
+        </p:spPr>
+        <p:txBody>
+          <a:bodyPr wrap="square" lIns="0" tIns="0" rIns="0" bIns="0" rtlCol="0" anchor="ctr"/>
+          <a:lstStyle/>
+          <a:p>
+            <a:pPr indent="0" marL="0">
+              <a:buNone/>
+            </a:pPr>
+            <a:r>
+              <a:rPr lang="en-US" sz="900" dirty="0">
+                <a:solidFill>
+                  <a:srgbClr val="94A3B8"/>
+                </a:solidFill>
+                <a:latin typeface="Consolas" pitchFamily="34" charset="0"/>
+                <a:ea typeface="Consolas" pitchFamily="34" charset="-122"/>
+                <a:cs typeface="Consolas" pitchFamily="34" charset="-120"/>
+              </a:rPr>
+              <a:t>qwen2.5-coder:7b-instruct-q4_K_M</a:t>
+            </a:r>
+            <a:endParaRPr lang="en-US" sz="900" dirty="0"/>
+          </a:p>
+        </p:txBody>
+      </p:sp>
+      <p:sp>
+        <p:nvSpPr>
+          <p:cNvPr id="9" name="Text 7"/>
+          <p:cNvSpPr/>
+          <p:nvPr/>
+        </p:nvSpPr>
+        <p:spPr>
+          <a:xfrm>
+            <a:off x="640080" y="2148840"/>
+            <a:ext cx="3657600" cy="274320"/>
+          </a:xfrm>
+          <a:prstGeom prst="rect">
+            <a:avLst/>
+          </a:prstGeom>
+          <a:noFill/>
+          <a:ln/>
+        </p:spPr>
+        <p:txBody>
+          <a:bodyPr wrap="square" lIns="0" tIns="0" rIns="0" bIns="0" rtlCol="0" anchor="ctr"/>
+          <a:lstStyle/>
+          <a:p>
+            <a:pPr indent="0" marL="0">
+              <a:buNone/>
+            </a:pPr>
+            <a:r>
+              <a:rPr lang="en-US" sz="1100" b="1" dirty="0">
+                <a:solidFill>
+                  <a:srgbClr val="475569"/>
+                </a:solidFill>
+              </a:rPr>
+              <a:t>VRAM: </a:t>
+            </a:r>
+            <a:pPr indent="0" marL="0">
+              <a:buNone/>
+            </a:pPr>
+            <a:r>
+              <a:rPr lang="en-US" sz="1100" dirty="0">
+                <a:solidFill>
+                  <a:srgbClr val="475569"/>
+                </a:solidFill>
+              </a:rPr>
+              <a:t>~5 GB · fits GPU</a:t>
+            </a:r>
+            <a:endParaRPr lang="en-US" sz="1100" dirty="0"/>
+          </a:p>
+        </p:txBody>
+      </p:sp>
+      <p:sp>
+        <p:nvSpPr>
+          <p:cNvPr id="10" name="Text 8"/>
+          <p:cNvSpPr/>
+          <p:nvPr/>
+        </p:nvSpPr>
+        <p:spPr>
+          <a:xfrm>
+            <a:off x="640080" y="2468880"/>
+            <a:ext cx="3657600" cy="274320"/>
+          </a:xfrm>
+          <a:prstGeom prst="rect">
+            <a:avLst/>
+          </a:prstGeom>
+          <a:noFill/>
+          <a:ln/>
+        </p:spPr>
+        <p:txBody>
+          <a:bodyPr wrap="square" lIns="0" tIns="0" rIns="0" bIns="0" rtlCol="0" anchor="ctr"/>
+          <a:lstStyle/>
+          <a:p>
+            <a:pPr indent="0" marL="0">
+              <a:buNone/>
+            </a:pPr>
+            <a:r>
+              <a:rPr lang="en-US" sz="1100" b="1" dirty="0">
+                <a:solidFill>
+                  <a:srgbClr val="475569"/>
+                </a:solidFill>
+              </a:rPr>
+              <a:t>License: </a:t>
+            </a:r>
+            <a:pPr indent="0" marL="0">
+              <a:buNone/>
+            </a:pPr>
+            <a:r>
+              <a:rPr lang="en-US" sz="1100" dirty="0">
+                <a:solidFill>
+                  <a:srgbClr val="475569"/>
+                </a:solidFill>
+              </a:rPr>
+              <a:t>Apache 2.0</a:t>
+            </a:r>
+            <a:endParaRPr lang="en-US" sz="1100" dirty="0"/>
+          </a:p>
+        </p:txBody>
+      </p:sp>
+      <p:sp>
+        <p:nvSpPr>
+          <p:cNvPr id="11" name="Shape 9"/>
+          <p:cNvSpPr/>
+          <p:nvPr/>
+        </p:nvSpPr>
+        <p:spPr>
+          <a:xfrm>
+            <a:off x="4709160" y="1371600"/>
+            <a:ext cx="4023360" cy="1554480"/>
+          </a:xfrm>
+          <a:prstGeom prst="rect">
+            <a:avLst/>
+          </a:prstGeom>
+          <a:solidFill>
+            <a:srgbClr val="FFFFFF"/>
+          </a:solidFill>
+          <a:ln w="6350">
+            <a:solidFill>
+              <a:srgbClr val="E2E8F0"/>
+            </a:solidFill>
+            <a:prstDash val="solid"/>
+          </a:ln>
+          <a:effectLst>
+            <a:outerShdw sx="100000" sy="100000" kx="0" ky="0" algn="bl" rotWithShape="0" blurRad="101600" dist="38100" dir="8100000">
+              <a:srgbClr val="000000">
+                <a:alpha val="10000"/>
+              </a:srgbClr>
+            </a:outerShdw>
+          </a:effectLst>
+        </p:spPr>
+      </p:sp>
+      <p:sp>
+        <p:nvSpPr>
+          <p:cNvPr id="12" name="Shape 10"/>
+          <p:cNvSpPr/>
+          <p:nvPr/>
+        </p:nvSpPr>
+        <p:spPr>
+          <a:xfrm>
+            <a:off x="4709160" y="1371600"/>
+            <a:ext cx="54864" cy="1554480"/>
+          </a:xfrm>
+          <a:prstGeom prst="rect">
+            <a:avLst/>
+          </a:prstGeom>
+          <a:solidFill>
+            <a:srgbClr val="5E8BFF"/>
+          </a:solidFill>
+          <a:ln w="12700">
+            <a:solidFill>
+              <a:srgbClr val="5E8BFF"/>
+            </a:solidFill>
+            <a:prstDash val="solid"/>
+          </a:ln>
+        </p:spPr>
+      </p:sp>
+      <p:sp>
+        <p:nvSpPr>
+          <p:cNvPr id="13" name="Text 11"/>
+          <p:cNvSpPr/>
+          <p:nvPr/>
+        </p:nvSpPr>
+        <p:spPr>
+          <a:xfrm>
+            <a:off x="4892040" y="1508760"/>
+            <a:ext cx="3657600" cy="274320"/>
+          </a:xfrm>
+          <a:prstGeom prst="rect">
+            <a:avLst/>
+          </a:prstGeom>
+          <a:noFill/>
+          <a:ln/>
+        </p:spPr>
+        <p:txBody>
+          <a:bodyPr wrap="square" lIns="0" tIns="0" rIns="0" bIns="0" rtlCol="0" anchor="ctr"/>
+          <a:lstStyle/>
+          <a:p>
+            <a:pPr indent="0" marL="0">
+              <a:buNone/>
+            </a:pPr>
+            <a:r>
+              <a:rPr lang="en-US" sz="1400" b="1" dirty="0">
+                <a:solidFill>
+                  <a:srgbClr val="0D1B2A"/>
+                </a:solidFill>
+              </a:rPr>
+              <a:t>DeepSeek-Coder 6.7B</a:t>
+            </a:r>
+            <a:endParaRPr lang="en-US" sz="1400" dirty="0"/>
+          </a:p>
+        </p:txBody>
+      </p:sp>
+      <p:sp>
+        <p:nvSpPr>
+          <p:cNvPr id="14" name="Text 12"/>
+          <p:cNvSpPr/>
+          <p:nvPr/>
+        </p:nvSpPr>
+        <p:spPr>
+          <a:xfrm>
+            <a:off x="4892040" y="1828800"/>
+            <a:ext cx="3657600" cy="228600"/>
+          </a:xfrm>
+          <a:prstGeom prst="rect">
+            <a:avLst/>
+          </a:prstGeom>
+          <a:noFill/>
+          <a:ln/>
+        </p:spPr>
+        <p:txBody>
+          <a:bodyPr wrap="square" lIns="0" tIns="0" rIns="0" bIns="0" rtlCol="0" anchor="ctr"/>
+          <a:lstStyle/>
+          <a:p>
+            <a:pPr indent="0" marL="0">
+              <a:buNone/>
+            </a:pPr>
+            <a:r>
+              <a:rPr lang="en-US" sz="900" dirty="0">
+                <a:solidFill>
+                  <a:srgbClr val="94A3B8"/>
+                </a:solidFill>
+                <a:latin typeface="Consolas" pitchFamily="34" charset="0"/>
+                <a:ea typeface="Consolas" pitchFamily="34" charset="-122"/>
+                <a:cs typeface="Consolas" pitchFamily="34" charset="-120"/>
+              </a:rPr>
+              <a:t>deepseek-coder:6.7b-instruct-q4_K_M</a:t>
+            </a:r>
+            <a:endParaRPr lang="en-US" sz="900" dirty="0"/>
+          </a:p>
+        </p:txBody>
+      </p:sp>
+      <p:sp>
+        <p:nvSpPr>
+          <p:cNvPr id="15" name="Text 13"/>
+          <p:cNvSpPr/>
+          <p:nvPr/>
+        </p:nvSpPr>
+        <p:spPr>
+          <a:xfrm>
+            <a:off x="4892040" y="2148840"/>
+            <a:ext cx="3657600" cy="274320"/>
+          </a:xfrm>
+          <a:prstGeom prst="rect">
+            <a:avLst/>
+          </a:prstGeom>
+          <a:noFill/>
+          <a:ln/>
+        </p:spPr>
+        <p:txBody>
+          <a:bodyPr wrap="square" lIns="0" tIns="0" rIns="0" bIns="0" rtlCol="0" anchor="ctr"/>
+          <a:lstStyle/>
+          <a:p>
+            <a:pPr indent="0" marL="0">
+              <a:buNone/>
+            </a:pPr>
+            <a:r>
+              <a:rPr lang="en-US" sz="1100" b="1" dirty="0">
+                <a:solidFill>
+                  <a:srgbClr val="475569"/>
+                </a:solidFill>
+              </a:rPr>
+              <a:t>VRAM: </a:t>
+            </a:r>
+            <a:pPr indent="0" marL="0">
+              <a:buNone/>
+            </a:pPr>
+            <a:r>
+              <a:rPr lang="en-US" sz="1100" dirty="0">
+                <a:solidFill>
+                  <a:srgbClr val="475569"/>
+                </a:solidFill>
+              </a:rPr>
+              <a:t>~4.5 GB · fits GPU</a:t>
+            </a:r>
+            <a:endParaRPr lang="en-US" sz="1100" dirty="0"/>
+          </a:p>
+        </p:txBody>
+      </p:sp>
+      <p:sp>
+        <p:nvSpPr>
+          <p:cNvPr id="16" name="Text 14"/>
+          <p:cNvSpPr/>
+          <p:nvPr/>
+        </p:nvSpPr>
+        <p:spPr>
+          <a:xfrm>
+            <a:off x="4892040" y="2468880"/>
+            <a:ext cx="3657600" cy="274320"/>
+          </a:xfrm>
+          <a:prstGeom prst="rect">
+            <a:avLst/>
+          </a:prstGeom>
+          <a:noFill/>
+          <a:ln/>
+        </p:spPr>
+        <p:txBody>
+          <a:bodyPr wrap="square" lIns="0" tIns="0" rIns="0" bIns="0" rtlCol="0" anchor="ctr"/>
+          <a:lstStyle/>
+          <a:p>
+            <a:pPr indent="0" marL="0">
+              <a:buNone/>
+            </a:pPr>
+            <a:r>
+              <a:rPr lang="en-US" sz="1100" b="1" dirty="0">
+                <a:solidFill>
+                  <a:srgbClr val="475569"/>
+                </a:solidFill>
+              </a:rPr>
+              <a:t>License: </a:t>
+            </a:r>
+            <a:pPr indent="0" marL="0">
+              <a:buNone/>
+            </a:pPr>
+            <a:r>
+              <a:rPr lang="en-US" sz="1100" dirty="0">
+                <a:solidFill>
+                  <a:srgbClr val="475569"/>
+                </a:solidFill>
+              </a:rPr>
+              <a:t>DeepSeek/MIT</a:t>
+            </a:r>
+            <a:endParaRPr lang="en-US" sz="1100" dirty="0"/>
+          </a:p>
+        </p:txBody>
+      </p:sp>
+      <p:sp>
+        <p:nvSpPr>
+          <p:cNvPr id="17" name="Shape 15"/>
+          <p:cNvSpPr/>
+          <p:nvPr/>
+        </p:nvSpPr>
+        <p:spPr>
+          <a:xfrm>
+            <a:off x="457200" y="3108960"/>
+            <a:ext cx="4023360" cy="1554480"/>
+          </a:xfrm>
+          <a:prstGeom prst="rect">
+            <a:avLst/>
+          </a:prstGeom>
+          <a:solidFill>
+            <a:srgbClr val="FFFFFF"/>
+          </a:solidFill>
+          <a:ln w="6350">
+            <a:solidFill>
+              <a:srgbClr val="E2E8F0"/>
+            </a:solidFill>
+            <a:prstDash val="solid"/>
+          </a:ln>
+          <a:effectLst>
+            <a:outerShdw sx="100000" sy="100000" kx="0" ky="0" algn="bl" rotWithShape="0" blurRad="101600" dist="38100" dir="8100000">
+              <a:srgbClr val="000000">
+                <a:alpha val="10000"/>
+              </a:srgbClr>
+            </a:outerShdw>
+          </a:effectLst>
+        </p:spPr>
+      </p:sp>
+      <p:sp>
+        <p:nvSpPr>
+          <p:cNvPr id="18" name="Shape 16"/>
+          <p:cNvSpPr/>
+          <p:nvPr/>
+        </p:nvSpPr>
+        <p:spPr>
+          <a:xfrm>
+            <a:off x="457200" y="3108960"/>
+            <a:ext cx="54864" cy="1554480"/>
+          </a:xfrm>
+          <a:prstGeom prst="rect">
+            <a:avLst/>
+          </a:prstGeom>
+          <a:solidFill>
+            <a:srgbClr val="FF6B35"/>
+          </a:solidFill>
+          <a:ln w="12700">
+            <a:solidFill>
+              <a:srgbClr val="FF6B35"/>
+            </a:solidFill>
+            <a:prstDash val="solid"/>
+          </a:ln>
+        </p:spPr>
+      </p:sp>
+      <p:sp>
+        <p:nvSpPr>
+          <p:cNvPr id="19" name="Text 17"/>
+          <p:cNvSpPr/>
+          <p:nvPr/>
+        </p:nvSpPr>
+        <p:spPr>
+          <a:xfrm>
+            <a:off x="640080" y="3246120"/>
+            <a:ext cx="3657600" cy="274320"/>
+          </a:xfrm>
+          <a:prstGeom prst="rect">
+            <a:avLst/>
+          </a:prstGeom>
+          <a:noFill/>
+          <a:ln/>
+        </p:spPr>
+        <p:txBody>
+          <a:bodyPr wrap="square" lIns="0" tIns="0" rIns="0" bIns="0" rtlCol="0" anchor="ctr"/>
+          <a:lstStyle/>
+          <a:p>
+            <a:pPr indent="0" marL="0">
+              <a:buNone/>
+            </a:pPr>
+            <a:r>
+              <a:rPr lang="en-US" sz="1400" b="1" dirty="0">
+                <a:solidFill>
+                  <a:srgbClr val="0D1B2A"/>
+                </a:solidFill>
+              </a:rPr>
+              <a:t>Qwen2.5-Coder 32B</a:t>
+            </a:r>
+            <a:endParaRPr lang="en-US" sz="1400" dirty="0"/>
+          </a:p>
+        </p:txBody>
+      </p:sp>
+      <p:sp>
+        <p:nvSpPr>
+          <p:cNvPr id="20" name="Text 18"/>
+          <p:cNvSpPr/>
+          <p:nvPr/>
+        </p:nvSpPr>
+        <p:spPr>
+          <a:xfrm>
+            <a:off x="640080" y="3566160"/>
+            <a:ext cx="3657600" cy="228600"/>
+          </a:xfrm>
+          <a:prstGeom prst="rect">
+            <a:avLst/>
+          </a:prstGeom>
+          <a:noFill/>
+          <a:ln/>
+        </p:spPr>
+        <p:txBody>
+          <a:bodyPr wrap="square" lIns="0" tIns="0" rIns="0" bIns="0" rtlCol="0" anchor="ctr"/>
+          <a:lstStyle/>
+          <a:p>
+            <a:pPr indent="0" marL="0">
+              <a:buNone/>
+            </a:pPr>
+            <a:r>
+              <a:rPr lang="en-US" sz="900" dirty="0">
+                <a:solidFill>
+                  <a:srgbClr val="94A3B8"/>
+                </a:solidFill>
+                <a:latin typeface="Consolas" pitchFamily="34" charset="0"/>
+                <a:ea typeface="Consolas" pitchFamily="34" charset="-122"/>
+                <a:cs typeface="Consolas" pitchFamily="34" charset="-120"/>
+              </a:rPr>
+              <a:t>qwen2.5-coder:32b-instruct-q4_K_M</a:t>
+            </a:r>
+            <a:endParaRPr lang="en-US" sz="900" dirty="0"/>
+          </a:p>
+        </p:txBody>
+      </p:sp>
+      <p:sp>
+        <p:nvSpPr>
+          <p:cNvPr id="21" name="Text 19"/>
+          <p:cNvSpPr/>
+          <p:nvPr/>
+        </p:nvSpPr>
+        <p:spPr>
+          <a:xfrm>
+            <a:off x="640080" y="3886200"/>
+            <a:ext cx="3657600" cy="274320"/>
+          </a:xfrm>
+          <a:prstGeom prst="rect">
+            <a:avLst/>
+          </a:prstGeom>
+          <a:noFill/>
+          <a:ln/>
+        </p:spPr>
+        <p:txBody>
+          <a:bodyPr wrap="square" lIns="0" tIns="0" rIns="0" bIns="0" rtlCol="0" anchor="ctr"/>
+          <a:lstStyle/>
+          <a:p>
+            <a:pPr indent="0" marL="0">
+              <a:buNone/>
+            </a:pPr>
+            <a:r>
+              <a:rPr lang="en-US" sz="1100" b="1" dirty="0">
+                <a:solidFill>
+                  <a:srgbClr val="475569"/>
+                </a:solidFill>
+              </a:rPr>
+              <a:t>VRAM: </a:t>
+            </a:r>
+            <a:pPr indent="0" marL="0">
+              <a:buNone/>
+            </a:pPr>
+            <a:r>
+              <a:rPr lang="en-US" sz="1100" dirty="0">
+                <a:solidFill>
+                  <a:srgbClr val="475569"/>
+                </a:solidFill>
+              </a:rPr>
+              <a:t>~18 GB · CPU offload</a:t>
+            </a:r>
+            <a:endParaRPr lang="en-US" sz="1100" dirty="0"/>
+          </a:p>
+        </p:txBody>
+      </p:sp>
+      <p:sp>
+        <p:nvSpPr>
+          <p:cNvPr id="22" name="Text 20"/>
+          <p:cNvSpPr/>
+          <p:nvPr/>
+        </p:nvSpPr>
+        <p:spPr>
+          <a:xfrm>
+            <a:off x="640080" y="4206240"/>
+            <a:ext cx="3657600" cy="274320"/>
+          </a:xfrm>
+          <a:prstGeom prst="rect">
+            <a:avLst/>
+          </a:prstGeom>
+          <a:noFill/>
+          <a:ln/>
+        </p:spPr>
+        <p:txBody>
+          <a:bodyPr wrap="square" lIns="0" tIns="0" rIns="0" bIns="0" rtlCol="0" anchor="ctr"/>
+          <a:lstStyle/>
+          <a:p>
+            <a:pPr indent="0" marL="0">
+              <a:buNone/>
+            </a:pPr>
+            <a:r>
+              <a:rPr lang="en-US" sz="1100" b="1" dirty="0">
+                <a:solidFill>
+                  <a:srgbClr val="475569"/>
+                </a:solidFill>
+              </a:rPr>
+              <a:t>License: </a:t>
+            </a:r>
+            <a:pPr indent="0" marL="0">
+              <a:buNone/>
+            </a:pPr>
+            <a:r>
+              <a:rPr lang="en-US" sz="1100" dirty="0">
+                <a:solidFill>
+                  <a:srgbClr val="475569"/>
+                </a:solidFill>
+              </a:rPr>
+              <a:t>Apache 2.0</a:t>
+            </a:r>
+            <a:endParaRPr lang="en-US" sz="1100" dirty="0"/>
+          </a:p>
+        </p:txBody>
+      </p:sp>
+      <p:sp>
+        <p:nvSpPr>
+          <p:cNvPr id="23" name="Shape 21"/>
+          <p:cNvSpPr/>
+          <p:nvPr/>
+        </p:nvSpPr>
+        <p:spPr>
+          <a:xfrm>
+            <a:off x="4709160" y="3108960"/>
+            <a:ext cx="4023360" cy="1554480"/>
+          </a:xfrm>
+          <a:prstGeom prst="rect">
+            <a:avLst/>
+          </a:prstGeom>
+          <a:solidFill>
+            <a:srgbClr val="FFFFFF"/>
+          </a:solidFill>
+          <a:ln w="6350">
+            <a:solidFill>
+              <a:srgbClr val="E2E8F0"/>
+            </a:solidFill>
+            <a:prstDash val="solid"/>
+          </a:ln>
+          <a:effectLst>
+            <a:outerShdw sx="100000" sy="100000" kx="0" ky="0" algn="bl" rotWithShape="0" blurRad="101600" dist="38100" dir="8100000">
+              <a:srgbClr val="000000">
+                <a:alpha val="10000"/>
+              </a:srgbClr>
+            </a:outerShdw>
+          </a:effectLst>
+        </p:spPr>
+      </p:sp>
+      <p:sp>
+        <p:nvSpPr>
+          <p:cNvPr id="24" name="Shape 22"/>
+          <p:cNvSpPr/>
+          <p:nvPr/>
+        </p:nvSpPr>
+        <p:spPr>
+          <a:xfrm>
+            <a:off x="4709160" y="3108960"/>
+            <a:ext cx="54864" cy="1554480"/>
+          </a:xfrm>
+          <a:prstGeom prst="rect">
+            <a:avLst/>
+          </a:prstGeom>
+          <a:solidFill>
+            <a:srgbClr val="5E8BFF"/>
+          </a:solidFill>
+          <a:ln w="12700">
+            <a:solidFill>
+              <a:srgbClr val="5E8BFF"/>
+            </a:solidFill>
+            <a:prstDash val="solid"/>
+          </a:ln>
+        </p:spPr>
+      </p:sp>
+      <p:sp>
+        <p:nvSpPr>
+          <p:cNvPr id="25" name="Text 23"/>
+          <p:cNvSpPr/>
+          <p:nvPr/>
+        </p:nvSpPr>
+        <p:spPr>
+          <a:xfrm>
+            <a:off x="4892040" y="3246120"/>
+            <a:ext cx="3657600" cy="274320"/>
+          </a:xfrm>
+          <a:prstGeom prst="rect">
+            <a:avLst/>
+          </a:prstGeom>
+          <a:noFill/>
+          <a:ln/>
+        </p:spPr>
+        <p:txBody>
+          <a:bodyPr wrap="square" lIns="0" tIns="0" rIns="0" bIns="0" rtlCol="0" anchor="ctr"/>
+          <a:lstStyle/>
+          <a:p>
+            <a:pPr indent="0" marL="0">
+              <a:buNone/>
+            </a:pPr>
+            <a:r>
+              <a:rPr lang="en-US" sz="1400" b="1" dirty="0">
+                <a:solidFill>
+                  <a:srgbClr val="0D1B2A"/>
+                </a:solidFill>
+              </a:rPr>
+              <a:t>DeepSeek-Coder 33B</a:t>
+            </a:r>
+            <a:endParaRPr lang="en-US" sz="1400" dirty="0"/>
+          </a:p>
+        </p:txBody>
+      </p:sp>
+      <p:sp>
+        <p:nvSpPr>
+          <p:cNvPr id="26" name="Text 24"/>
+          <p:cNvSpPr/>
+          <p:nvPr/>
+        </p:nvSpPr>
+        <p:spPr>
+          <a:xfrm>
+            <a:off x="4892040" y="3566160"/>
+            <a:ext cx="3657600" cy="228600"/>
+          </a:xfrm>
+          <a:prstGeom prst="rect">
+            <a:avLst/>
+          </a:prstGeom>
+          <a:noFill/>
+          <a:ln/>
+        </p:spPr>
+        <p:txBody>
+          <a:bodyPr wrap="square" lIns="0" tIns="0" rIns="0" bIns="0" rtlCol="0" anchor="ctr"/>
+          <a:lstStyle/>
+          <a:p>
+            <a:pPr indent="0" marL="0">
+              <a:buNone/>
+            </a:pPr>
+            <a:r>
+              <a:rPr lang="en-US" sz="900" dirty="0">
+                <a:solidFill>
+                  <a:srgbClr val="94A3B8"/>
+                </a:solidFill>
+                <a:latin typeface="Consolas" pitchFamily="34" charset="0"/>
+                <a:ea typeface="Consolas" pitchFamily="34" charset="-122"/>
+                <a:cs typeface="Consolas" pitchFamily="34" charset="-120"/>
+              </a:rPr>
+              <a:t>deepseek-coder:33b-instruct-q4_K_M</a:t>
+            </a:r>
+            <a:endParaRPr lang="en-US" sz="900" dirty="0"/>
+          </a:p>
+        </p:txBody>
+      </p:sp>
+      <p:sp>
+        <p:nvSpPr>
+          <p:cNvPr id="27" name="Text 25"/>
+          <p:cNvSpPr/>
+          <p:nvPr/>
+        </p:nvSpPr>
+        <p:spPr>
+          <a:xfrm>
+            <a:off x="4892040" y="3886200"/>
+            <a:ext cx="3657600" cy="274320"/>
+          </a:xfrm>
+          <a:prstGeom prst="rect">
+            <a:avLst/>
+          </a:prstGeom>
+          <a:noFill/>
+          <a:ln/>
+        </p:spPr>
+        <p:txBody>
+          <a:bodyPr wrap="square" lIns="0" tIns="0" rIns="0" bIns="0" rtlCol="0" anchor="ctr"/>
+          <a:lstStyle/>
+          <a:p>
+            <a:pPr indent="0" marL="0">
+              <a:buNone/>
+            </a:pPr>
+            <a:r>
+              <a:rPr lang="en-US" sz="1100" b="1" dirty="0">
+                <a:solidFill>
+                  <a:srgbClr val="475569"/>
+                </a:solidFill>
+              </a:rPr>
+              <a:t>VRAM: </a:t>
+            </a:r>
+            <a:pPr indent="0" marL="0">
+              <a:buNone/>
+            </a:pPr>
+            <a:r>
+              <a:rPr lang="en-US" sz="1100" dirty="0">
+                <a:solidFill>
+                  <a:srgbClr val="475569"/>
+                </a:solidFill>
+              </a:rPr>
+              <a:t>~19 GB · CPU offload</a:t>
+            </a:r>
+            <a:endParaRPr lang="en-US" sz="1100" dirty="0"/>
+          </a:p>
+        </p:txBody>
+      </p:sp>
+      <p:sp>
+        <p:nvSpPr>
+          <p:cNvPr id="28" name="Text 26"/>
+          <p:cNvSpPr/>
+          <p:nvPr/>
+        </p:nvSpPr>
+        <p:spPr>
+          <a:xfrm>
+            <a:off x="4892040" y="4206240"/>
+            <a:ext cx="3657600" cy="274320"/>
+          </a:xfrm>
+          <a:prstGeom prst="rect">
+            <a:avLst/>
+          </a:prstGeom>
+          <a:noFill/>
+          <a:ln/>
+        </p:spPr>
+        <p:txBody>
+          <a:bodyPr wrap="square" lIns="0" tIns="0" rIns="0" bIns="0" rtlCol="0" anchor="ctr"/>
+          <a:lstStyle/>
+          <a:p>
+            <a:pPr indent="0" marL="0">
+              <a:buNone/>
+            </a:pPr>
+            <a:r>
+              <a:rPr lang="en-US" sz="1100" b="1" dirty="0">
+                <a:solidFill>
+                  <a:srgbClr val="475569"/>
+                </a:solidFill>
+              </a:rPr>
+              <a:t>License: </a:t>
+            </a:r>
+            <a:pPr indent="0" marL="0">
+              <a:buNone/>
+            </a:pPr>
+            <a:r>
+              <a:rPr lang="en-US" sz="1100" dirty="0">
+                <a:solidFill>
+                  <a:srgbClr val="475569"/>
+                </a:solidFill>
+              </a:rPr>
+              <a:t>DeepSeek/MIT</a:t>
+            </a:r>
+            <a:endParaRPr lang="en-US" sz="1100" dirty="0"/>
+          </a:p>
+        </p:txBody>
+      </p:sp>
+      <p:sp>
+        <p:nvSpPr>
+          <p:cNvPr id="29" name="Text 27"/>
+          <p:cNvSpPr/>
+          <p:nvPr/>
+        </p:nvSpPr>
+        <p:spPr>
+          <a:xfrm>
+            <a:off x="457200" y="4892040"/>
+            <a:ext cx="8229600" cy="228600"/>
+          </a:xfrm>
+          <a:prstGeom prst="rect">
+            <a:avLst/>
+          </a:prstGeom>
+          <a:noFill/>
+          <a:ln/>
+        </p:spPr>
+        <p:txBody>
+          <a:bodyPr wrap="square" lIns="0" tIns="0" rIns="0" bIns="0" rtlCol="0" anchor="ctr"/>
+          <a:lstStyle/>
+          <a:p>
+            <a:pPr indent="0" marL="0">
+              <a:buNone/>
+            </a:pPr>
+            <a:r>
+              <a:rPr lang="en-US" sz="900" i="1" dirty="0">
+                <a:solidFill>
+                  <a:srgbClr val="94A3B8"/>
+                </a:solidFill>
+              </a:rPr>
+              <a:t>DeepSeek has no exact 32B — 33B is the closest equivalent. GLM dropped: weights not confirmed for self-host.</a:t>
+            </a:r>
+            <a:endParaRPr lang="en-US" sz="900" dirty="0"/>
+          </a:p>
+        </p:txBody>
+      </p:sp>
+    </p:spTree>
+  </p:cSld>
+  <p:clrMapOvr>
+    <a:masterClrMapping/>
+  </p:clrMapOvr>
+</p:sld>
+</file>
+
+<file path=ppt/slides/slide14.xml><?xml version="1.0" encoding="utf-8"?>
+<p:sld xmlns:a="http://schemas.openxmlformats.org/drawingml/2006/main" xmlns:r="http://schemas.openxmlformats.org/officeDocument/2006/relationships" xmlns:p="http://schemas.openxmlformats.org/presentationml/2006/main">
+  <p:cSld name="Slide 14">
+    <p:bg>
+      <p:bgPr>
+        <a:solidFill>
+          <a:srgbClr val="F8FAFC"/>
+        </a:solidFill>
+      </p:bgPr>
+    </p:bg>
+    <p:spTree>
+      <p:nvGrpSpPr>
+        <p:cNvPr id="1" name=""/>
+        <p:cNvGrpSpPr/>
+        <p:nvPr/>
+      </p:nvGrpSpPr>
+      <p:grpSpPr>
+        <a:xfrm>
+          <a:off x="0" y="0"/>
+          <a:ext cx="0" cy="0"/>
+          <a:chOff x="0" y="0"/>
+          <a:chExt cx="0" cy="0"/>
+        </a:xfrm>
+      </p:grpSpPr>
+      <p:sp>
+        <p:nvSpPr>
+          <p:cNvPr id="2" name="Text 0"/>
+          <p:cNvSpPr/>
+          <p:nvPr/>
+        </p:nvSpPr>
+        <p:spPr>
+          <a:xfrm>
+            <a:off x="457200" y="201168"/>
+            <a:ext cx="8229600" cy="256032"/>
+          </a:xfrm>
+          <a:prstGeom prst="rect">
+            <a:avLst/>
+          </a:prstGeom>
+          <a:noFill/>
+          <a:ln/>
+        </p:spPr>
+        <p:txBody>
+          <a:bodyPr wrap="square" lIns="0" tIns="0" rIns="0" bIns="0" rtlCol="0" anchor="ctr"/>
+          <a:lstStyle/>
+          <a:p>
+            <a:pPr indent="0" marL="0">
+              <a:buNone/>
+            </a:pPr>
+            <a:r>
+              <a:rPr lang="en-US" sz="900" b="1" spc="300" kern="0" dirty="0">
+                <a:solidFill>
+                  <a:srgbClr val="00B4D8"/>
+                </a:solidFill>
+              </a:rPr>
+              <a:t>MEASURED RESULTS — LOCAL RUN</a:t>
+            </a:r>
+            <a:endParaRPr lang="en-US" sz="900" dirty="0"/>
+          </a:p>
+        </p:txBody>
+      </p:sp>
+      <p:sp>
+        <p:nvSpPr>
+          <p:cNvPr id="3" name="Text 1"/>
+          <p:cNvSpPr/>
+          <p:nvPr/>
+        </p:nvSpPr>
+        <p:spPr>
+          <a:xfrm>
+            <a:off x="457200" y="502920"/>
+            <a:ext cx="8229600" cy="457200"/>
+          </a:xfrm>
+          <a:prstGeom prst="rect">
+            <a:avLst/>
+          </a:prstGeom>
+          <a:noFill/>
+          <a:ln/>
+        </p:spPr>
+        <p:txBody>
+          <a:bodyPr wrap="square" lIns="0" tIns="0" rIns="0" bIns="0" rtlCol="0" anchor="ctr"/>
+          <a:lstStyle/>
+          <a:p>
+            <a:pPr indent="0" marL="0">
+              <a:buNone/>
+            </a:pPr>
+            <a:r>
+              <a:rPr lang="en-US" sz="2800" b="1" dirty="0">
+                <a:solidFill>
+                  <a:srgbClr val="0D1B2A"/>
+                </a:solidFill>
+                <a:latin typeface="Georgia" pitchFamily="34" charset="0"/>
+                <a:ea typeface="Georgia" pitchFamily="34" charset="-122"/>
+                <a:cs typeface="Georgia" pitchFamily="34" charset="-120"/>
+              </a:rPr>
+              <a:t>LeetCode &amp; Scheduler — Actual Scores</a:t>
+            </a:r>
+            <a:endParaRPr lang="en-US" sz="2800" dirty="0"/>
+          </a:p>
+        </p:txBody>
+      </p:sp>
+      <p:graphicFrame>
+        <p:nvGraphicFramePr>
+          <p:cNvPr id="4" name="Chart 0" descr=""/>
+          <p:cNvGraphicFramePr/>
+          <p:nvPr/>
+        </p:nvGraphicFramePr>
+        <p:xfrm>
+          <a:off x="365760" y="1097280"/>
+          <a:ext cx="5486400" cy="3657600"/>
+        </p:xfrm>
+        <a:graphic xmlns:a="http://schemas.openxmlformats.org/drawingml/2006/main">
+          <a:graphicData uri="http://schemas.openxmlformats.org/drawingml/2006/chart">
+            <c:chart xmlns:c="http://schemas.openxmlformats.org/drawingml/2006/chart" r:id="rId1"/>
+          </a:graphicData>
+        </a:graphic>
+      </p:graphicFrame>
+      <p:sp>
+        <p:nvSpPr>
+          <p:cNvPr id="5" name="Shape 2"/>
+          <p:cNvSpPr/>
+          <p:nvPr/>
+        </p:nvSpPr>
+        <p:spPr>
+          <a:xfrm>
+            <a:off x="6035040" y="1097280"/>
+            <a:ext cx="2743200" cy="3657600"/>
+          </a:xfrm>
+          <a:prstGeom prst="rect">
+            <a:avLst/>
+          </a:prstGeom>
+          <a:solidFill>
+            <a:srgbClr val="FFFFFF"/>
+          </a:solidFill>
+          <a:ln w="6350">
+            <a:solidFill>
+              <a:srgbClr val="E2E8F0"/>
+            </a:solidFill>
+            <a:prstDash val="solid"/>
+          </a:ln>
+          <a:effectLst>
+            <a:outerShdw sx="100000" sy="100000" kx="0" ky="0" algn="bl" rotWithShape="0" blurRad="101600" dist="38100" dir="8100000">
+              <a:srgbClr val="000000">
+                <a:alpha val="10000"/>
+              </a:srgbClr>
+            </a:outerShdw>
+          </a:effectLst>
+        </p:spPr>
+      </p:sp>
+      <p:sp>
+        <p:nvSpPr>
+          <p:cNvPr id="6" name="Shape 3"/>
+          <p:cNvSpPr/>
+          <p:nvPr/>
+        </p:nvSpPr>
+        <p:spPr>
+          <a:xfrm>
+            <a:off x="6035040" y="1097280"/>
+            <a:ext cx="2743200" cy="54864"/>
+          </a:xfrm>
+          <a:prstGeom prst="rect">
+            <a:avLst/>
+          </a:prstGeom>
+          <a:solidFill>
+            <a:srgbClr val="00B4D8"/>
+          </a:solidFill>
+          <a:ln w="12700">
+            <a:solidFill>
+              <a:srgbClr val="00B4D8"/>
+            </a:solidFill>
+            <a:prstDash val="solid"/>
+          </a:ln>
+        </p:spPr>
+      </p:sp>
+      <p:sp>
+        <p:nvSpPr>
+          <p:cNvPr id="7" name="Text 4"/>
+          <p:cNvSpPr/>
+          <p:nvPr/>
+        </p:nvSpPr>
+        <p:spPr>
+          <a:xfrm>
+            <a:off x="6172200" y="1207008"/>
+            <a:ext cx="2468880" cy="274320"/>
+          </a:xfrm>
+          <a:prstGeom prst="rect">
+            <a:avLst/>
+          </a:prstGeom>
+          <a:noFill/>
+          <a:ln/>
+        </p:spPr>
+        <p:txBody>
+          <a:bodyPr wrap="square" lIns="0" tIns="0" rIns="0" bIns="0" rtlCol="0" anchor="ctr"/>
+          <a:lstStyle/>
+          <a:p>
+            <a:pPr indent="0" marL="0">
+              <a:buNone/>
+            </a:pPr>
+            <a:r>
+              <a:rPr lang="en-US" sz="1300" b="1" dirty="0">
+                <a:solidFill>
+                  <a:srgbClr val="0D1B2A"/>
+                </a:solidFill>
+              </a:rPr>
+              <a:t>What scaling fixed</a:t>
+            </a:r>
+            <a:endParaRPr lang="en-US" sz="1300" dirty="0"/>
+          </a:p>
+        </p:txBody>
+      </p:sp>
+      <p:sp>
+        <p:nvSpPr>
+          <p:cNvPr id="8" name="Text 5"/>
+          <p:cNvSpPr/>
+          <p:nvPr/>
+        </p:nvSpPr>
+        <p:spPr>
+          <a:xfrm>
+            <a:off x="6172200" y="1600200"/>
+            <a:ext cx="2468880" cy="228600"/>
+          </a:xfrm>
+          <a:prstGeom prst="rect">
+            <a:avLst/>
+          </a:prstGeom>
+          <a:noFill/>
+          <a:ln/>
+        </p:spPr>
+        <p:txBody>
+          <a:bodyPr wrap="square" lIns="0" tIns="0" rIns="0" bIns="0" rtlCol="0" anchor="ctr"/>
+          <a:lstStyle/>
+          <a:p>
+            <a:pPr indent="0" marL="0">
+              <a:buNone/>
+            </a:pPr>
+            <a:r>
+              <a:rPr lang="en-US" sz="1100" b="1" dirty="0">
+                <a:solidFill>
+                  <a:srgbClr val="D97706"/>
+                </a:solidFill>
+              </a:rPr>
+              <a:t>7B Qwen</a:t>
+            </a:r>
+            <a:endParaRPr lang="en-US" sz="1100" dirty="0"/>
+          </a:p>
+        </p:txBody>
+      </p:sp>
+      <p:sp>
+        <p:nvSpPr>
+          <p:cNvPr id="9" name="Text 6"/>
+          <p:cNvSpPr/>
+          <p:nvPr/>
+        </p:nvSpPr>
+        <p:spPr>
+          <a:xfrm>
+            <a:off x="6172200" y="1847088"/>
+            <a:ext cx="2468880" cy="640080"/>
+          </a:xfrm>
+          <a:prstGeom prst="rect">
+            <a:avLst/>
+          </a:prstGeom>
+          <a:noFill/>
+          <a:ln/>
+        </p:spPr>
+        <p:txBody>
+          <a:bodyPr wrap="square" lIns="0" tIns="0" rIns="0" bIns="0" rtlCol="0" anchor="ctr"/>
+          <a:lstStyle/>
+          <a:p>
+            <a:pPr indent="0" marL="0">
+              <a:buNone/>
+            </a:pPr>
+            <a:r>
+              <a:rPr lang="en-US" sz="950" dirty="0">
+                <a:solidFill>
+                  <a:srgbClr val="475569"/>
+                </a:solidFill>
+              </a:rPr>
+              <a:t>intermittent: infinite loop on Reverse LL + flaky uuid import (scheduler 5–26/26 across runs)</a:t>
+            </a:r>
+            <a:endParaRPr lang="en-US" sz="950" dirty="0"/>
+          </a:p>
+        </p:txBody>
+      </p:sp>
+      <p:sp>
+        <p:nvSpPr>
+          <p:cNvPr id="10" name="Text 7"/>
+          <p:cNvSpPr/>
+          <p:nvPr/>
+        </p:nvSpPr>
+        <p:spPr>
+          <a:xfrm>
+            <a:off x="6172200" y="2560320"/>
+            <a:ext cx="2468880" cy="228600"/>
+          </a:xfrm>
+          <a:prstGeom prst="rect">
+            <a:avLst/>
+          </a:prstGeom>
+          <a:noFill/>
+          <a:ln/>
+        </p:spPr>
+        <p:txBody>
+          <a:bodyPr wrap="square" lIns="0" tIns="0" rIns="0" bIns="0" rtlCol="0" anchor="ctr"/>
+          <a:lstStyle/>
+          <a:p>
+            <a:pPr indent="0" marL="0">
+              <a:buNone/>
+            </a:pPr>
+            <a:r>
+              <a:rPr lang="en-US" sz="1100" b="1" dirty="0">
+                <a:solidFill>
+                  <a:srgbClr val="D97706"/>
+                </a:solidFill>
+              </a:rPr>
+              <a:t>6.7B DeepSeek</a:t>
+            </a:r>
+            <a:endParaRPr lang="en-US" sz="1100" dirty="0"/>
+          </a:p>
+        </p:txBody>
+      </p:sp>
+      <p:sp>
+        <p:nvSpPr>
+          <p:cNvPr id="11" name="Text 8"/>
+          <p:cNvSpPr/>
+          <p:nvPr/>
+        </p:nvSpPr>
+        <p:spPr>
+          <a:xfrm>
+            <a:off x="6172200" y="2807208"/>
+            <a:ext cx="2468880" cy="640080"/>
+          </a:xfrm>
+          <a:prstGeom prst="rect">
+            <a:avLst/>
+          </a:prstGeom>
+          <a:noFill/>
+          <a:ln/>
+        </p:spPr>
+        <p:txBody>
+          <a:bodyPr wrap="square" lIns="0" tIns="0" rIns="0" bIns="0" rtlCol="0" anchor="ctr"/>
+          <a:lstStyle/>
+          <a:p>
+            <a:pPr indent="0" marL="0">
+              <a:buNone/>
+            </a:pPr>
+            <a:r>
+              <a:rPr lang="en-US" sz="950" dirty="0">
+                <a:solidFill>
+                  <a:srgbClr val="475569"/>
+                </a:solidFill>
+              </a:rPr>
+              <a:t>intermittent Min Window export miss (33–37/38 across runs); scheduler always 26/26</a:t>
+            </a:r>
+            <a:endParaRPr lang="en-US" sz="950" dirty="0"/>
+          </a:p>
+        </p:txBody>
+      </p:sp>
+      <p:sp>
+        <p:nvSpPr>
+          <p:cNvPr id="12" name="Text 9"/>
+          <p:cNvSpPr/>
+          <p:nvPr/>
+        </p:nvSpPr>
+        <p:spPr>
+          <a:xfrm>
+            <a:off x="6172200" y="3520440"/>
+            <a:ext cx="2468880" cy="228600"/>
+          </a:xfrm>
+          <a:prstGeom prst="rect">
+            <a:avLst/>
+          </a:prstGeom>
+          <a:noFill/>
+          <a:ln/>
+        </p:spPr>
+        <p:txBody>
+          <a:bodyPr wrap="square" lIns="0" tIns="0" rIns="0" bIns="0" rtlCol="0" anchor="ctr"/>
+          <a:lstStyle/>
+          <a:p>
+            <a:pPr indent="0" marL="0">
+              <a:buNone/>
+            </a:pPr>
+            <a:r>
+              <a:rPr lang="en-US" sz="1100" b="1" dirty="0">
+                <a:solidFill>
+                  <a:srgbClr val="16A34A"/>
+                </a:solidFill>
+              </a:rPr>
+              <a:t>32B / 33B</a:t>
+            </a:r>
+            <a:endParaRPr lang="en-US" sz="1100" dirty="0"/>
+          </a:p>
+        </p:txBody>
+      </p:sp>
+      <p:sp>
+        <p:nvSpPr>
+          <p:cNvPr id="13" name="Text 10"/>
+          <p:cNvSpPr/>
+          <p:nvPr/>
+        </p:nvSpPr>
+        <p:spPr>
+          <a:xfrm>
+            <a:off x="6172200" y="3767328"/>
+            <a:ext cx="2468880" cy="640080"/>
+          </a:xfrm>
+          <a:prstGeom prst="rect">
+            <a:avLst/>
+          </a:prstGeom>
+          <a:noFill/>
+          <a:ln/>
+        </p:spPr>
+        <p:txBody>
+          <a:bodyPr wrap="square" lIns="0" tIns="0" rIns="0" bIns="0" rtlCol="0" anchor="ctr"/>
+          <a:lstStyle/>
+          <a:p>
+            <a:pPr indent="0" marL="0">
+              <a:buNone/>
+            </a:pPr>
+            <a:r>
+              <a:rPr lang="en-US" sz="950" dirty="0">
+                <a:solidFill>
+                  <a:srgbClr val="475569"/>
+                </a:solidFill>
+              </a:rPr>
+              <a:t>both rock-solid — 37/38 LeetCode, 26/26 scheduler, every prior failure resolved</a:t>
+            </a:r>
+            <a:endParaRPr lang="en-US" sz="950" dirty="0"/>
+          </a:p>
+        </p:txBody>
+      </p:sp>
+    </p:spTree>
+  </p:cSld>
+  <p:clrMapOvr>
+    <a:masterClrMapping/>
+  </p:clrMapOvr>
+</p:sld>
+</file>
+
+<file path=ppt/slides/slide15.xml><?xml version="1.0" encoding="utf-8"?>
+<p:sld xmlns:a="http://schemas.openxmlformats.org/drawingml/2006/main" xmlns:r="http://schemas.openxmlformats.org/officeDocument/2006/relationships" xmlns:p="http://schemas.openxmlformats.org/presentationml/2006/main">
+  <p:cSld name="Slide 15">
+    <p:bg>
+      <p:bgPr>
+        <a:solidFill>
+          <a:srgbClr val="F8FAFC"/>
+        </a:solidFill>
+      </p:bgPr>
+    </p:bg>
+    <p:spTree>
+      <p:nvGrpSpPr>
+        <p:cNvPr id="1" name=""/>
+        <p:cNvGrpSpPr/>
+        <p:nvPr/>
+      </p:nvGrpSpPr>
+      <p:grpSpPr>
+        <a:xfrm>
+          <a:off x="0" y="0"/>
+          <a:ext cx="0" cy="0"/>
+          <a:chOff x="0" y="0"/>
+          <a:chExt cx="0" cy="0"/>
+        </a:xfrm>
+      </p:grpSpPr>
+      <p:sp>
+        <p:nvSpPr>
+          <p:cNvPr id="2" name="Text 0"/>
+          <p:cNvSpPr/>
+          <p:nvPr/>
+        </p:nvSpPr>
+        <p:spPr>
+          <a:xfrm>
+            <a:off x="457200" y="201168"/>
+            <a:ext cx="8229600" cy="256032"/>
+          </a:xfrm>
+          <a:prstGeom prst="rect">
+            <a:avLst/>
+          </a:prstGeom>
+          <a:noFill/>
+          <a:ln/>
+        </p:spPr>
+        <p:txBody>
+          <a:bodyPr wrap="square" lIns="0" tIns="0" rIns="0" bIns="0" rtlCol="0" anchor="ctr"/>
+          <a:lstStyle/>
+          <a:p>
+            <a:pPr indent="0" marL="0">
+              <a:buNone/>
+            </a:pPr>
+            <a:r>
+              <a:rPr lang="en-US" sz="900" b="1" spc="300" kern="0" dirty="0">
+                <a:solidFill>
+                  <a:srgbClr val="00B4D8"/>
+                </a:solidFill>
+              </a:rPr>
+              <a:t>EXACT DIFFERENCES — SIDE BY SIDE</a:t>
+            </a:r>
+            <a:endParaRPr lang="en-US" sz="900" dirty="0"/>
+          </a:p>
+        </p:txBody>
+      </p:sp>
+      <p:sp>
+        <p:nvSpPr>
+          <p:cNvPr id="3" name="Text 1"/>
+          <p:cNvSpPr/>
+          <p:nvPr/>
+        </p:nvSpPr>
+        <p:spPr>
+          <a:xfrm>
+            <a:off x="457200" y="502920"/>
+            <a:ext cx="8229600" cy="457200"/>
+          </a:xfrm>
+          <a:prstGeom prst="rect">
+            <a:avLst/>
+          </a:prstGeom>
+          <a:noFill/>
+          <a:ln/>
+        </p:spPr>
+        <p:txBody>
+          <a:bodyPr wrap="square" lIns="0" tIns="0" rIns="0" bIns="0" rtlCol="0" anchor="ctr"/>
+          <a:lstStyle/>
+          <a:p>
+            <a:pPr indent="0" marL="0">
+              <a:buNone/>
+            </a:pPr>
+            <a:r>
+              <a:rPr lang="en-US" sz="2800" b="1" dirty="0">
+                <a:solidFill>
+                  <a:srgbClr val="0D1B2A"/>
+                </a:solidFill>
+                <a:latin typeface="Georgia" pitchFamily="34" charset="0"/>
+                <a:ea typeface="Georgia" pitchFamily="34" charset="-122"/>
+                <a:cs typeface="Georgia" pitchFamily="34" charset="-120"/>
+              </a:rPr>
+              <a:t>Model-by-Model Comparison</a:t>
+            </a:r>
+            <a:endParaRPr lang="en-US" sz="2800" dirty="0"/>
+          </a:p>
+        </p:txBody>
+      </p:sp>
+      <p:graphicFrame>
+        <p:nvGraphicFramePr>
+          <p:cNvPr id="16" name="Table 0"/>
+          <p:cNvGraphicFramePr>
+            <a:graphicFrameLocks noGrp="1"/>
+          </p:cNvGraphicFramePr>
+          <p:nvPr>
+            <p:extLst>
+              <p:ext uri="{D42A27DB-BD31-4B8C-83A1-F6EECF244321}">
+                <p14:modId xmlns:p14="http://schemas.microsoft.com/office/powerpoint/2010/main" val="1579011935"/>
+              </p:ext>
+            </p:extLst>
+          </p:nvPr>
+        </p:nvGraphicFramePr>
+        <p:xfrm>
+          <a:off x="365760" y="1143000"/>
+          <a:ext cx="8412480" cy="3566160"/>
+        </p:xfrm>
+        <a:graphic>
+          <a:graphicData uri="http://schemas.openxmlformats.org/drawingml/2006/table">
+            <a:tbl>
+              <a:tblPr/>
+              <a:tblGrid>
+                <a:gridCol w="2194560"/>
+                <a:gridCol w="1554480"/>
+                <a:gridCol w="1554480"/>
+                <a:gridCol w="1554480"/>
+                <a:gridCol w="1554480"/>
+              </a:tblGrid>
+              <a:tr h="445770">
+                <a:tc>
+                  <a:txBody>
+                    <a:bodyPr/>
+                    <a:lstStyle/>
+                    <a:p>
+                      <a:pPr algn="l" indent="0" marL="0">
+                        <a:buNone/>
+                      </a:pPr>
+                      <a:r>
+                        <a:rPr lang="en-US" sz="1000" b="1" dirty="0">
+                          <a:solidFill>
+                            <a:srgbClr val="FFFFFF"/>
+                          </a:solidFill>
+                        </a:rPr>
+                        <a:t>Metric</a:t>
+                      </a:r>
+                      <a:endParaRPr lang="en-US" sz="1000" dirty="0"/>
+                    </a:p>
+                  </a:txBody>
+                  <a:tcPr marL="91440" marR="91440" marT="45720" marB="45720" anchor="ctr">
+                    <a:lnL w="5080" cap="flat" cmpd="sng" algn="ctr">
+                      <a:solidFill>
+                        <a:srgbClr val="E2E8F0"/>
+                      </a:solidFill>
+                      <a:prstDash val="solid"/>
+                      <a:round/>
+                      <a:headEnd type="none" w="med" len="med"/>
+                      <a:tailEnd type="none" w="med" len="med"/>
+                    </a:lnL>
+                    <a:lnR w="5080" cap="flat" cmpd="sng" algn="ctr">
+                      <a:solidFill>
+                        <a:srgbClr val="E2E8F0"/>
+                      </a:solidFill>
+                      <a:prstDash val="solid"/>
+                      <a:round/>
+                      <a:headEnd type="none" w="med" len="med"/>
+                      <a:tailEnd type="none" w="med" len="med"/>
+                    </a:lnR>
+                    <a:lnT w="5080" cap="flat" cmpd="sng" algn="ctr">
+                      <a:solidFill>
+                        <a:srgbClr val="E2E8F0"/>
+                      </a:solidFill>
+                      <a:prstDash val="solid"/>
+                      <a:round/>
+                      <a:headEnd type="none" w="med" len="med"/>
+                      <a:tailEnd type="none" w="med" len="med"/>
+                    </a:lnT>
+                    <a:lnB w="5080" cap="flat" cmpd="sng" algn="ctr">
+                      <a:solidFill>
+                        <a:srgbClr val="E2E8F0"/>
+                      </a:solidFill>
+                      <a:prstDash val="solid"/>
+                      <a:round/>
+                      <a:headEnd type="none" w="med" len="med"/>
+                      <a:tailEnd type="none" w="med" len="med"/>
+                    </a:lnB>
+                    <a:solidFill>
+                      <a:srgbClr val="0D1B2A"/>
+                    </a:solidFill>
+                  </a:tcPr>
+                </a:tc>
+                <a:tc>
+                  <a:txBody>
+                    <a:bodyPr/>
+                    <a:lstStyle/>
+                    <a:p>
+                      <a:pPr algn="ctr" indent="0" marL="0">
+                        <a:buNone/>
+                      </a:pPr>
+                      <a:r>
+                        <a:rPr lang="en-US" sz="1000" b="1" dirty="0">
+                          <a:solidFill>
+                            <a:srgbClr val="FFFFFF"/>
+                          </a:solidFill>
+                        </a:rPr>
+                        <a:t>Qwen 7B</a:t>
+                      </a:r>
+                      <a:endParaRPr lang="en-US" sz="1000" dirty="0"/>
+                    </a:p>
+                  </a:txBody>
+                  <a:tcPr marL="91440" marR="91440" marT="45720" marB="45720" anchor="ctr">
+                    <a:lnL w="5080" cap="flat" cmpd="sng" algn="ctr">
+                      <a:solidFill>
+                        <a:srgbClr val="E2E8F0"/>
+                      </a:solidFill>
+                      <a:prstDash val="solid"/>
+                      <a:round/>
+                      <a:headEnd type="none" w="med" len="med"/>
+                      <a:tailEnd type="none" w="med" len="med"/>
+                    </a:lnL>
+                    <a:lnR w="5080" cap="flat" cmpd="sng" algn="ctr">
+                      <a:solidFill>
+                        <a:srgbClr val="E2E8F0"/>
+                      </a:solidFill>
+                      <a:prstDash val="solid"/>
+                      <a:round/>
+                      <a:headEnd type="none" w="med" len="med"/>
+                      <a:tailEnd type="none" w="med" len="med"/>
+                    </a:lnR>
+                    <a:lnT w="5080" cap="flat" cmpd="sng" algn="ctr">
+                      <a:solidFill>
+                        <a:srgbClr val="E2E8F0"/>
+                      </a:solidFill>
+                      <a:prstDash val="solid"/>
+                      <a:round/>
+                      <a:headEnd type="none" w="med" len="med"/>
+                      <a:tailEnd type="none" w="med" len="med"/>
+                    </a:lnT>
+                    <a:lnB w="5080" cap="flat" cmpd="sng" algn="ctr">
+                      <a:solidFill>
+                        <a:srgbClr val="E2E8F0"/>
+                      </a:solidFill>
+                      <a:prstDash val="solid"/>
+                      <a:round/>
+                      <a:headEnd type="none" w="med" len="med"/>
+                      <a:tailEnd type="none" w="med" len="med"/>
+                    </a:lnB>
+                    <a:solidFill>
+                      <a:srgbClr val="0D1B2A"/>
+                    </a:solidFill>
+                  </a:tcPr>
+                </a:tc>
+                <a:tc>
+                  <a:txBody>
+                    <a:bodyPr/>
+                    <a:lstStyle/>
+                    <a:p>
+                      <a:pPr algn="ctr" indent="0" marL="0">
+                        <a:buNone/>
+                      </a:pPr>
+                      <a:r>
+                        <a:rPr lang="en-US" sz="1000" b="1" dirty="0">
+                          <a:solidFill>
+                            <a:srgbClr val="FFFFFF"/>
+                          </a:solidFill>
+                        </a:rPr>
+                        <a:t>DeepSeek 6.7B</a:t>
+                      </a:r>
+                      <a:endParaRPr lang="en-US" sz="1000" dirty="0"/>
+                    </a:p>
+                  </a:txBody>
+                  <a:tcPr marL="91440" marR="91440" marT="45720" marB="45720" anchor="ctr">
+                    <a:lnL w="5080" cap="flat" cmpd="sng" algn="ctr">
+                      <a:solidFill>
+                        <a:srgbClr val="E2E8F0"/>
+                      </a:solidFill>
+                      <a:prstDash val="solid"/>
+                      <a:round/>
+                      <a:headEnd type="none" w="med" len="med"/>
+                      <a:tailEnd type="none" w="med" len="med"/>
+                    </a:lnL>
+                    <a:lnR w="5080" cap="flat" cmpd="sng" algn="ctr">
+                      <a:solidFill>
+                        <a:srgbClr val="E2E8F0"/>
+                      </a:solidFill>
+                      <a:prstDash val="solid"/>
+                      <a:round/>
+                      <a:headEnd type="none" w="med" len="med"/>
+                      <a:tailEnd type="none" w="med" len="med"/>
+                    </a:lnR>
+                    <a:lnT w="5080" cap="flat" cmpd="sng" algn="ctr">
+                      <a:solidFill>
+                        <a:srgbClr val="E2E8F0"/>
+                      </a:solidFill>
+                      <a:prstDash val="solid"/>
+                      <a:round/>
+                      <a:headEnd type="none" w="med" len="med"/>
+                      <a:tailEnd type="none" w="med" len="med"/>
+                    </a:lnT>
+                    <a:lnB w="5080" cap="flat" cmpd="sng" algn="ctr">
+                      <a:solidFill>
+                        <a:srgbClr val="E2E8F0"/>
+                      </a:solidFill>
+                      <a:prstDash val="solid"/>
+                      <a:round/>
+                      <a:headEnd type="none" w="med" len="med"/>
+                      <a:tailEnd type="none" w="med" len="med"/>
+                    </a:lnB>
+                    <a:solidFill>
+                      <a:srgbClr val="0D1B2A"/>
+                    </a:solidFill>
+                  </a:tcPr>
+                </a:tc>
+                <a:tc>
+                  <a:txBody>
+                    <a:bodyPr/>
+                    <a:lstStyle/>
+                    <a:p>
+                      <a:pPr algn="ctr" indent="0" marL="0">
+                        <a:buNone/>
+                      </a:pPr>
+                      <a:r>
+                        <a:rPr lang="en-US" sz="1000" b="1" dirty="0">
+                          <a:solidFill>
+                            <a:srgbClr val="FFFFFF"/>
+                          </a:solidFill>
+                        </a:rPr>
+                        <a:t>Qwen 32B</a:t>
+                      </a:r>
+                      <a:endParaRPr lang="en-US" sz="1000" dirty="0"/>
+                    </a:p>
+                  </a:txBody>
+                  <a:tcPr marL="91440" marR="91440" marT="45720" marB="45720" anchor="ctr">
+                    <a:lnL w="5080" cap="flat" cmpd="sng" algn="ctr">
+                      <a:solidFill>
+                        <a:srgbClr val="E2E8F0"/>
+                      </a:solidFill>
+                      <a:prstDash val="solid"/>
+                      <a:round/>
+                      <a:headEnd type="none" w="med" len="med"/>
+                      <a:tailEnd type="none" w="med" len="med"/>
+                    </a:lnL>
+                    <a:lnR w="5080" cap="flat" cmpd="sng" algn="ctr">
+                      <a:solidFill>
+                        <a:srgbClr val="E2E8F0"/>
+                      </a:solidFill>
+                      <a:prstDash val="solid"/>
+                      <a:round/>
+                      <a:headEnd type="none" w="med" len="med"/>
+                      <a:tailEnd type="none" w="med" len="med"/>
+                    </a:lnR>
+                    <a:lnT w="5080" cap="flat" cmpd="sng" algn="ctr">
+                      <a:solidFill>
+                        <a:srgbClr val="E2E8F0"/>
+                      </a:solidFill>
+                      <a:prstDash val="solid"/>
+                      <a:round/>
+                      <a:headEnd type="none" w="med" len="med"/>
+                      <a:tailEnd type="none" w="med" len="med"/>
+                    </a:lnT>
+                    <a:lnB w="5080" cap="flat" cmpd="sng" algn="ctr">
+                      <a:solidFill>
+                        <a:srgbClr val="E2E8F0"/>
+                      </a:solidFill>
+                      <a:prstDash val="solid"/>
+                      <a:round/>
+                      <a:headEnd type="none" w="med" len="med"/>
+                      <a:tailEnd type="none" w="med" len="med"/>
+                    </a:lnB>
+                    <a:solidFill>
+                      <a:srgbClr val="0D1B2A"/>
+                    </a:solidFill>
+                  </a:tcPr>
+                </a:tc>
+                <a:tc>
+                  <a:txBody>
+                    <a:bodyPr/>
+                    <a:lstStyle/>
+                    <a:p>
+                      <a:pPr algn="ctr" indent="0" marL="0">
+                        <a:buNone/>
+                      </a:pPr>
+                      <a:r>
+                        <a:rPr lang="en-US" sz="1000" b="1" dirty="0">
+                          <a:solidFill>
+                            <a:srgbClr val="FFFFFF"/>
+                          </a:solidFill>
+                        </a:rPr>
+                        <a:t>DeepSeek 33B</a:t>
+                      </a:r>
+                      <a:endParaRPr lang="en-US" sz="1000" dirty="0"/>
+                    </a:p>
+                  </a:txBody>
+                  <a:tcPr marL="91440" marR="91440" marT="45720" marB="45720" anchor="ctr">
+                    <a:lnL w="5080" cap="flat" cmpd="sng" algn="ctr">
+                      <a:solidFill>
+                        <a:srgbClr val="E2E8F0"/>
+                      </a:solidFill>
+                      <a:prstDash val="solid"/>
+                      <a:round/>
+                      <a:headEnd type="none" w="med" len="med"/>
+                      <a:tailEnd type="none" w="med" len="med"/>
+                    </a:lnL>
+                    <a:lnR w="5080" cap="flat" cmpd="sng" algn="ctr">
+                      <a:solidFill>
+                        <a:srgbClr val="E2E8F0"/>
+                      </a:solidFill>
+                      <a:prstDash val="solid"/>
+                      <a:round/>
+                      <a:headEnd type="none" w="med" len="med"/>
+                      <a:tailEnd type="none" w="med" len="med"/>
+                    </a:lnR>
+                    <a:lnT w="5080" cap="flat" cmpd="sng" algn="ctr">
+                      <a:solidFill>
+                        <a:srgbClr val="E2E8F0"/>
+                      </a:solidFill>
+                      <a:prstDash val="solid"/>
+                      <a:round/>
+                      <a:headEnd type="none" w="med" len="med"/>
+                      <a:tailEnd type="none" w="med" len="med"/>
+                    </a:lnT>
+                    <a:lnB w="5080" cap="flat" cmpd="sng" algn="ctr">
+                      <a:solidFill>
+                        <a:srgbClr val="E2E8F0"/>
+                      </a:solidFill>
+                      <a:prstDash val="solid"/>
+                      <a:round/>
+                      <a:headEnd type="none" w="med" len="med"/>
+                      <a:tailEnd type="none" w="med" len="med"/>
+                    </a:lnB>
+                    <a:solidFill>
+                      <a:srgbClr val="0D1B2A"/>
+                    </a:solidFill>
+                  </a:tcPr>
+                </a:tc>
+              </a:tr>
+              <a:tr h="445770">
+                <a:tc>
+                  <a:txBody>
+                    <a:bodyPr/>
+                    <a:lstStyle/>
+                    <a:p>
+                      <a:pPr algn="l" indent="0" marL="0">
+                        <a:buNone/>
+                      </a:pPr>
+                      <a:r>
+                        <a:rPr lang="en-US" sz="1050" b="1" dirty="0">
+                          <a:solidFill>
+                            <a:srgbClr val="0D1B2A"/>
+                          </a:solidFill>
+                        </a:rPr>
+                        <a:t>LeetCode pass</a:t>
+                      </a:r>
+                      <a:endParaRPr lang="en-US" sz="1050" dirty="0"/>
+                    </a:p>
+                  </a:txBody>
+                  <a:tcPr marL="91440" marR="91440" marT="45720" marB="45720" anchor="ctr">
+                    <a:lnL w="5080" cap="flat" cmpd="sng" algn="ctr">
+                      <a:solidFill>
+                        <a:srgbClr val="E2E8F0"/>
+                      </a:solidFill>
+                      <a:prstDash val="solid"/>
+                      <a:round/>
+                      <a:headEnd type="none" w="med" len="med"/>
+                      <a:tailEnd type="none" w="med" len="med"/>
+                    </a:lnL>
+                    <a:lnR w="5080" cap="flat" cmpd="sng" algn="ctr">
+                      <a:solidFill>
+                        <a:srgbClr val="E2E8F0"/>
+                      </a:solidFill>
+                      <a:prstDash val="solid"/>
+                      <a:round/>
+                      <a:headEnd type="none" w="med" len="med"/>
+                      <a:tailEnd type="none" w="med" len="med"/>
+                    </a:lnR>
+                    <a:lnT w="5080" cap="flat" cmpd="sng" algn="ctr">
+                      <a:solidFill>
+                        <a:srgbClr val="E2E8F0"/>
+                      </a:solidFill>
+                      <a:prstDash val="solid"/>
+                      <a:round/>
+                      <a:headEnd type="none" w="med" len="med"/>
+                      <a:tailEnd type="none" w="med" len="med"/>
+                    </a:lnT>
+                    <a:lnB w="5080" cap="flat" cmpd="sng" algn="ctr">
+                      <a:solidFill>
+                        <a:srgbClr val="E2E8F0"/>
+                      </a:solidFill>
+                      <a:prstDash val="solid"/>
+                      <a:round/>
+                      <a:headEnd type="none" w="med" len="med"/>
+                      <a:tailEnd type="none" w="med" len="med"/>
+                    </a:lnB>
+                    <a:solidFill>
+                      <a:srgbClr val="F8FAFC"/>
+                    </a:solidFill>
+                  </a:tcPr>
+                </a:tc>
+                <a:tc>
+                  <a:txBody>
+                    <a:bodyPr/>
+                    <a:lstStyle/>
+                    <a:p>
+                      <a:pPr algn="ctr" indent="0" marL="0">
+                        <a:buNone/>
+                      </a:pPr>
+                      <a:r>
+                        <a:rPr lang="en-US" sz="1050" dirty="0">
+                          <a:solidFill>
+                            <a:srgbClr val="475569"/>
+                          </a:solidFill>
+                        </a:rPr>
+                        <a:t>34/38</a:t>
+                      </a:r>
+                      <a:endParaRPr lang="en-US" sz="1050" dirty="0"/>
+                    </a:p>
+                  </a:txBody>
+                  <a:tcPr marL="91440" marR="91440" marT="45720" marB="45720" anchor="ctr">
+                    <a:lnL w="5080" cap="flat" cmpd="sng" algn="ctr">
+                      <a:solidFill>
+                        <a:srgbClr val="E2E8F0"/>
+                      </a:solidFill>
+                      <a:prstDash val="solid"/>
+                      <a:round/>
+                      <a:headEnd type="none" w="med" len="med"/>
+                      <a:tailEnd type="none" w="med" len="med"/>
+                    </a:lnL>
+                    <a:lnR w="5080" cap="flat" cmpd="sng" algn="ctr">
+                      <a:solidFill>
+                        <a:srgbClr val="E2E8F0"/>
+                      </a:solidFill>
+                      <a:prstDash val="solid"/>
+                      <a:round/>
+                      <a:headEnd type="none" w="med" len="med"/>
+                      <a:tailEnd type="none" w="med" len="med"/>
+                    </a:lnR>
+                    <a:lnT w="5080" cap="flat" cmpd="sng" algn="ctr">
+                      <a:solidFill>
+                        <a:srgbClr val="E2E8F0"/>
+                      </a:solidFill>
+                      <a:prstDash val="solid"/>
+                      <a:round/>
+                      <a:headEnd type="none" w="med" len="med"/>
+                      <a:tailEnd type="none" w="med" len="med"/>
+                    </a:lnT>
+                    <a:lnB w="5080" cap="flat" cmpd="sng" algn="ctr">
+                      <a:solidFill>
+                        <a:srgbClr val="E2E8F0"/>
+                      </a:solidFill>
+                      <a:prstDash val="solid"/>
+                      <a:round/>
+                      <a:headEnd type="none" w="med" len="med"/>
+                      <a:tailEnd type="none" w="med" len="med"/>
+                    </a:lnB>
+                    <a:solidFill>
+                      <a:srgbClr val="F8FAFC"/>
+                    </a:solidFill>
+                  </a:tcPr>
+                </a:tc>
+                <a:tc>
+                  <a:txBody>
+                    <a:bodyPr/>
+                    <a:lstStyle/>
+                    <a:p>
+                      <a:pPr algn="ctr" indent="0" marL="0">
+                        <a:buNone/>
+                      </a:pPr>
+                      <a:r>
+                        <a:rPr lang="en-US" sz="1050" dirty="0">
+                          <a:solidFill>
+                            <a:srgbClr val="475569"/>
+                          </a:solidFill>
+                        </a:rPr>
+                        <a:t>33–37/38</a:t>
+                      </a:r>
+                      <a:endParaRPr lang="en-US" sz="1050" dirty="0"/>
+                    </a:p>
+                  </a:txBody>
+                  <a:tcPr marL="91440" marR="91440" marT="45720" marB="45720" anchor="ctr">
+                    <a:lnL w="5080" cap="flat" cmpd="sng" algn="ctr">
+                      <a:solidFill>
+                        <a:srgbClr val="E2E8F0"/>
+                      </a:solidFill>
+                      <a:prstDash val="solid"/>
+                      <a:round/>
+                      <a:headEnd type="none" w="med" len="med"/>
+                      <a:tailEnd type="none" w="med" len="med"/>
+                    </a:lnL>
+                    <a:lnR w="5080" cap="flat" cmpd="sng" algn="ctr">
+                      <a:solidFill>
+                        <a:srgbClr val="E2E8F0"/>
+                      </a:solidFill>
+                      <a:prstDash val="solid"/>
+                      <a:round/>
+                      <a:headEnd type="none" w="med" len="med"/>
+                      <a:tailEnd type="none" w="med" len="med"/>
+                    </a:lnR>
+                    <a:lnT w="5080" cap="flat" cmpd="sng" algn="ctr">
+                      <a:solidFill>
+                        <a:srgbClr val="E2E8F0"/>
+                      </a:solidFill>
+                      <a:prstDash val="solid"/>
+                      <a:round/>
+                      <a:headEnd type="none" w="med" len="med"/>
+                      <a:tailEnd type="none" w="med" len="med"/>
+                    </a:lnT>
+                    <a:lnB w="5080" cap="flat" cmpd="sng" algn="ctr">
+                      <a:solidFill>
+                        <a:srgbClr val="E2E8F0"/>
+                      </a:solidFill>
+                      <a:prstDash val="solid"/>
+                      <a:round/>
+                      <a:headEnd type="none" w="med" len="med"/>
+                      <a:tailEnd type="none" w="med" len="med"/>
+                    </a:lnB>
+                    <a:solidFill>
+                      <a:srgbClr val="F8FAFC"/>
+                    </a:solidFill>
+                  </a:tcPr>
+                </a:tc>
+                <a:tc>
+                  <a:txBody>
+                    <a:bodyPr/>
+                    <a:lstStyle/>
+                    <a:p>
+                      <a:pPr algn="ctr" indent="0" marL="0">
+                        <a:buNone/>
+                      </a:pPr>
+                      <a:r>
+                        <a:rPr lang="en-US" sz="1050" dirty="0">
+                          <a:solidFill>
+                            <a:srgbClr val="475569"/>
+                          </a:solidFill>
+                        </a:rPr>
+                        <a:t>37/38</a:t>
+                      </a:r>
+                      <a:endParaRPr lang="en-US" sz="1050" dirty="0"/>
+                    </a:p>
+                  </a:txBody>
+                  <a:tcPr marL="91440" marR="91440" marT="45720" marB="45720" anchor="ctr">
+                    <a:lnL w="5080" cap="flat" cmpd="sng" algn="ctr">
+                      <a:solidFill>
+                        <a:srgbClr val="E2E8F0"/>
+                      </a:solidFill>
+                      <a:prstDash val="solid"/>
+                      <a:round/>
+                      <a:headEnd type="none" w="med" len="med"/>
+                      <a:tailEnd type="none" w="med" len="med"/>
+                    </a:lnL>
+                    <a:lnR w="5080" cap="flat" cmpd="sng" algn="ctr">
+                      <a:solidFill>
+                        <a:srgbClr val="E2E8F0"/>
+                      </a:solidFill>
+                      <a:prstDash val="solid"/>
+                      <a:round/>
+                      <a:headEnd type="none" w="med" len="med"/>
+                      <a:tailEnd type="none" w="med" len="med"/>
+                    </a:lnR>
+                    <a:lnT w="5080" cap="flat" cmpd="sng" algn="ctr">
+                      <a:solidFill>
+                        <a:srgbClr val="E2E8F0"/>
+                      </a:solidFill>
+                      <a:prstDash val="solid"/>
+                      <a:round/>
+                      <a:headEnd type="none" w="med" len="med"/>
+                      <a:tailEnd type="none" w="med" len="med"/>
+                    </a:lnT>
+                    <a:lnB w="5080" cap="flat" cmpd="sng" algn="ctr">
+                      <a:solidFill>
+                        <a:srgbClr val="E2E8F0"/>
+                      </a:solidFill>
+                      <a:prstDash val="solid"/>
+                      <a:round/>
+                      <a:headEnd type="none" w="med" len="med"/>
+                      <a:tailEnd type="none" w="med" len="med"/>
+                    </a:lnB>
+                    <a:solidFill>
+                      <a:srgbClr val="F8FAFC"/>
+                    </a:solidFill>
+                  </a:tcPr>
+                </a:tc>
+                <a:tc>
+                  <a:txBody>
+                    <a:bodyPr/>
+                    <a:lstStyle/>
+                    <a:p>
+                      <a:pPr algn="ctr" indent="0" marL="0">
+                        <a:buNone/>
+                      </a:pPr>
+                      <a:r>
+                        <a:rPr lang="en-US" sz="1050" dirty="0">
+                          <a:solidFill>
+                            <a:srgbClr val="475569"/>
+                          </a:solidFill>
+                        </a:rPr>
+                        <a:t>37/38</a:t>
+                      </a:r>
+                      <a:endParaRPr lang="en-US" sz="1050" dirty="0"/>
+                    </a:p>
+                  </a:txBody>
+                  <a:tcPr marL="91440" marR="91440" marT="45720" marB="45720" anchor="ctr">
+                    <a:lnL w="5080" cap="flat" cmpd="sng" algn="ctr">
+                      <a:solidFill>
+                        <a:srgbClr val="E2E8F0"/>
+                      </a:solidFill>
+                      <a:prstDash val="solid"/>
+                      <a:round/>
+                      <a:headEnd type="none" w="med" len="med"/>
+                      <a:tailEnd type="none" w="med" len="med"/>
+                    </a:lnL>
+                    <a:lnR w="5080" cap="flat" cmpd="sng" algn="ctr">
+                      <a:solidFill>
+                        <a:srgbClr val="E2E8F0"/>
+                      </a:solidFill>
+                      <a:prstDash val="solid"/>
+                      <a:round/>
+                      <a:headEnd type="none" w="med" len="med"/>
+                      <a:tailEnd type="none" w="med" len="med"/>
+                    </a:lnR>
+                    <a:lnT w="5080" cap="flat" cmpd="sng" algn="ctr">
+                      <a:solidFill>
+                        <a:srgbClr val="E2E8F0"/>
+                      </a:solidFill>
+                      <a:prstDash val="solid"/>
+                      <a:round/>
+                      <a:headEnd type="none" w="med" len="med"/>
+                      <a:tailEnd type="none" w="med" len="med"/>
+                    </a:lnT>
+                    <a:lnB w="5080" cap="flat" cmpd="sng" algn="ctr">
+                      <a:solidFill>
+                        <a:srgbClr val="E2E8F0"/>
+                      </a:solidFill>
+                      <a:prstDash val="solid"/>
+                      <a:round/>
+                      <a:headEnd type="none" w="med" len="med"/>
+                      <a:tailEnd type="none" w="med" len="med"/>
+                    </a:lnB>
+                    <a:solidFill>
+                      <a:srgbClr val="F8FAFC"/>
+                    </a:solidFill>
+                  </a:tcPr>
+                </a:tc>
+              </a:tr>
+              <a:tr h="445770">
+                <a:tc>
+                  <a:txBody>
+                    <a:bodyPr/>
+                    <a:lstStyle/>
+                    <a:p>
+                      <a:pPr algn="l" indent="0" marL="0">
+                        <a:buNone/>
+                      </a:pPr>
+                      <a:r>
+                        <a:rPr lang="en-US" sz="1050" b="1" dirty="0">
+                          <a:solidFill>
+                            <a:srgbClr val="0D1B2A"/>
+                          </a:solidFill>
+                        </a:rPr>
+                        <a:t>Scheduler tests</a:t>
+                      </a:r>
+                      <a:endParaRPr lang="en-US" sz="1050" dirty="0"/>
+                    </a:p>
+                  </a:txBody>
+                  <a:tcPr marL="91440" marR="91440" marT="45720" marB="45720" anchor="ctr">
+                    <a:lnL w="5080" cap="flat" cmpd="sng" algn="ctr">
+                      <a:solidFill>
+                        <a:srgbClr val="E2E8F0"/>
+                      </a:solidFill>
+                      <a:prstDash val="solid"/>
+                      <a:round/>
+                      <a:headEnd type="none" w="med" len="med"/>
+                      <a:tailEnd type="none" w="med" len="med"/>
+                    </a:lnL>
+                    <a:lnR w="5080" cap="flat" cmpd="sng" algn="ctr">
+                      <a:solidFill>
+                        <a:srgbClr val="E2E8F0"/>
+                      </a:solidFill>
+                      <a:prstDash val="solid"/>
+                      <a:round/>
+                      <a:headEnd type="none" w="med" len="med"/>
+                      <a:tailEnd type="none" w="med" len="med"/>
+                    </a:lnR>
+                    <a:lnT w="5080" cap="flat" cmpd="sng" algn="ctr">
+                      <a:solidFill>
+                        <a:srgbClr val="E2E8F0"/>
+                      </a:solidFill>
+                      <a:prstDash val="solid"/>
+                      <a:round/>
+                      <a:headEnd type="none" w="med" len="med"/>
+                      <a:tailEnd type="none" w="med" len="med"/>
+                    </a:lnT>
+                    <a:lnB w="5080" cap="flat" cmpd="sng" algn="ctr">
+                      <a:solidFill>
+                        <a:srgbClr val="E2E8F0"/>
+                      </a:solidFill>
+                      <a:prstDash val="solid"/>
+                      <a:round/>
+                      <a:headEnd type="none" w="med" len="med"/>
+                      <a:tailEnd type="none" w="med" len="med"/>
+                    </a:lnB>
+                    <a:solidFill>
+                      <a:srgbClr val="FFFFFF"/>
+                    </a:solidFill>
+                  </a:tcPr>
+                </a:tc>
+                <a:tc>
+                  <a:txBody>
+                    <a:bodyPr/>
+                    <a:lstStyle/>
+                    <a:p>
+                      <a:pPr algn="ctr" indent="0" marL="0">
+                        <a:buNone/>
+                      </a:pPr>
+                      <a:r>
+                        <a:rPr lang="en-US" sz="1050" dirty="0">
+                          <a:solidFill>
+                            <a:srgbClr val="475569"/>
+                          </a:solidFill>
+                        </a:rPr>
+                        <a:t>5–26/26</a:t>
+                      </a:r>
+                      <a:endParaRPr lang="en-US" sz="1050" dirty="0"/>
+                    </a:p>
+                  </a:txBody>
+                  <a:tcPr marL="91440" marR="91440" marT="45720" marB="45720" anchor="ctr">
+                    <a:lnL w="5080" cap="flat" cmpd="sng" algn="ctr">
+                      <a:solidFill>
+                        <a:srgbClr val="E2E8F0"/>
+                      </a:solidFill>
+                      <a:prstDash val="solid"/>
+                      <a:round/>
+                      <a:headEnd type="none" w="med" len="med"/>
+                      <a:tailEnd type="none" w="med" len="med"/>
+                    </a:lnL>
+                    <a:lnR w="5080" cap="flat" cmpd="sng" algn="ctr">
+                      <a:solidFill>
+                        <a:srgbClr val="E2E8F0"/>
+                      </a:solidFill>
+                      <a:prstDash val="solid"/>
+                      <a:round/>
+                      <a:headEnd type="none" w="med" len="med"/>
+                      <a:tailEnd type="none" w="med" len="med"/>
+                    </a:lnR>
+                    <a:lnT w="5080" cap="flat" cmpd="sng" algn="ctr">
+                      <a:solidFill>
+                        <a:srgbClr val="E2E8F0"/>
+                      </a:solidFill>
+                      <a:prstDash val="solid"/>
+                      <a:round/>
+                      <a:headEnd type="none" w="med" len="med"/>
+                      <a:tailEnd type="none" w="med" len="med"/>
+                    </a:lnT>
+                    <a:lnB w="5080" cap="flat" cmpd="sng" algn="ctr">
+                      <a:solidFill>
+                        <a:srgbClr val="E2E8F0"/>
+                      </a:solidFill>
+                      <a:prstDash val="solid"/>
+                      <a:round/>
+                      <a:headEnd type="none" w="med" len="med"/>
+                      <a:tailEnd type="none" w="med" len="med"/>
+                    </a:lnB>
+                    <a:solidFill>
+                      <a:srgbClr val="FFFFFF"/>
+                    </a:solidFill>
+                  </a:tcPr>
+                </a:tc>
+                <a:tc>
+                  <a:txBody>
+                    <a:bodyPr/>
+                    <a:lstStyle/>
+                    <a:p>
+                      <a:pPr algn="ctr" indent="0" marL="0">
+                        <a:buNone/>
+                      </a:pPr>
+                      <a:r>
+                        <a:rPr lang="en-US" sz="1050" dirty="0">
+                          <a:solidFill>
+                            <a:srgbClr val="475569"/>
+                          </a:solidFill>
+                        </a:rPr>
+                        <a:t>26/26</a:t>
+                      </a:r>
+                      <a:endParaRPr lang="en-US" sz="1050" dirty="0"/>
+                    </a:p>
+                  </a:txBody>
+                  <a:tcPr marL="91440" marR="91440" marT="45720" marB="45720" anchor="ctr">
+                    <a:lnL w="5080" cap="flat" cmpd="sng" algn="ctr">
+                      <a:solidFill>
+                        <a:srgbClr val="E2E8F0"/>
+                      </a:solidFill>
+                      <a:prstDash val="solid"/>
+                      <a:round/>
+                      <a:headEnd type="none" w="med" len="med"/>
+                      <a:tailEnd type="none" w="med" len="med"/>
+                    </a:lnL>
+                    <a:lnR w="5080" cap="flat" cmpd="sng" algn="ctr">
+                      <a:solidFill>
+                        <a:srgbClr val="E2E8F0"/>
+                      </a:solidFill>
+                      <a:prstDash val="solid"/>
+                      <a:round/>
+                      <a:headEnd type="none" w="med" len="med"/>
+                      <a:tailEnd type="none" w="med" len="med"/>
+                    </a:lnR>
+                    <a:lnT w="5080" cap="flat" cmpd="sng" algn="ctr">
+                      <a:solidFill>
+                        <a:srgbClr val="E2E8F0"/>
+                      </a:solidFill>
+                      <a:prstDash val="solid"/>
+                      <a:round/>
+                      <a:headEnd type="none" w="med" len="med"/>
+                      <a:tailEnd type="none" w="med" len="med"/>
+                    </a:lnT>
+                    <a:lnB w="5080" cap="flat" cmpd="sng" algn="ctr">
+                      <a:solidFill>
+                        <a:srgbClr val="E2E8F0"/>
+                      </a:solidFill>
+                      <a:prstDash val="solid"/>
+                      <a:round/>
+                      <a:headEnd type="none" w="med" len="med"/>
+                      <a:tailEnd type="none" w="med" len="med"/>
+                    </a:lnB>
+                    <a:solidFill>
+                      <a:srgbClr val="FFFFFF"/>
+                    </a:solidFill>
+                  </a:tcPr>
+                </a:tc>
+                <a:tc>
+                  <a:txBody>
+                    <a:bodyPr/>
+                    <a:lstStyle/>
+                    <a:p>
+                      <a:pPr algn="ctr" indent="0" marL="0">
+                        <a:buNone/>
+                      </a:pPr>
+                      <a:r>
+                        <a:rPr lang="en-US" sz="1050" dirty="0">
+                          <a:solidFill>
+                            <a:srgbClr val="475569"/>
+                          </a:solidFill>
+                        </a:rPr>
+                        <a:t>26/26</a:t>
+                      </a:r>
+                      <a:endParaRPr lang="en-US" sz="1050" dirty="0"/>
+                    </a:p>
+                  </a:txBody>
+                  <a:tcPr marL="91440" marR="91440" marT="45720" marB="45720" anchor="ctr">
+                    <a:lnL w="5080" cap="flat" cmpd="sng" algn="ctr">
+                      <a:solidFill>
+                        <a:srgbClr val="E2E8F0"/>
+                      </a:solidFill>
+                      <a:prstDash val="solid"/>
+                      <a:round/>
+                      <a:headEnd type="none" w="med" len="med"/>
+                      <a:tailEnd type="none" w="med" len="med"/>
+                    </a:lnL>
+                    <a:lnR w="5080" cap="flat" cmpd="sng" algn="ctr">
+                      <a:solidFill>
+                        <a:srgbClr val="E2E8F0"/>
+                      </a:solidFill>
+                      <a:prstDash val="solid"/>
+                      <a:round/>
+                      <a:headEnd type="none" w="med" len="med"/>
+                      <a:tailEnd type="none" w="med" len="med"/>
+                    </a:lnR>
+                    <a:lnT w="5080" cap="flat" cmpd="sng" algn="ctr">
+                      <a:solidFill>
+                        <a:srgbClr val="E2E8F0"/>
+                      </a:solidFill>
+                      <a:prstDash val="solid"/>
+                      <a:round/>
+                      <a:headEnd type="none" w="med" len="med"/>
+                      <a:tailEnd type="none" w="med" len="med"/>
+                    </a:lnT>
+                    <a:lnB w="5080" cap="flat" cmpd="sng" algn="ctr">
+                      <a:solidFill>
+                        <a:srgbClr val="E2E8F0"/>
+                      </a:solidFill>
+                      <a:prstDash val="solid"/>
+                      <a:round/>
+                      <a:headEnd type="none" w="med" len="med"/>
+                      <a:tailEnd type="none" w="med" len="med"/>
+                    </a:lnB>
+                    <a:solidFill>
+                      <a:srgbClr val="FFFFFF"/>
+                    </a:solidFill>
+                  </a:tcPr>
+                </a:tc>
+                <a:tc>
+                  <a:txBody>
+                    <a:bodyPr/>
+                    <a:lstStyle/>
+                    <a:p>
+                      <a:pPr algn="ctr" indent="0" marL="0">
+                        <a:buNone/>
+                      </a:pPr>
+                      <a:r>
+                        <a:rPr lang="en-US" sz="1050" dirty="0">
+                          <a:solidFill>
+                            <a:srgbClr val="475569"/>
+                          </a:solidFill>
+                        </a:rPr>
+                        <a:t>26/26</a:t>
+                      </a:r>
+                      <a:endParaRPr lang="en-US" sz="1050" dirty="0"/>
+                    </a:p>
+                  </a:txBody>
+                  <a:tcPr marL="91440" marR="91440" marT="45720" marB="45720" anchor="ctr">
+                    <a:lnL w="5080" cap="flat" cmpd="sng" algn="ctr">
+                      <a:solidFill>
+                        <a:srgbClr val="E2E8F0"/>
+                      </a:solidFill>
+                      <a:prstDash val="solid"/>
+                      <a:round/>
+                      <a:headEnd type="none" w="med" len="med"/>
+                      <a:tailEnd type="none" w="med" len="med"/>
+                    </a:lnL>
+                    <a:lnR w="5080" cap="flat" cmpd="sng" algn="ctr">
+                      <a:solidFill>
+                        <a:srgbClr val="E2E8F0"/>
+                      </a:solidFill>
+                      <a:prstDash val="solid"/>
+                      <a:round/>
+                      <a:headEnd type="none" w="med" len="med"/>
+                      <a:tailEnd type="none" w="med" len="med"/>
+                    </a:lnR>
+                    <a:lnT w="5080" cap="flat" cmpd="sng" algn="ctr">
+                      <a:solidFill>
+                        <a:srgbClr val="E2E8F0"/>
+                      </a:solidFill>
+                      <a:prstDash val="solid"/>
+                      <a:round/>
+                      <a:headEnd type="none" w="med" len="med"/>
+                      <a:tailEnd type="none" w="med" len="med"/>
+                    </a:lnT>
+                    <a:lnB w="5080" cap="flat" cmpd="sng" algn="ctr">
+                      <a:solidFill>
+                        <a:srgbClr val="E2E8F0"/>
+                      </a:solidFill>
+                      <a:prstDash val="solid"/>
+                      <a:round/>
+                      <a:headEnd type="none" w="med" len="med"/>
+                      <a:tailEnd type="none" w="med" len="med"/>
+                    </a:lnB>
+                    <a:solidFill>
+                      <a:srgbClr val="FFFFFF"/>
+                    </a:solidFill>
+                  </a:tcPr>
+                </a:tc>
+              </a:tr>
+              <a:tr h="445770">
+                <a:tc>
+                  <a:txBody>
+                    <a:bodyPr/>
+                    <a:lstStyle/>
+                    <a:p>
+                      <a:pPr algn="l" indent="0" marL="0">
+                        <a:buNone/>
+                      </a:pPr>
+                      <a:r>
+                        <a:rPr lang="en-US" sz="1050" b="1" dirty="0">
+                          <a:solidFill>
+                            <a:srgbClr val="0D1B2A"/>
+                          </a:solidFill>
+                        </a:rPr>
+                        <a:t>Avg latency/problem</a:t>
+                      </a:r>
+                      <a:endParaRPr lang="en-US" sz="1050" dirty="0"/>
+                    </a:p>
+                  </a:txBody>
+                  <a:tcPr marL="91440" marR="91440" marT="45720" marB="45720" anchor="ctr">
+                    <a:lnL w="5080" cap="flat" cmpd="sng" algn="ctr">
+                      <a:solidFill>
+                        <a:srgbClr val="E2E8F0"/>
+                      </a:solidFill>
+                      <a:prstDash val="solid"/>
+                      <a:round/>
+                      <a:headEnd type="none" w="med" len="med"/>
+                      <a:tailEnd type="none" w="med" len="med"/>
+                    </a:lnL>
+                    <a:lnR w="5080" cap="flat" cmpd="sng" algn="ctr">
+                      <a:solidFill>
+                        <a:srgbClr val="E2E8F0"/>
+                      </a:solidFill>
+                      <a:prstDash val="solid"/>
+                      <a:round/>
+                      <a:headEnd type="none" w="med" len="med"/>
+                      <a:tailEnd type="none" w="med" len="med"/>
+                    </a:lnR>
+                    <a:lnT w="5080" cap="flat" cmpd="sng" algn="ctr">
+                      <a:solidFill>
+                        <a:srgbClr val="E2E8F0"/>
+                      </a:solidFill>
+                      <a:prstDash val="solid"/>
+                      <a:round/>
+                      <a:headEnd type="none" w="med" len="med"/>
+                      <a:tailEnd type="none" w="med" len="med"/>
+                    </a:lnT>
+                    <a:lnB w="5080" cap="flat" cmpd="sng" algn="ctr">
+                      <a:solidFill>
+                        <a:srgbClr val="E2E8F0"/>
+                      </a:solidFill>
+                      <a:prstDash val="solid"/>
+                      <a:round/>
+                      <a:headEnd type="none" w="med" len="med"/>
+                      <a:tailEnd type="none" w="med" len="med"/>
+                    </a:lnB>
+                    <a:solidFill>
+                      <a:srgbClr val="F8FAFC"/>
+                    </a:solidFill>
+                  </a:tcPr>
+                </a:tc>
+                <a:tc>
+                  <a:txBody>
+                    <a:bodyPr/>
+                    <a:lstStyle/>
+                    <a:p>
+                      <a:pPr algn="ctr" indent="0" marL="0">
+                        <a:buNone/>
+                      </a:pPr>
+                      <a:r>
+                        <a:rPr lang="en-US" sz="1050" dirty="0">
+                          <a:solidFill>
+                            <a:srgbClr val="475569"/>
+                          </a:solidFill>
+                        </a:rPr>
+                        <a:t>2.3 s</a:t>
+                      </a:r>
+                      <a:endParaRPr lang="en-US" sz="1050" dirty="0"/>
+                    </a:p>
+                  </a:txBody>
+                  <a:tcPr marL="91440" marR="91440" marT="45720" marB="45720" anchor="ctr">
+                    <a:lnL w="5080" cap="flat" cmpd="sng" algn="ctr">
+                      <a:solidFill>
+                        <a:srgbClr val="E2E8F0"/>
+                      </a:solidFill>
+                      <a:prstDash val="solid"/>
+                      <a:round/>
+                      <a:headEnd type="none" w="med" len="med"/>
+                      <a:tailEnd type="none" w="med" len="med"/>
+                    </a:lnL>
+                    <a:lnR w="5080" cap="flat" cmpd="sng" algn="ctr">
+                      <a:solidFill>
+                        <a:srgbClr val="E2E8F0"/>
+                      </a:solidFill>
+                      <a:prstDash val="solid"/>
+                      <a:round/>
+                      <a:headEnd type="none" w="med" len="med"/>
+                      <a:tailEnd type="none" w="med" len="med"/>
+                    </a:lnR>
+                    <a:lnT w="5080" cap="flat" cmpd="sng" algn="ctr">
+                      <a:solidFill>
+                        <a:srgbClr val="E2E8F0"/>
+                      </a:solidFill>
+                      <a:prstDash val="solid"/>
+                      <a:round/>
+                      <a:headEnd type="none" w="med" len="med"/>
+                      <a:tailEnd type="none" w="med" len="med"/>
+                    </a:lnT>
+                    <a:lnB w="5080" cap="flat" cmpd="sng" algn="ctr">
+                      <a:solidFill>
+                        <a:srgbClr val="E2E8F0"/>
+                      </a:solidFill>
+                      <a:prstDash val="solid"/>
+                      <a:round/>
+                      <a:headEnd type="none" w="med" len="med"/>
+                      <a:tailEnd type="none" w="med" len="med"/>
+                    </a:lnB>
+                    <a:solidFill>
+                      <a:srgbClr val="F8FAFC"/>
+                    </a:solidFill>
+                  </a:tcPr>
+                </a:tc>
+                <a:tc>
+                  <a:txBody>
+                    <a:bodyPr/>
+                    <a:lstStyle/>
+                    <a:p>
+                      <a:pPr algn="ctr" indent="0" marL="0">
+                        <a:buNone/>
+                      </a:pPr>
+                      <a:r>
+                        <a:rPr lang="en-US" sz="1050" dirty="0">
+                          <a:solidFill>
+                            <a:srgbClr val="475569"/>
+                          </a:solidFill>
+                        </a:rPr>
+                        <a:t>4.7 s</a:t>
+                      </a:r>
+                      <a:endParaRPr lang="en-US" sz="1050" dirty="0"/>
+                    </a:p>
+                  </a:txBody>
+                  <a:tcPr marL="91440" marR="91440" marT="45720" marB="45720" anchor="ctr">
+                    <a:lnL w="5080" cap="flat" cmpd="sng" algn="ctr">
+                      <a:solidFill>
+                        <a:srgbClr val="E2E8F0"/>
+                      </a:solidFill>
+                      <a:prstDash val="solid"/>
+                      <a:round/>
+                      <a:headEnd type="none" w="med" len="med"/>
+                      <a:tailEnd type="none" w="med" len="med"/>
+                    </a:lnL>
+                    <a:lnR w="5080" cap="flat" cmpd="sng" algn="ctr">
+                      <a:solidFill>
+                        <a:srgbClr val="E2E8F0"/>
+                      </a:solidFill>
+                      <a:prstDash val="solid"/>
+                      <a:round/>
+                      <a:headEnd type="none" w="med" len="med"/>
+                      <a:tailEnd type="none" w="med" len="med"/>
+                    </a:lnR>
+                    <a:lnT w="5080" cap="flat" cmpd="sng" algn="ctr">
+                      <a:solidFill>
+                        <a:srgbClr val="E2E8F0"/>
+                      </a:solidFill>
+                      <a:prstDash val="solid"/>
+                      <a:round/>
+                      <a:headEnd type="none" w="med" len="med"/>
+                      <a:tailEnd type="none" w="med" len="med"/>
+                    </a:lnT>
+                    <a:lnB w="5080" cap="flat" cmpd="sng" algn="ctr">
+                      <a:solidFill>
+                        <a:srgbClr val="E2E8F0"/>
+                      </a:solidFill>
+                      <a:prstDash val="solid"/>
+                      <a:round/>
+                      <a:headEnd type="none" w="med" len="med"/>
+                      <a:tailEnd type="none" w="med" len="med"/>
+                    </a:lnB>
+                    <a:solidFill>
+                      <a:srgbClr val="F8FAFC"/>
+                    </a:solidFill>
+                  </a:tcPr>
+                </a:tc>
+                <a:tc>
+                  <a:txBody>
+                    <a:bodyPr/>
+                    <a:lstStyle/>
+                    <a:p>
+                      <a:pPr algn="ctr" indent="0" marL="0">
+                        <a:buNone/>
+                      </a:pPr>
+                      <a:r>
+                        <a:rPr lang="en-US" sz="1050" dirty="0">
+                          <a:solidFill>
+                            <a:srgbClr val="475569"/>
+                          </a:solidFill>
+                        </a:rPr>
+                        <a:t>35 s</a:t>
+                      </a:r>
+                      <a:endParaRPr lang="en-US" sz="1050" dirty="0"/>
+                    </a:p>
+                  </a:txBody>
+                  <a:tcPr marL="91440" marR="91440" marT="45720" marB="45720" anchor="ctr">
+                    <a:lnL w="5080" cap="flat" cmpd="sng" algn="ctr">
+                      <a:solidFill>
+                        <a:srgbClr val="E2E8F0"/>
+                      </a:solidFill>
+                      <a:prstDash val="solid"/>
+                      <a:round/>
+                      <a:headEnd type="none" w="med" len="med"/>
+                      <a:tailEnd type="none" w="med" len="med"/>
+                    </a:lnL>
+                    <a:lnR w="5080" cap="flat" cmpd="sng" algn="ctr">
+                      <a:solidFill>
+                        <a:srgbClr val="E2E8F0"/>
+                      </a:solidFill>
+                      <a:prstDash val="solid"/>
+                      <a:round/>
+                      <a:headEnd type="none" w="med" len="med"/>
+                      <a:tailEnd type="none" w="med" len="med"/>
+                    </a:lnR>
+                    <a:lnT w="5080" cap="flat" cmpd="sng" algn="ctr">
+                      <a:solidFill>
+                        <a:srgbClr val="E2E8F0"/>
+                      </a:solidFill>
+                      <a:prstDash val="solid"/>
+                      <a:round/>
+                      <a:headEnd type="none" w="med" len="med"/>
+                      <a:tailEnd type="none" w="med" len="med"/>
+                    </a:lnT>
+                    <a:lnB w="5080" cap="flat" cmpd="sng" algn="ctr">
+                      <a:solidFill>
+                        <a:srgbClr val="E2E8F0"/>
+                      </a:solidFill>
+                      <a:prstDash val="solid"/>
+                      <a:round/>
+                      <a:headEnd type="none" w="med" len="med"/>
+                      <a:tailEnd type="none" w="med" len="med"/>
+                    </a:lnB>
+                    <a:solidFill>
+                      <a:srgbClr val="F8FAFC"/>
+                    </a:solidFill>
+                  </a:tcPr>
+                </a:tc>
+                <a:tc>
+                  <a:txBody>
+                    <a:bodyPr/>
+                    <a:lstStyle/>
+                    <a:p>
+                      <a:pPr algn="ctr" indent="0" marL="0">
+                        <a:buNone/>
+                      </a:pPr>
+                      <a:r>
+                        <a:rPr lang="en-US" sz="1050" dirty="0">
+                          <a:solidFill>
+                            <a:srgbClr val="475569"/>
+                          </a:solidFill>
+                        </a:rPr>
+                        <a:t>34 s</a:t>
+                      </a:r>
+                      <a:endParaRPr lang="en-US" sz="1050" dirty="0"/>
+                    </a:p>
+                  </a:txBody>
+                  <a:tcPr marL="91440" marR="91440" marT="45720" marB="45720" anchor="ctr">
+                    <a:lnL w="5080" cap="flat" cmpd="sng" algn="ctr">
+                      <a:solidFill>
+                        <a:srgbClr val="E2E8F0"/>
+                      </a:solidFill>
+                      <a:prstDash val="solid"/>
+                      <a:round/>
+                      <a:headEnd type="none" w="med" len="med"/>
+                      <a:tailEnd type="none" w="med" len="med"/>
+                    </a:lnL>
+                    <a:lnR w="5080" cap="flat" cmpd="sng" algn="ctr">
+                      <a:solidFill>
+                        <a:srgbClr val="E2E8F0"/>
+                      </a:solidFill>
+                      <a:prstDash val="solid"/>
+                      <a:round/>
+                      <a:headEnd type="none" w="med" len="med"/>
+                      <a:tailEnd type="none" w="med" len="med"/>
+                    </a:lnR>
+                    <a:lnT w="5080" cap="flat" cmpd="sng" algn="ctr">
+                      <a:solidFill>
+                        <a:srgbClr val="E2E8F0"/>
+                      </a:solidFill>
+                      <a:prstDash val="solid"/>
+                      <a:round/>
+                      <a:headEnd type="none" w="med" len="med"/>
+                      <a:tailEnd type="none" w="med" len="med"/>
+                    </a:lnT>
+                    <a:lnB w="5080" cap="flat" cmpd="sng" algn="ctr">
+                      <a:solidFill>
+                        <a:srgbClr val="E2E8F0"/>
+                      </a:solidFill>
+                      <a:prstDash val="solid"/>
+                      <a:round/>
+                      <a:headEnd type="none" w="med" len="med"/>
+                      <a:tailEnd type="none" w="med" len="med"/>
+                    </a:lnB>
+                    <a:solidFill>
+                      <a:srgbClr val="F8FAFC"/>
+                    </a:solidFill>
+                  </a:tcPr>
+                </a:tc>
+              </a:tr>
+              <a:tr h="445770">
+                <a:tc>
+                  <a:txBody>
+                    <a:bodyPr/>
+                    <a:lstStyle/>
+                    <a:p>
+                      <a:pPr algn="l" indent="0" marL="0">
+                        <a:buNone/>
+                      </a:pPr>
+                      <a:r>
+                        <a:rPr lang="en-US" sz="1050" b="1" dirty="0">
+                          <a:solidFill>
+                            <a:srgbClr val="0D1B2A"/>
+                          </a:solidFill>
+                        </a:rPr>
+                        <a:t>Avg tokens/problem</a:t>
+                      </a:r>
+                      <a:endParaRPr lang="en-US" sz="1050" dirty="0"/>
+                    </a:p>
+                  </a:txBody>
+                  <a:tcPr marL="91440" marR="91440" marT="45720" marB="45720" anchor="ctr">
+                    <a:lnL w="5080" cap="flat" cmpd="sng" algn="ctr">
+                      <a:solidFill>
+                        <a:srgbClr val="E2E8F0"/>
+                      </a:solidFill>
+                      <a:prstDash val="solid"/>
+                      <a:round/>
+                      <a:headEnd type="none" w="med" len="med"/>
+                      <a:tailEnd type="none" w="med" len="med"/>
+                    </a:lnL>
+                    <a:lnR w="5080" cap="flat" cmpd="sng" algn="ctr">
+                      <a:solidFill>
+                        <a:srgbClr val="E2E8F0"/>
+                      </a:solidFill>
+                      <a:prstDash val="solid"/>
+                      <a:round/>
+                      <a:headEnd type="none" w="med" len="med"/>
+                      <a:tailEnd type="none" w="med" len="med"/>
+                    </a:lnR>
+                    <a:lnT w="5080" cap="flat" cmpd="sng" algn="ctr">
+                      <a:solidFill>
+                        <a:srgbClr val="E2E8F0"/>
+                      </a:solidFill>
+                      <a:prstDash val="solid"/>
+                      <a:round/>
+                      <a:headEnd type="none" w="med" len="med"/>
+                      <a:tailEnd type="none" w="med" len="med"/>
+                    </a:lnT>
+                    <a:lnB w="5080" cap="flat" cmpd="sng" algn="ctr">
+                      <a:solidFill>
+                        <a:srgbClr val="E2E8F0"/>
+                      </a:solidFill>
+                      <a:prstDash val="solid"/>
+                      <a:round/>
+                      <a:headEnd type="none" w="med" len="med"/>
+                      <a:tailEnd type="none" w="med" len="med"/>
+                    </a:lnB>
+                    <a:solidFill>
+                      <a:srgbClr val="FFFFFF"/>
+                    </a:solidFill>
+                  </a:tcPr>
+                </a:tc>
+                <a:tc>
+                  <a:txBody>
+                    <a:bodyPr/>
+                    <a:lstStyle/>
+                    <a:p>
+                      <a:pPr algn="ctr" indent="0" marL="0">
+                        <a:buNone/>
+                      </a:pPr>
+                      <a:r>
+                        <a:rPr lang="en-US" sz="1050" dirty="0">
+                          <a:solidFill>
+                            <a:srgbClr val="475569"/>
+                          </a:solidFill>
+                        </a:rPr>
+                        <a:t>341</a:t>
+                      </a:r>
+                      <a:endParaRPr lang="en-US" sz="1050" dirty="0"/>
+                    </a:p>
+                  </a:txBody>
+                  <a:tcPr marL="91440" marR="91440" marT="45720" marB="45720" anchor="ctr">
+                    <a:lnL w="5080" cap="flat" cmpd="sng" algn="ctr">
+                      <a:solidFill>
+                        <a:srgbClr val="E2E8F0"/>
+                      </a:solidFill>
+                      <a:prstDash val="solid"/>
+                      <a:round/>
+                      <a:headEnd type="none" w="med" len="med"/>
+                      <a:tailEnd type="none" w="med" len="med"/>
+                    </a:lnL>
+                    <a:lnR w="5080" cap="flat" cmpd="sng" algn="ctr">
+                      <a:solidFill>
+                        <a:srgbClr val="E2E8F0"/>
+                      </a:solidFill>
+                      <a:prstDash val="solid"/>
+                      <a:round/>
+                      <a:headEnd type="none" w="med" len="med"/>
+                      <a:tailEnd type="none" w="med" len="med"/>
+                    </a:lnR>
+                    <a:lnT w="5080" cap="flat" cmpd="sng" algn="ctr">
+                      <a:solidFill>
+                        <a:srgbClr val="E2E8F0"/>
+                      </a:solidFill>
+                      <a:prstDash val="solid"/>
+                      <a:round/>
+                      <a:headEnd type="none" w="med" len="med"/>
+                      <a:tailEnd type="none" w="med" len="med"/>
+                    </a:lnT>
+                    <a:lnB w="5080" cap="flat" cmpd="sng" algn="ctr">
+                      <a:solidFill>
+                        <a:srgbClr val="E2E8F0"/>
+                      </a:solidFill>
+                      <a:prstDash val="solid"/>
+                      <a:round/>
+                      <a:headEnd type="none" w="med" len="med"/>
+                      <a:tailEnd type="none" w="med" len="med"/>
+                    </a:lnB>
+                    <a:solidFill>
+                      <a:srgbClr val="FFFFFF"/>
+                    </a:solidFill>
+                  </a:tcPr>
+                </a:tc>
+                <a:tc>
+                  <a:txBody>
+                    <a:bodyPr/>
+                    <a:lstStyle/>
+                    <a:p>
+                      <a:pPr algn="ctr" indent="0" marL="0">
+                        <a:buNone/>
+                      </a:pPr>
+                      <a:r>
+                        <a:rPr lang="en-US" sz="1050" dirty="0">
+                          <a:solidFill>
+                            <a:srgbClr val="475569"/>
+                          </a:solidFill>
+                        </a:rPr>
+                        <a:t>627</a:t>
+                      </a:r>
+                      <a:endParaRPr lang="en-US" sz="1050" dirty="0"/>
+                    </a:p>
+                  </a:txBody>
+                  <a:tcPr marL="91440" marR="91440" marT="45720" marB="45720" anchor="ctr">
+                    <a:lnL w="5080" cap="flat" cmpd="sng" algn="ctr">
+                      <a:solidFill>
+                        <a:srgbClr val="E2E8F0"/>
+                      </a:solidFill>
+                      <a:prstDash val="solid"/>
+                      <a:round/>
+                      <a:headEnd type="none" w="med" len="med"/>
+                      <a:tailEnd type="none" w="med" len="med"/>
+                    </a:lnL>
+                    <a:lnR w="5080" cap="flat" cmpd="sng" algn="ctr">
+                      <a:solidFill>
+                        <a:srgbClr val="E2E8F0"/>
+                      </a:solidFill>
+                      <a:prstDash val="solid"/>
+                      <a:round/>
+                      <a:headEnd type="none" w="med" len="med"/>
+                      <a:tailEnd type="none" w="med" len="med"/>
+                    </a:lnR>
+                    <a:lnT w="5080" cap="flat" cmpd="sng" algn="ctr">
+                      <a:solidFill>
+                        <a:srgbClr val="E2E8F0"/>
+                      </a:solidFill>
+                      <a:prstDash val="solid"/>
+                      <a:round/>
+                      <a:headEnd type="none" w="med" len="med"/>
+                      <a:tailEnd type="none" w="med" len="med"/>
+                    </a:lnT>
+                    <a:lnB w="5080" cap="flat" cmpd="sng" algn="ctr">
+                      <a:solidFill>
+                        <a:srgbClr val="E2E8F0"/>
+                      </a:solidFill>
+                      <a:prstDash val="solid"/>
+                      <a:round/>
+                      <a:headEnd type="none" w="med" len="med"/>
+                      <a:tailEnd type="none" w="med" len="med"/>
+                    </a:lnB>
+                    <a:solidFill>
+                      <a:srgbClr val="FFFFFF"/>
+                    </a:solidFill>
+                  </a:tcPr>
+                </a:tc>
+                <a:tc>
+                  <a:txBody>
+                    <a:bodyPr/>
+                    <a:lstStyle/>
+                    <a:p>
+                      <a:pPr algn="ctr" indent="0" marL="0">
+                        <a:buNone/>
+                      </a:pPr>
+                      <a:r>
+                        <a:rPr lang="en-US" sz="1050" dirty="0">
+                          <a:solidFill>
+                            <a:srgbClr val="475569"/>
+                          </a:solidFill>
+                        </a:rPr>
+                        <a:t>413</a:t>
+                      </a:r>
+                      <a:endParaRPr lang="en-US" sz="1050" dirty="0"/>
+                    </a:p>
+                  </a:txBody>
+                  <a:tcPr marL="91440" marR="91440" marT="45720" marB="45720" anchor="ctr">
+                    <a:lnL w="5080" cap="flat" cmpd="sng" algn="ctr">
+                      <a:solidFill>
+                        <a:srgbClr val="E2E8F0"/>
+                      </a:solidFill>
+                      <a:prstDash val="solid"/>
+                      <a:round/>
+                      <a:headEnd type="none" w="med" len="med"/>
+                      <a:tailEnd type="none" w="med" len="med"/>
+                    </a:lnL>
+                    <a:lnR w="5080" cap="flat" cmpd="sng" algn="ctr">
+                      <a:solidFill>
+                        <a:srgbClr val="E2E8F0"/>
+                      </a:solidFill>
+                      <a:prstDash val="solid"/>
+                      <a:round/>
+                      <a:headEnd type="none" w="med" len="med"/>
+                      <a:tailEnd type="none" w="med" len="med"/>
+                    </a:lnR>
+                    <a:lnT w="5080" cap="flat" cmpd="sng" algn="ctr">
+                      <a:solidFill>
+                        <a:srgbClr val="E2E8F0"/>
+                      </a:solidFill>
+                      <a:prstDash val="solid"/>
+                      <a:round/>
+                      <a:headEnd type="none" w="med" len="med"/>
+                      <a:tailEnd type="none" w="med" len="med"/>
+                    </a:lnT>
+                    <a:lnB w="5080" cap="flat" cmpd="sng" algn="ctr">
+                      <a:solidFill>
+                        <a:srgbClr val="E2E8F0"/>
+                      </a:solidFill>
+                      <a:prstDash val="solid"/>
+                      <a:round/>
+                      <a:headEnd type="none" w="med" len="med"/>
+                      <a:tailEnd type="none" w="med" len="med"/>
+                    </a:lnB>
+                    <a:solidFill>
+                      <a:srgbClr val="FFFFFF"/>
+                    </a:solidFill>
+                  </a:tcPr>
+                </a:tc>
+                <a:tc>
+                  <a:txBody>
+                    <a:bodyPr/>
+                    <a:lstStyle/>
+                    <a:p>
+                      <a:pPr algn="ctr" indent="0" marL="0">
+                        <a:buNone/>
+                      </a:pPr>
+                      <a:r>
+                        <a:rPr lang="en-US" sz="1050" dirty="0">
+                          <a:solidFill>
+                            <a:srgbClr val="475569"/>
+                          </a:solidFill>
+                        </a:rPr>
+                        <a:t>436</a:t>
+                      </a:r>
+                      <a:endParaRPr lang="en-US" sz="1050" dirty="0"/>
+                    </a:p>
+                  </a:txBody>
+                  <a:tcPr marL="91440" marR="91440" marT="45720" marB="45720" anchor="ctr">
+                    <a:lnL w="5080" cap="flat" cmpd="sng" algn="ctr">
+                      <a:solidFill>
+                        <a:srgbClr val="E2E8F0"/>
+                      </a:solidFill>
+                      <a:prstDash val="solid"/>
+                      <a:round/>
+                      <a:headEnd type="none" w="med" len="med"/>
+                      <a:tailEnd type="none" w="med" len="med"/>
+                    </a:lnL>
+                    <a:lnR w="5080" cap="flat" cmpd="sng" algn="ctr">
+                      <a:solidFill>
+                        <a:srgbClr val="E2E8F0"/>
+                      </a:solidFill>
+                      <a:prstDash val="solid"/>
+                      <a:round/>
+                      <a:headEnd type="none" w="med" len="med"/>
+                      <a:tailEnd type="none" w="med" len="med"/>
+                    </a:lnR>
+                    <a:lnT w="5080" cap="flat" cmpd="sng" algn="ctr">
+                      <a:solidFill>
+                        <a:srgbClr val="E2E8F0"/>
+                      </a:solidFill>
+                      <a:prstDash val="solid"/>
+                      <a:round/>
+                      <a:headEnd type="none" w="med" len="med"/>
+                      <a:tailEnd type="none" w="med" len="med"/>
+                    </a:lnT>
+                    <a:lnB w="5080" cap="flat" cmpd="sng" algn="ctr">
+                      <a:solidFill>
+                        <a:srgbClr val="E2E8F0"/>
+                      </a:solidFill>
+                      <a:prstDash val="solid"/>
+                      <a:round/>
+                      <a:headEnd type="none" w="med" len="med"/>
+                      <a:tailEnd type="none" w="med" len="med"/>
+                    </a:lnB>
+                    <a:solidFill>
+                      <a:srgbClr val="FFFFFF"/>
+                    </a:solidFill>
+                  </a:tcPr>
+                </a:tc>
+              </a:tr>
+              <a:tr h="445770">
+                <a:tc>
+                  <a:txBody>
+                    <a:bodyPr/>
+                    <a:lstStyle/>
+                    <a:p>
+                      <a:pPr algn="l" indent="0" marL="0">
+                        <a:buNone/>
+                      </a:pPr>
+                      <a:r>
+                        <a:rPr lang="en-US" sz="1050" b="1" dirty="0">
+                          <a:solidFill>
+                            <a:srgbClr val="0D1B2A"/>
+                          </a:solidFill>
+                        </a:rPr>
+                        <a:t>Fits 16 GB GPU</a:t>
+                      </a:r>
+                      <a:endParaRPr lang="en-US" sz="1050" dirty="0"/>
+                    </a:p>
+                  </a:txBody>
+                  <a:tcPr marL="91440" marR="91440" marT="45720" marB="45720" anchor="ctr">
+                    <a:lnL w="5080" cap="flat" cmpd="sng" algn="ctr">
+                      <a:solidFill>
+                        <a:srgbClr val="E2E8F0"/>
+                      </a:solidFill>
+                      <a:prstDash val="solid"/>
+                      <a:round/>
+                      <a:headEnd type="none" w="med" len="med"/>
+                      <a:tailEnd type="none" w="med" len="med"/>
+                    </a:lnL>
+                    <a:lnR w="5080" cap="flat" cmpd="sng" algn="ctr">
+                      <a:solidFill>
+                        <a:srgbClr val="E2E8F0"/>
+                      </a:solidFill>
+                      <a:prstDash val="solid"/>
+                      <a:round/>
+                      <a:headEnd type="none" w="med" len="med"/>
+                      <a:tailEnd type="none" w="med" len="med"/>
+                    </a:lnR>
+                    <a:lnT w="5080" cap="flat" cmpd="sng" algn="ctr">
+                      <a:solidFill>
+                        <a:srgbClr val="E2E8F0"/>
+                      </a:solidFill>
+                      <a:prstDash val="solid"/>
+                      <a:round/>
+                      <a:headEnd type="none" w="med" len="med"/>
+                      <a:tailEnd type="none" w="med" len="med"/>
+                    </a:lnT>
+                    <a:lnB w="5080" cap="flat" cmpd="sng" algn="ctr">
+                      <a:solidFill>
+                        <a:srgbClr val="E2E8F0"/>
+                      </a:solidFill>
+                      <a:prstDash val="solid"/>
+                      <a:round/>
+                      <a:headEnd type="none" w="med" len="med"/>
+                      <a:tailEnd type="none" w="med" len="med"/>
+                    </a:lnB>
+                    <a:solidFill>
+                      <a:srgbClr val="F8FAFC"/>
+                    </a:solidFill>
+                  </a:tcPr>
+                </a:tc>
+                <a:tc>
+                  <a:txBody>
+                    <a:bodyPr/>
+                    <a:lstStyle/>
+                    <a:p>
+                      <a:pPr algn="ctr" indent="0" marL="0">
+                        <a:buNone/>
+                      </a:pPr>
+                      <a:r>
+                        <a:rPr lang="en-US" sz="1050" dirty="0">
+                          <a:solidFill>
+                            <a:srgbClr val="475569"/>
+                          </a:solidFill>
+                        </a:rPr>
+                        <a:t>yes</a:t>
+                      </a:r>
+                      <a:endParaRPr lang="en-US" sz="1050" dirty="0"/>
+                    </a:p>
+                  </a:txBody>
+                  <a:tcPr marL="91440" marR="91440" marT="45720" marB="45720" anchor="ctr">
+                    <a:lnL w="5080" cap="flat" cmpd="sng" algn="ctr">
+                      <a:solidFill>
+                        <a:srgbClr val="E2E8F0"/>
+                      </a:solidFill>
+                      <a:prstDash val="solid"/>
+                      <a:round/>
+                      <a:headEnd type="none" w="med" len="med"/>
+                      <a:tailEnd type="none" w="med" len="med"/>
+                    </a:lnL>
+                    <a:lnR w="5080" cap="flat" cmpd="sng" algn="ctr">
+                      <a:solidFill>
+                        <a:srgbClr val="E2E8F0"/>
+                      </a:solidFill>
+                      <a:prstDash val="solid"/>
+                      <a:round/>
+                      <a:headEnd type="none" w="med" len="med"/>
+                      <a:tailEnd type="none" w="med" len="med"/>
+                    </a:lnR>
+                    <a:lnT w="5080" cap="flat" cmpd="sng" algn="ctr">
+                      <a:solidFill>
+                        <a:srgbClr val="E2E8F0"/>
+                      </a:solidFill>
+                      <a:prstDash val="solid"/>
+                      <a:round/>
+                      <a:headEnd type="none" w="med" len="med"/>
+                      <a:tailEnd type="none" w="med" len="med"/>
+                    </a:lnT>
+                    <a:lnB w="5080" cap="flat" cmpd="sng" algn="ctr">
+                      <a:solidFill>
+                        <a:srgbClr val="E2E8F0"/>
+                      </a:solidFill>
+                      <a:prstDash val="solid"/>
+                      <a:round/>
+                      <a:headEnd type="none" w="med" len="med"/>
+                      <a:tailEnd type="none" w="med" len="med"/>
+                    </a:lnB>
+                    <a:solidFill>
+                      <a:srgbClr val="F8FAFC"/>
+                    </a:solidFill>
+                  </a:tcPr>
+                </a:tc>
+                <a:tc>
+                  <a:txBody>
+                    <a:bodyPr/>
+                    <a:lstStyle/>
+                    <a:p>
+                      <a:pPr algn="ctr" indent="0" marL="0">
+                        <a:buNone/>
+                      </a:pPr>
+                      <a:r>
+                        <a:rPr lang="en-US" sz="1050" dirty="0">
+                          <a:solidFill>
+                            <a:srgbClr val="475569"/>
+                          </a:solidFill>
+                        </a:rPr>
+                        <a:t>yes</a:t>
+                      </a:r>
+                      <a:endParaRPr lang="en-US" sz="1050" dirty="0"/>
+                    </a:p>
+                  </a:txBody>
+                  <a:tcPr marL="91440" marR="91440" marT="45720" marB="45720" anchor="ctr">
+                    <a:lnL w="5080" cap="flat" cmpd="sng" algn="ctr">
+                      <a:solidFill>
+                        <a:srgbClr val="E2E8F0"/>
+                      </a:solidFill>
+                      <a:prstDash val="solid"/>
+                      <a:round/>
+                      <a:headEnd type="none" w="med" len="med"/>
+                      <a:tailEnd type="none" w="med" len="med"/>
+                    </a:lnL>
+                    <a:lnR w="5080" cap="flat" cmpd="sng" algn="ctr">
+                      <a:solidFill>
+                        <a:srgbClr val="E2E8F0"/>
+                      </a:solidFill>
+                      <a:prstDash val="solid"/>
+                      <a:round/>
+                      <a:headEnd type="none" w="med" len="med"/>
+                      <a:tailEnd type="none" w="med" len="med"/>
+                    </a:lnR>
+                    <a:lnT w="5080" cap="flat" cmpd="sng" algn="ctr">
+                      <a:solidFill>
+                        <a:srgbClr val="E2E8F0"/>
+                      </a:solidFill>
+                      <a:prstDash val="solid"/>
+                      <a:round/>
+                      <a:headEnd type="none" w="med" len="med"/>
+                      <a:tailEnd type="none" w="med" len="med"/>
+                    </a:lnT>
+                    <a:lnB w="5080" cap="flat" cmpd="sng" algn="ctr">
+                      <a:solidFill>
+                        <a:srgbClr val="E2E8F0"/>
+                      </a:solidFill>
+                      <a:prstDash val="solid"/>
+                      <a:round/>
+                      <a:headEnd type="none" w="med" len="med"/>
+                      <a:tailEnd type="none" w="med" len="med"/>
+                    </a:lnB>
+                    <a:solidFill>
+                      <a:srgbClr val="F8FAFC"/>
+                    </a:solidFill>
+                  </a:tcPr>
+                </a:tc>
+                <a:tc>
+                  <a:txBody>
+                    <a:bodyPr/>
+                    <a:lstStyle/>
+                    <a:p>
+                      <a:pPr algn="ctr" indent="0" marL="0">
+                        <a:buNone/>
+                      </a:pPr>
+                      <a:r>
+                        <a:rPr lang="en-US" sz="1050" dirty="0">
+                          <a:solidFill>
+                            <a:srgbClr val="475569"/>
+                          </a:solidFill>
+                        </a:rPr>
+                        <a:t>no (offload)</a:t>
+                      </a:r>
+                      <a:endParaRPr lang="en-US" sz="1050" dirty="0"/>
+                    </a:p>
+                  </a:txBody>
+                  <a:tcPr marL="91440" marR="91440" marT="45720" marB="45720" anchor="ctr">
+                    <a:lnL w="5080" cap="flat" cmpd="sng" algn="ctr">
+                      <a:solidFill>
+                        <a:srgbClr val="E2E8F0"/>
+                      </a:solidFill>
+                      <a:prstDash val="solid"/>
+                      <a:round/>
+                      <a:headEnd type="none" w="med" len="med"/>
+                      <a:tailEnd type="none" w="med" len="med"/>
+                    </a:lnL>
+                    <a:lnR w="5080" cap="flat" cmpd="sng" algn="ctr">
+                      <a:solidFill>
+                        <a:srgbClr val="E2E8F0"/>
+                      </a:solidFill>
+                      <a:prstDash val="solid"/>
+                      <a:round/>
+                      <a:headEnd type="none" w="med" len="med"/>
+                      <a:tailEnd type="none" w="med" len="med"/>
+                    </a:lnR>
+                    <a:lnT w="5080" cap="flat" cmpd="sng" algn="ctr">
+                      <a:solidFill>
+                        <a:srgbClr val="E2E8F0"/>
+                      </a:solidFill>
+                      <a:prstDash val="solid"/>
+                      <a:round/>
+                      <a:headEnd type="none" w="med" len="med"/>
+                      <a:tailEnd type="none" w="med" len="med"/>
+                    </a:lnT>
+                    <a:lnB w="5080" cap="flat" cmpd="sng" algn="ctr">
+                      <a:solidFill>
+                        <a:srgbClr val="E2E8F0"/>
+                      </a:solidFill>
+                      <a:prstDash val="solid"/>
+                      <a:round/>
+                      <a:headEnd type="none" w="med" len="med"/>
+                      <a:tailEnd type="none" w="med" len="med"/>
+                    </a:lnB>
+                    <a:solidFill>
+                      <a:srgbClr val="F8FAFC"/>
+                    </a:solidFill>
+                  </a:tcPr>
+                </a:tc>
+                <a:tc>
+                  <a:txBody>
+                    <a:bodyPr/>
+                    <a:lstStyle/>
+                    <a:p>
+                      <a:pPr algn="ctr" indent="0" marL="0">
+                        <a:buNone/>
+                      </a:pPr>
+                      <a:r>
+                        <a:rPr lang="en-US" sz="1050" dirty="0">
+                          <a:solidFill>
+                            <a:srgbClr val="475569"/>
+                          </a:solidFill>
+                        </a:rPr>
+                        <a:t>no (offload)</a:t>
+                      </a:r>
+                      <a:endParaRPr lang="en-US" sz="1050" dirty="0"/>
+                    </a:p>
+                  </a:txBody>
+                  <a:tcPr marL="91440" marR="91440" marT="45720" marB="45720" anchor="ctr">
+                    <a:lnL w="5080" cap="flat" cmpd="sng" algn="ctr">
+                      <a:solidFill>
+                        <a:srgbClr val="E2E8F0"/>
+                      </a:solidFill>
+                      <a:prstDash val="solid"/>
+                      <a:round/>
+                      <a:headEnd type="none" w="med" len="med"/>
+                      <a:tailEnd type="none" w="med" len="med"/>
+                    </a:lnL>
+                    <a:lnR w="5080" cap="flat" cmpd="sng" algn="ctr">
+                      <a:solidFill>
+                        <a:srgbClr val="E2E8F0"/>
+                      </a:solidFill>
+                      <a:prstDash val="solid"/>
+                      <a:round/>
+                      <a:headEnd type="none" w="med" len="med"/>
+                      <a:tailEnd type="none" w="med" len="med"/>
+                    </a:lnR>
+                    <a:lnT w="5080" cap="flat" cmpd="sng" algn="ctr">
+                      <a:solidFill>
+                        <a:srgbClr val="E2E8F0"/>
+                      </a:solidFill>
+                      <a:prstDash val="solid"/>
+                      <a:round/>
+                      <a:headEnd type="none" w="med" len="med"/>
+                      <a:tailEnd type="none" w="med" len="med"/>
+                    </a:lnT>
+                    <a:lnB w="5080" cap="flat" cmpd="sng" algn="ctr">
+                      <a:solidFill>
+                        <a:srgbClr val="E2E8F0"/>
+                      </a:solidFill>
+                      <a:prstDash val="solid"/>
+                      <a:round/>
+                      <a:headEnd type="none" w="med" len="med"/>
+                      <a:tailEnd type="none" w="med" len="med"/>
+                    </a:lnB>
+                    <a:solidFill>
+                      <a:srgbClr val="F8FAFC"/>
+                    </a:solidFill>
+                  </a:tcPr>
+                </a:tc>
+              </a:tr>
+              <a:tr h="445770">
+                <a:tc>
+                  <a:txBody>
+                    <a:bodyPr/>
+                    <a:lstStyle/>
+                    <a:p>
+                      <a:pPr algn="l" indent="0" marL="0">
+                        <a:buNone/>
+                      </a:pPr>
+                      <a:r>
+                        <a:rPr lang="en-US" sz="1050" b="1" dirty="0">
+                          <a:solidFill>
+                            <a:srgbClr val="0D1B2A"/>
+                          </a:solidFill>
+                        </a:rPr>
+                        <a:t>Reliability</a:t>
+                      </a:r>
+                      <a:endParaRPr lang="en-US" sz="1050" dirty="0"/>
+                    </a:p>
+                  </a:txBody>
+                  <a:tcPr marL="91440" marR="91440" marT="45720" marB="45720" anchor="ctr">
+                    <a:lnL w="5080" cap="flat" cmpd="sng" algn="ctr">
+                      <a:solidFill>
+                        <a:srgbClr val="E2E8F0"/>
+                      </a:solidFill>
+                      <a:prstDash val="solid"/>
+                      <a:round/>
+                      <a:headEnd type="none" w="med" len="med"/>
+                      <a:tailEnd type="none" w="med" len="med"/>
+                    </a:lnL>
+                    <a:lnR w="5080" cap="flat" cmpd="sng" algn="ctr">
+                      <a:solidFill>
+                        <a:srgbClr val="E2E8F0"/>
+                      </a:solidFill>
+                      <a:prstDash val="solid"/>
+                      <a:round/>
+                      <a:headEnd type="none" w="med" len="med"/>
+                      <a:tailEnd type="none" w="med" len="med"/>
+                    </a:lnR>
+                    <a:lnT w="5080" cap="flat" cmpd="sng" algn="ctr">
+                      <a:solidFill>
+                        <a:srgbClr val="E2E8F0"/>
+                      </a:solidFill>
+                      <a:prstDash val="solid"/>
+                      <a:round/>
+                      <a:headEnd type="none" w="med" len="med"/>
+                      <a:tailEnd type="none" w="med" len="med"/>
+                    </a:lnT>
+                    <a:lnB w="5080" cap="flat" cmpd="sng" algn="ctr">
+                      <a:solidFill>
+                        <a:srgbClr val="E2E8F0"/>
+                      </a:solidFill>
+                      <a:prstDash val="solid"/>
+                      <a:round/>
+                      <a:headEnd type="none" w="med" len="med"/>
+                      <a:tailEnd type="none" w="med" len="med"/>
+                    </a:lnB>
+                    <a:solidFill>
+                      <a:srgbClr val="FFFFFF"/>
+                    </a:solidFill>
+                  </a:tcPr>
+                </a:tc>
+                <a:tc>
+                  <a:txBody>
+                    <a:bodyPr/>
+                    <a:lstStyle/>
+                    <a:p>
+                      <a:pPr algn="ctr" indent="0" marL="0">
+                        <a:buNone/>
+                      </a:pPr>
+                      <a:r>
+                        <a:rPr lang="en-US" sz="1050" dirty="0">
+                          <a:solidFill>
+                            <a:srgbClr val="475569"/>
+                          </a:solidFill>
+                        </a:rPr>
+                        <a:t>flaky</a:t>
+                      </a:r>
+                      <a:endParaRPr lang="en-US" sz="1050" dirty="0"/>
+                    </a:p>
+                  </a:txBody>
+                  <a:tcPr marL="91440" marR="91440" marT="45720" marB="45720" anchor="ctr">
+                    <a:lnL w="5080" cap="flat" cmpd="sng" algn="ctr">
+                      <a:solidFill>
+                        <a:srgbClr val="E2E8F0"/>
+                      </a:solidFill>
+                      <a:prstDash val="solid"/>
+                      <a:round/>
+                      <a:headEnd type="none" w="med" len="med"/>
+                      <a:tailEnd type="none" w="med" len="med"/>
+                    </a:lnL>
+                    <a:lnR w="5080" cap="flat" cmpd="sng" algn="ctr">
+                      <a:solidFill>
+                        <a:srgbClr val="E2E8F0"/>
+                      </a:solidFill>
+                      <a:prstDash val="solid"/>
+                      <a:round/>
+                      <a:headEnd type="none" w="med" len="med"/>
+                      <a:tailEnd type="none" w="med" len="med"/>
+                    </a:lnR>
+                    <a:lnT w="5080" cap="flat" cmpd="sng" algn="ctr">
+                      <a:solidFill>
+                        <a:srgbClr val="E2E8F0"/>
+                      </a:solidFill>
+                      <a:prstDash val="solid"/>
+                      <a:round/>
+                      <a:headEnd type="none" w="med" len="med"/>
+                      <a:tailEnd type="none" w="med" len="med"/>
+                    </a:lnT>
+                    <a:lnB w="5080" cap="flat" cmpd="sng" algn="ctr">
+                      <a:solidFill>
+                        <a:srgbClr val="E2E8F0"/>
+                      </a:solidFill>
+                      <a:prstDash val="solid"/>
+                      <a:round/>
+                      <a:headEnd type="none" w="med" len="med"/>
+                      <a:tailEnd type="none" w="med" len="med"/>
+                    </a:lnB>
+                    <a:solidFill>
+                      <a:srgbClr val="FFFFFF"/>
+                    </a:solidFill>
+                  </a:tcPr>
+                </a:tc>
+                <a:tc>
+                  <a:txBody>
+                    <a:bodyPr/>
+                    <a:lstStyle/>
+                    <a:p>
+                      <a:pPr algn="ctr" indent="0" marL="0">
+                        <a:buNone/>
+                      </a:pPr>
+                      <a:r>
+                        <a:rPr lang="en-US" sz="1050" dirty="0">
+                          <a:solidFill>
+                            <a:srgbClr val="475569"/>
+                          </a:solidFill>
+                        </a:rPr>
+                        <a:t>solid</a:t>
+                      </a:r>
+                      <a:endParaRPr lang="en-US" sz="1050" dirty="0"/>
+                    </a:p>
+                  </a:txBody>
+                  <a:tcPr marL="91440" marR="91440" marT="45720" marB="45720" anchor="ctr">
+                    <a:lnL w="5080" cap="flat" cmpd="sng" algn="ctr">
+                      <a:solidFill>
+                        <a:srgbClr val="E2E8F0"/>
+                      </a:solidFill>
+                      <a:prstDash val="solid"/>
+                      <a:round/>
+                      <a:headEnd type="none" w="med" len="med"/>
+                      <a:tailEnd type="none" w="med" len="med"/>
+                    </a:lnL>
+                    <a:lnR w="5080" cap="flat" cmpd="sng" algn="ctr">
+                      <a:solidFill>
+                        <a:srgbClr val="E2E8F0"/>
+                      </a:solidFill>
+                      <a:prstDash val="solid"/>
+                      <a:round/>
+                      <a:headEnd type="none" w="med" len="med"/>
+                      <a:tailEnd type="none" w="med" len="med"/>
+                    </a:lnR>
+                    <a:lnT w="5080" cap="flat" cmpd="sng" algn="ctr">
+                      <a:solidFill>
+                        <a:srgbClr val="E2E8F0"/>
+                      </a:solidFill>
+                      <a:prstDash val="solid"/>
+                      <a:round/>
+                      <a:headEnd type="none" w="med" len="med"/>
+                      <a:tailEnd type="none" w="med" len="med"/>
+                    </a:lnT>
+                    <a:lnB w="5080" cap="flat" cmpd="sng" algn="ctr">
+                      <a:solidFill>
+                        <a:srgbClr val="E2E8F0"/>
+                      </a:solidFill>
+                      <a:prstDash val="solid"/>
+                      <a:round/>
+                      <a:headEnd type="none" w="med" len="med"/>
+                      <a:tailEnd type="none" w="med" len="med"/>
+                    </a:lnB>
+                    <a:solidFill>
+                      <a:srgbClr val="FFFFFF"/>
+                    </a:solidFill>
+                  </a:tcPr>
+                </a:tc>
+                <a:tc>
+                  <a:txBody>
+                    <a:bodyPr/>
+                    <a:lstStyle/>
+                    <a:p>
+                      <a:pPr algn="ctr" indent="0" marL="0">
+                        <a:buNone/>
+                      </a:pPr>
+                      <a:r>
+                        <a:rPr lang="en-US" sz="1050" dirty="0">
+                          <a:solidFill>
+                            <a:srgbClr val="475569"/>
+                          </a:solidFill>
+                        </a:rPr>
+                        <a:t>excellent</a:t>
+                      </a:r>
+                      <a:endParaRPr lang="en-US" sz="1050" dirty="0"/>
+                    </a:p>
+                  </a:txBody>
+                  <a:tcPr marL="91440" marR="91440" marT="45720" marB="45720" anchor="ctr">
+                    <a:lnL w="5080" cap="flat" cmpd="sng" algn="ctr">
+                      <a:solidFill>
+                        <a:srgbClr val="E2E8F0"/>
+                      </a:solidFill>
+                      <a:prstDash val="solid"/>
+                      <a:round/>
+                      <a:headEnd type="none" w="med" len="med"/>
+                      <a:tailEnd type="none" w="med" len="med"/>
+                    </a:lnL>
+                    <a:lnR w="5080" cap="flat" cmpd="sng" algn="ctr">
+                      <a:solidFill>
+                        <a:srgbClr val="E2E8F0"/>
+                      </a:solidFill>
+                      <a:prstDash val="solid"/>
+                      <a:round/>
+                      <a:headEnd type="none" w="med" len="med"/>
+                      <a:tailEnd type="none" w="med" len="med"/>
+                    </a:lnR>
+                    <a:lnT w="5080" cap="flat" cmpd="sng" algn="ctr">
+                      <a:solidFill>
+                        <a:srgbClr val="E2E8F0"/>
+                      </a:solidFill>
+                      <a:prstDash val="solid"/>
+                      <a:round/>
+                      <a:headEnd type="none" w="med" len="med"/>
+                      <a:tailEnd type="none" w="med" len="med"/>
+                    </a:lnT>
+                    <a:lnB w="5080" cap="flat" cmpd="sng" algn="ctr">
+                      <a:solidFill>
+                        <a:srgbClr val="E2E8F0"/>
+                      </a:solidFill>
+                      <a:prstDash val="solid"/>
+                      <a:round/>
+                      <a:headEnd type="none" w="med" len="med"/>
+                      <a:tailEnd type="none" w="med" len="med"/>
+                    </a:lnB>
+                    <a:solidFill>
+                      <a:srgbClr val="FFFFFF"/>
+                    </a:solidFill>
+                  </a:tcPr>
+                </a:tc>
+                <a:tc>
+                  <a:txBody>
+                    <a:bodyPr/>
+                    <a:lstStyle/>
+                    <a:p>
+                      <a:pPr algn="ctr" indent="0" marL="0">
+                        <a:buNone/>
+                      </a:pPr>
+                      <a:r>
+                        <a:rPr lang="en-US" sz="1050" dirty="0">
+                          <a:solidFill>
+                            <a:srgbClr val="475569"/>
+                          </a:solidFill>
+                        </a:rPr>
+                        <a:t>excellent</a:t>
+                      </a:r>
+                      <a:endParaRPr lang="en-US" sz="1050" dirty="0"/>
+                    </a:p>
+                  </a:txBody>
+                  <a:tcPr marL="91440" marR="91440" marT="45720" marB="45720" anchor="ctr">
+                    <a:lnL w="5080" cap="flat" cmpd="sng" algn="ctr">
+                      <a:solidFill>
+                        <a:srgbClr val="E2E8F0"/>
+                      </a:solidFill>
+                      <a:prstDash val="solid"/>
+                      <a:round/>
+                      <a:headEnd type="none" w="med" len="med"/>
+                      <a:tailEnd type="none" w="med" len="med"/>
+                    </a:lnL>
+                    <a:lnR w="5080" cap="flat" cmpd="sng" algn="ctr">
+                      <a:solidFill>
+                        <a:srgbClr val="E2E8F0"/>
+                      </a:solidFill>
+                      <a:prstDash val="solid"/>
+                      <a:round/>
+                      <a:headEnd type="none" w="med" len="med"/>
+                      <a:tailEnd type="none" w="med" len="med"/>
+                    </a:lnR>
+                    <a:lnT w="5080" cap="flat" cmpd="sng" algn="ctr">
+                      <a:solidFill>
+                        <a:srgbClr val="E2E8F0"/>
+                      </a:solidFill>
+                      <a:prstDash val="solid"/>
+                      <a:round/>
+                      <a:headEnd type="none" w="med" len="med"/>
+                      <a:tailEnd type="none" w="med" len="med"/>
+                    </a:lnT>
+                    <a:lnB w="5080" cap="flat" cmpd="sng" algn="ctr">
+                      <a:solidFill>
+                        <a:srgbClr val="E2E8F0"/>
+                      </a:solidFill>
+                      <a:prstDash val="solid"/>
+                      <a:round/>
+                      <a:headEnd type="none" w="med" len="med"/>
+                      <a:tailEnd type="none" w="med" len="med"/>
+                    </a:lnB>
+                    <a:solidFill>
+                      <a:srgbClr val="FFFFFF"/>
+                    </a:solidFill>
+                  </a:tcPr>
+                </a:tc>
+              </a:tr>
+              <a:tr h="445770">
+                <a:tc>
+                  <a:txBody>
+                    <a:bodyPr/>
+                    <a:lstStyle/>
+                    <a:p>
+                      <a:pPr algn="l" indent="0" marL="0">
+                        <a:buNone/>
+                      </a:pPr>
+                      <a:r>
+                        <a:rPr lang="en-US" sz="1050" b="1" dirty="0">
+                          <a:solidFill>
+                            <a:srgbClr val="0D1B2A"/>
+                          </a:solidFill>
+                        </a:rPr>
+                        <a:t>Best for</a:t>
+                      </a:r>
+                      <a:endParaRPr lang="en-US" sz="1050" dirty="0"/>
+                    </a:p>
+                  </a:txBody>
+                  <a:tcPr marL="91440" marR="91440" marT="45720" marB="45720" anchor="ctr">
+                    <a:lnL w="5080" cap="flat" cmpd="sng" algn="ctr">
+                      <a:solidFill>
+                        <a:srgbClr val="E2E8F0"/>
+                      </a:solidFill>
+                      <a:prstDash val="solid"/>
+                      <a:round/>
+                      <a:headEnd type="none" w="med" len="med"/>
+                      <a:tailEnd type="none" w="med" len="med"/>
+                    </a:lnL>
+                    <a:lnR w="5080" cap="flat" cmpd="sng" algn="ctr">
+                      <a:solidFill>
+                        <a:srgbClr val="E2E8F0"/>
+                      </a:solidFill>
+                      <a:prstDash val="solid"/>
+                      <a:round/>
+                      <a:headEnd type="none" w="med" len="med"/>
+                      <a:tailEnd type="none" w="med" len="med"/>
+                    </a:lnR>
+                    <a:lnT w="5080" cap="flat" cmpd="sng" algn="ctr">
+                      <a:solidFill>
+                        <a:srgbClr val="E2E8F0"/>
+                      </a:solidFill>
+                      <a:prstDash val="solid"/>
+                      <a:round/>
+                      <a:headEnd type="none" w="med" len="med"/>
+                      <a:tailEnd type="none" w="med" len="med"/>
+                    </a:lnT>
+                    <a:lnB w="5080" cap="flat" cmpd="sng" algn="ctr">
+                      <a:solidFill>
+                        <a:srgbClr val="E2E8F0"/>
+                      </a:solidFill>
+                      <a:prstDash val="solid"/>
+                      <a:round/>
+                      <a:headEnd type="none" w="med" len="med"/>
+                      <a:tailEnd type="none" w="med" len="med"/>
+                    </a:lnB>
+                    <a:solidFill>
+                      <a:srgbClr val="F8FAFC"/>
+                    </a:solidFill>
+                  </a:tcPr>
+                </a:tc>
+                <a:tc>
+                  <a:txBody>
+                    <a:bodyPr/>
+                    <a:lstStyle/>
+                    <a:p>
+                      <a:pPr algn="ctr" indent="0" marL="0">
+                        <a:buNone/>
+                      </a:pPr>
+                      <a:r>
+                        <a:rPr lang="en-US" sz="1050" dirty="0">
+                          <a:solidFill>
+                            <a:srgbClr val="475569"/>
+                          </a:solidFill>
+                        </a:rPr>
+                        <a:t>speed</a:t>
+                      </a:r>
+                      <a:endParaRPr lang="en-US" sz="1050" dirty="0"/>
+                    </a:p>
+                  </a:txBody>
+                  <a:tcPr marL="91440" marR="91440" marT="45720" marB="45720" anchor="ctr">
+                    <a:lnL w="5080" cap="flat" cmpd="sng" algn="ctr">
+                      <a:solidFill>
+                        <a:srgbClr val="E2E8F0"/>
+                      </a:solidFill>
+                      <a:prstDash val="solid"/>
+                      <a:round/>
+                      <a:headEnd type="none" w="med" len="med"/>
+                      <a:tailEnd type="none" w="med" len="med"/>
+                    </a:lnL>
+                    <a:lnR w="5080" cap="flat" cmpd="sng" algn="ctr">
+                      <a:solidFill>
+                        <a:srgbClr val="E2E8F0"/>
+                      </a:solidFill>
+                      <a:prstDash val="solid"/>
+                      <a:round/>
+                      <a:headEnd type="none" w="med" len="med"/>
+                      <a:tailEnd type="none" w="med" len="med"/>
+                    </a:lnR>
+                    <a:lnT w="5080" cap="flat" cmpd="sng" algn="ctr">
+                      <a:solidFill>
+                        <a:srgbClr val="E2E8F0"/>
+                      </a:solidFill>
+                      <a:prstDash val="solid"/>
+                      <a:round/>
+                      <a:headEnd type="none" w="med" len="med"/>
+                      <a:tailEnd type="none" w="med" len="med"/>
+                    </a:lnT>
+                    <a:lnB w="5080" cap="flat" cmpd="sng" algn="ctr">
+                      <a:solidFill>
+                        <a:srgbClr val="E2E8F0"/>
+                      </a:solidFill>
+                      <a:prstDash val="solid"/>
+                      <a:round/>
+                      <a:headEnd type="none" w="med" len="med"/>
+                      <a:tailEnd type="none" w="med" len="med"/>
+                    </a:lnB>
+                    <a:solidFill>
+                      <a:srgbClr val="F8FAFC"/>
+                    </a:solidFill>
+                  </a:tcPr>
+                </a:tc>
+                <a:tc>
+                  <a:txBody>
+                    <a:bodyPr/>
+                    <a:lstStyle/>
+                    <a:p>
+                      <a:pPr algn="ctr" indent="0" marL="0">
+                        <a:buNone/>
+                      </a:pPr>
+                      <a:r>
+                        <a:rPr lang="en-US" sz="1050" dirty="0">
+                          <a:solidFill>
+                            <a:srgbClr val="475569"/>
+                          </a:solidFill>
+                        </a:rPr>
+                        <a:t>stability</a:t>
+                      </a:r>
+                      <a:endParaRPr lang="en-US" sz="1050" dirty="0"/>
+                    </a:p>
+                  </a:txBody>
+                  <a:tcPr marL="91440" marR="91440" marT="45720" marB="45720" anchor="ctr">
+                    <a:lnL w="5080" cap="flat" cmpd="sng" algn="ctr">
+                      <a:solidFill>
+                        <a:srgbClr val="E2E8F0"/>
+                      </a:solidFill>
+                      <a:prstDash val="solid"/>
+                      <a:round/>
+                      <a:headEnd type="none" w="med" len="med"/>
+                      <a:tailEnd type="none" w="med" len="med"/>
+                    </a:lnL>
+                    <a:lnR w="5080" cap="flat" cmpd="sng" algn="ctr">
+                      <a:solidFill>
+                        <a:srgbClr val="E2E8F0"/>
+                      </a:solidFill>
+                      <a:prstDash val="solid"/>
+                      <a:round/>
+                      <a:headEnd type="none" w="med" len="med"/>
+                      <a:tailEnd type="none" w="med" len="med"/>
+                    </a:lnR>
+                    <a:lnT w="5080" cap="flat" cmpd="sng" algn="ctr">
+                      <a:solidFill>
+                        <a:srgbClr val="E2E8F0"/>
+                      </a:solidFill>
+                      <a:prstDash val="solid"/>
+                      <a:round/>
+                      <a:headEnd type="none" w="med" len="med"/>
+                      <a:tailEnd type="none" w="med" len="med"/>
+                    </a:lnT>
+                    <a:lnB w="5080" cap="flat" cmpd="sng" algn="ctr">
+                      <a:solidFill>
+                        <a:srgbClr val="E2E8F0"/>
+                      </a:solidFill>
+                      <a:prstDash val="solid"/>
+                      <a:round/>
+                      <a:headEnd type="none" w="med" len="med"/>
+                      <a:tailEnd type="none" w="med" len="med"/>
+                    </a:lnB>
+                    <a:solidFill>
+                      <a:srgbClr val="F8FAFC"/>
+                    </a:solidFill>
+                  </a:tcPr>
+                </a:tc>
+                <a:tc>
+                  <a:txBody>
+                    <a:bodyPr/>
+                    <a:lstStyle/>
+                    <a:p>
+                      <a:pPr algn="ctr" indent="0" marL="0">
+                        <a:buNone/>
+                      </a:pPr>
+                      <a:r>
+                        <a:rPr lang="en-US" sz="1050" dirty="0">
+                          <a:solidFill>
+                            <a:srgbClr val="475569"/>
+                          </a:solidFill>
+                        </a:rPr>
+                        <a:t>accuracy</a:t>
+                      </a:r>
+                      <a:endParaRPr lang="en-US" sz="1050" dirty="0"/>
+                    </a:p>
+                  </a:txBody>
+                  <a:tcPr marL="91440" marR="91440" marT="45720" marB="45720" anchor="ctr">
+                    <a:lnL w="5080" cap="flat" cmpd="sng" algn="ctr">
+                      <a:solidFill>
+                        <a:srgbClr val="E2E8F0"/>
+                      </a:solidFill>
+                      <a:prstDash val="solid"/>
+                      <a:round/>
+                      <a:headEnd type="none" w="med" len="med"/>
+                      <a:tailEnd type="none" w="med" len="med"/>
+                    </a:lnL>
+                    <a:lnR w="5080" cap="flat" cmpd="sng" algn="ctr">
+                      <a:solidFill>
+                        <a:srgbClr val="E2E8F0"/>
+                      </a:solidFill>
+                      <a:prstDash val="solid"/>
+                      <a:round/>
+                      <a:headEnd type="none" w="med" len="med"/>
+                      <a:tailEnd type="none" w="med" len="med"/>
+                    </a:lnR>
+                    <a:lnT w="5080" cap="flat" cmpd="sng" algn="ctr">
+                      <a:solidFill>
+                        <a:srgbClr val="E2E8F0"/>
+                      </a:solidFill>
+                      <a:prstDash val="solid"/>
+                      <a:round/>
+                      <a:headEnd type="none" w="med" len="med"/>
+                      <a:tailEnd type="none" w="med" len="med"/>
+                    </a:lnT>
+                    <a:lnB w="5080" cap="flat" cmpd="sng" algn="ctr">
+                      <a:solidFill>
+                        <a:srgbClr val="E2E8F0"/>
+                      </a:solidFill>
+                      <a:prstDash val="solid"/>
+                      <a:round/>
+                      <a:headEnd type="none" w="med" len="med"/>
+                      <a:tailEnd type="none" w="med" len="med"/>
+                    </a:lnB>
+                    <a:solidFill>
+                      <a:srgbClr val="F8FAFC"/>
+                    </a:solidFill>
+                  </a:tcPr>
+                </a:tc>
+                <a:tc>
+                  <a:txBody>
+                    <a:bodyPr/>
+                    <a:lstStyle/>
+                    <a:p>
+                      <a:pPr algn="ctr" indent="0" marL="0">
+                        <a:buNone/>
+                      </a:pPr>
+                      <a:r>
+                        <a:rPr lang="en-US" sz="1050" dirty="0">
+                          <a:solidFill>
+                            <a:srgbClr val="475569"/>
+                          </a:solidFill>
+                        </a:rPr>
+                        <a:t>accuracy</a:t>
+                      </a:r>
+                      <a:endParaRPr lang="en-US" sz="1050" dirty="0"/>
+                    </a:p>
+                  </a:txBody>
+                  <a:tcPr marL="91440" marR="91440" marT="45720" marB="45720" anchor="ctr">
+                    <a:lnL w="5080" cap="flat" cmpd="sng" algn="ctr">
+                      <a:solidFill>
+                        <a:srgbClr val="E2E8F0"/>
+                      </a:solidFill>
+                      <a:prstDash val="solid"/>
+                      <a:round/>
+                      <a:headEnd type="none" w="med" len="med"/>
+                      <a:tailEnd type="none" w="med" len="med"/>
+                    </a:lnL>
+                    <a:lnR w="5080" cap="flat" cmpd="sng" algn="ctr">
+                      <a:solidFill>
+                        <a:srgbClr val="E2E8F0"/>
+                      </a:solidFill>
+                      <a:prstDash val="solid"/>
+                      <a:round/>
+                      <a:headEnd type="none" w="med" len="med"/>
+                      <a:tailEnd type="none" w="med" len="med"/>
+                    </a:lnR>
+                    <a:lnT w="5080" cap="flat" cmpd="sng" algn="ctr">
+                      <a:solidFill>
+                        <a:srgbClr val="E2E8F0"/>
+                      </a:solidFill>
+                      <a:prstDash val="solid"/>
+                      <a:round/>
+                      <a:headEnd type="none" w="med" len="med"/>
+                      <a:tailEnd type="none" w="med" len="med"/>
+                    </a:lnT>
+                    <a:lnB w="5080" cap="flat" cmpd="sng" algn="ctr">
+                      <a:solidFill>
+                        <a:srgbClr val="E2E8F0"/>
+                      </a:solidFill>
+                      <a:prstDash val="solid"/>
+                      <a:round/>
+                      <a:headEnd type="none" w="med" len="med"/>
+                      <a:tailEnd type="none" w="med" len="med"/>
+                    </a:lnB>
+                    <a:solidFill>
+                      <a:srgbClr val="F8FAFC"/>
+                    </a:solidFill>
+                  </a:tcPr>
+                </a:tc>
+              </a:tr>
+            </a:tbl>
+          </a:graphicData>
+        </a:graphic>
+      </p:graphicFrame>
+      <p:sp>
+        <p:nvSpPr>
+          <p:cNvPr id="5" name="Text 2"/>
+          <p:cNvSpPr/>
+          <p:nvPr/>
+        </p:nvSpPr>
+        <p:spPr>
+          <a:xfrm>
+            <a:off x="365760" y="4800600"/>
+            <a:ext cx="8412480" cy="274320"/>
+          </a:xfrm>
+          <a:prstGeom prst="rect">
+            <a:avLst/>
+          </a:prstGeom>
+          <a:noFill/>
+          <a:ln/>
+        </p:spPr>
+        <p:txBody>
+          <a:bodyPr wrap="square" lIns="0" tIns="0" rIns="0" bIns="0" rtlCol="0" anchor="ctr"/>
+          <a:lstStyle/>
+          <a:p>
+            <a:pPr indent="0" marL="0">
+              <a:buNone/>
+            </a:pPr>
+            <a:r>
+              <a:rPr lang="en-US" sz="1000" i="1" dirty="0">
+                <a:solidFill>
+                  <a:srgbClr val="475569"/>
+                </a:solidFill>
+              </a:rPr>
+              <a:t>Headline: the 7B tier trades reliability for ~10–20× faster responses; the 32B tier is uniformly accurate but needs a 24 GB+ GPU to run at speed.</a:t>
+            </a:r>
+            <a:endParaRPr lang="en-US" sz="1000" dirty="0"/>
+          </a:p>
+        </p:txBody>
+      </p:sp>
+    </p:spTree>
+  </p:cSld>
+  <p:clrMapOvr>
+    <a:masterClrMapping/>
+  </p:clrMapOvr>
+</p:sld>
+</file>
+
+<file path=ppt/slides/slide16.xml><?xml version="1.0" encoding="utf-8"?>
+<p:sld xmlns:a="http://schemas.openxmlformats.org/drawingml/2006/main" xmlns:r="http://schemas.openxmlformats.org/officeDocument/2006/relationships" xmlns:p="http://schemas.openxmlformats.org/presentationml/2006/main">
+  <p:cSld name="Slide 16">
+    <p:bg>
+      <p:bgPr>
+        <a:solidFill>
+          <a:srgbClr val="F8FAFC"/>
+        </a:solidFill>
+      </p:bgPr>
+    </p:bg>
+    <p:spTree>
+      <p:nvGrpSpPr>
+        <p:cNvPr id="1" name=""/>
+        <p:cNvGrpSpPr/>
+        <p:nvPr/>
+      </p:nvGrpSpPr>
+      <p:grpSpPr>
+        <a:xfrm>
+          <a:off x="0" y="0"/>
+          <a:ext cx="0" cy="0"/>
+          <a:chOff x="0" y="0"/>
+          <a:chExt cx="0" cy="0"/>
+        </a:xfrm>
+      </p:grpSpPr>
+      <p:sp>
+        <p:nvSpPr>
+          <p:cNvPr id="2" name="Text 0"/>
+          <p:cNvSpPr/>
+          <p:nvPr/>
+        </p:nvSpPr>
+        <p:spPr>
+          <a:xfrm>
+            <a:off x="457200" y="201168"/>
+            <a:ext cx="8229600" cy="256032"/>
+          </a:xfrm>
+          <a:prstGeom prst="rect">
+            <a:avLst/>
+          </a:prstGeom>
+          <a:noFill/>
+          <a:ln/>
+        </p:spPr>
+        <p:txBody>
+          <a:bodyPr wrap="square" lIns="0" tIns="0" rIns="0" bIns="0" rtlCol="0" anchor="ctr"/>
+          <a:lstStyle/>
+          <a:p>
+            <a:pPr indent="0" marL="0">
+              <a:buNone/>
+            </a:pPr>
+            <a:r>
+              <a:rPr lang="en-US" sz="900" b="1" spc="300" kern="0" dirty="0">
+                <a:solidFill>
+                  <a:srgbClr val="00B4D8"/>
+                </a:solidFill>
+              </a:rPr>
+              <a:t>RUNTIME CHARACTERISTICS</a:t>
+            </a:r>
+            <a:endParaRPr lang="en-US" sz="900" dirty="0"/>
+          </a:p>
+        </p:txBody>
+      </p:sp>
+      <p:sp>
+        <p:nvSpPr>
+          <p:cNvPr id="3" name="Text 1"/>
+          <p:cNvSpPr/>
+          <p:nvPr/>
+        </p:nvSpPr>
+        <p:spPr>
+          <a:xfrm>
+            <a:off x="457200" y="502920"/>
+            <a:ext cx="8229600" cy="457200"/>
+          </a:xfrm>
+          <a:prstGeom prst="rect">
+            <a:avLst/>
+          </a:prstGeom>
+          <a:noFill/>
+          <a:ln/>
+        </p:spPr>
+        <p:txBody>
+          <a:bodyPr wrap="square" lIns="0" tIns="0" rIns="0" bIns="0" rtlCol="0" anchor="ctr"/>
+          <a:lstStyle/>
+          <a:p>
+            <a:pPr indent="0" marL="0">
+              <a:buNone/>
+            </a:pPr>
+            <a:r>
+              <a:rPr lang="en-US" sz="2800" b="1" dirty="0">
+                <a:solidFill>
+                  <a:srgbClr val="0D1B2A"/>
+                </a:solidFill>
+                <a:latin typeface="Georgia" pitchFamily="34" charset="0"/>
+                <a:ea typeface="Georgia" pitchFamily="34" charset="-122"/>
+                <a:cs typeface="Georgia" pitchFamily="34" charset="-120"/>
+              </a:rPr>
+              <a:t>How They Behave at Runtime</a:t>
+            </a:r>
+            <a:endParaRPr lang="en-US" sz="2800" dirty="0"/>
+          </a:p>
+        </p:txBody>
+      </p:sp>
+      <p:sp>
+        <p:nvSpPr>
+          <p:cNvPr id="4" name="Text 2"/>
+          <p:cNvSpPr/>
+          <p:nvPr/>
+        </p:nvSpPr>
+        <p:spPr>
+          <a:xfrm>
+            <a:off x="365760" y="1051560"/>
+            <a:ext cx="8229600" cy="201168"/>
+          </a:xfrm>
+          <a:prstGeom prst="rect">
+            <a:avLst/>
+          </a:prstGeom>
+          <a:noFill/>
+          <a:ln/>
+        </p:spPr>
+        <p:txBody>
+          <a:bodyPr wrap="square" lIns="0" tIns="0" rIns="0" bIns="0" rtlCol="0" anchor="ctr"/>
+          <a:lstStyle/>
+          <a:p>
+            <a:pPr indent="0" marL="0">
+              <a:buNone/>
+            </a:pPr>
+            <a:r>
+              <a:rPr lang="en-US" sz="1000" i="1" dirty="0">
+                <a:solidFill>
+                  <a:srgbClr val="475569"/>
+                </a:solidFill>
+              </a:rPr>
+              <a:t>Avg latency per problem (seconds, log-scaled feel)</a:t>
+            </a:r>
+            <a:endParaRPr lang="en-US" sz="1000" dirty="0"/>
+          </a:p>
+        </p:txBody>
+      </p:sp>
+      <p:graphicFrame>
+        <p:nvGraphicFramePr>
+          <p:cNvPr id="5" name="Chart 0" descr=""/>
+          <p:cNvGraphicFramePr/>
+          <p:nvPr/>
+        </p:nvGraphicFramePr>
+        <p:xfrm>
+          <a:off x="365760" y="1280160"/>
+          <a:ext cx="5029200" cy="1828800"/>
+        </p:xfrm>
+        <a:graphic xmlns:a="http://schemas.openxmlformats.org/drawingml/2006/main">
+          <a:graphicData uri="http://schemas.openxmlformats.org/drawingml/2006/chart">
+            <c:chart xmlns:c="http://schemas.openxmlformats.org/drawingml/2006/chart" r:id="rId1"/>
+          </a:graphicData>
+        </a:graphic>
+      </p:graphicFrame>
+      <p:sp>
+        <p:nvSpPr>
+          <p:cNvPr id="6" name="Text 3"/>
+          <p:cNvSpPr/>
+          <p:nvPr/>
+        </p:nvSpPr>
+        <p:spPr>
+          <a:xfrm>
+            <a:off x="365760" y="3200400"/>
+            <a:ext cx="5029200" cy="822960"/>
+          </a:xfrm>
+          <a:prstGeom prst="rect">
+            <a:avLst/>
+          </a:prstGeom>
+          <a:noFill/>
+          <a:ln/>
+        </p:spPr>
+        <p:txBody>
+          <a:bodyPr wrap="square" lIns="0" tIns="0" rIns="0" bIns="0" rtlCol="0" anchor="ctr"/>
+          <a:lstStyle/>
+          <a:p>
+            <a:pPr indent="0" marL="0">
+              <a:buNone/>
+            </a:pPr>
+            <a:r>
+              <a:rPr lang="en-US" sz="950" b="1" dirty="0">
+                <a:solidFill>
+                  <a:srgbClr val="065A82"/>
+                </a:solidFill>
+              </a:rPr>
+              <a:t>Why 32B is slow here: </a:t>
+            </a:r>
+            <a:pPr indent="0" marL="0">
+              <a:buNone/>
+            </a:pPr>
+            <a:r>
+              <a:rPr lang="en-US" sz="950" dirty="0">
+                <a:solidFill>
+                  <a:srgbClr val="475569"/>
+                </a:solidFill>
+              </a:rPr>
+              <a:t>an 18 GB model on a 16 GB GPU offloads ~30% of layers to system RAM (30/70 CPU/GPU split). On a 24 GB+ GPU it would run fully on-device at a few seconds per problem.</a:t>
+            </a:r>
+            <a:endParaRPr lang="en-US" sz="950" dirty="0"/>
+          </a:p>
+        </p:txBody>
+      </p:sp>
+      <p:sp>
+        <p:nvSpPr>
+          <p:cNvPr id="7" name="Shape 4"/>
+          <p:cNvSpPr/>
+          <p:nvPr/>
+        </p:nvSpPr>
+        <p:spPr>
+          <a:xfrm>
+            <a:off x="5577840" y="1097280"/>
+            <a:ext cx="3246120" cy="3657600"/>
+          </a:xfrm>
+          <a:prstGeom prst="rect">
+            <a:avLst/>
+          </a:prstGeom>
+          <a:solidFill>
+            <a:srgbClr val="FFFFFF"/>
+          </a:solidFill>
+          <a:ln w="6350">
+            <a:solidFill>
+              <a:srgbClr val="E2E8F0"/>
+            </a:solidFill>
+            <a:prstDash val="solid"/>
+          </a:ln>
+          <a:effectLst>
+            <a:outerShdw sx="100000" sy="100000" kx="0" ky="0" algn="bl" rotWithShape="0" blurRad="101600" dist="38100" dir="8100000">
+              <a:srgbClr val="000000">
+                <a:alpha val="10000"/>
+              </a:srgbClr>
+            </a:outerShdw>
+          </a:effectLst>
+        </p:spPr>
+      </p:sp>
+      <p:sp>
+        <p:nvSpPr>
+          <p:cNvPr id="8" name="Shape 5"/>
+          <p:cNvSpPr/>
+          <p:nvPr/>
+        </p:nvSpPr>
+        <p:spPr>
+          <a:xfrm>
+            <a:off x="5577840" y="1097280"/>
+            <a:ext cx="3246120" cy="54864"/>
+          </a:xfrm>
+          <a:prstGeom prst="rect">
+            <a:avLst/>
+          </a:prstGeom>
+          <a:solidFill>
+            <a:srgbClr val="1C7293"/>
+          </a:solidFill>
+          <a:ln w="12700">
+            <a:solidFill>
+              <a:srgbClr val="1C7293"/>
+            </a:solidFill>
+            <a:prstDash val="solid"/>
+          </a:ln>
+        </p:spPr>
+      </p:sp>
+      <p:sp>
+        <p:nvSpPr>
+          <p:cNvPr id="9" name="Text 6"/>
+          <p:cNvSpPr/>
+          <p:nvPr/>
+        </p:nvSpPr>
+        <p:spPr>
+          <a:xfrm>
+            <a:off x="5715000" y="1207008"/>
+            <a:ext cx="2926080" cy="274320"/>
+          </a:xfrm>
+          <a:prstGeom prst="rect">
+            <a:avLst/>
+          </a:prstGeom>
+          <a:noFill/>
+          <a:ln/>
+        </p:spPr>
+        <p:txBody>
+          <a:bodyPr wrap="square" lIns="0" tIns="0" rIns="0" bIns="0" rtlCol="0" anchor="ctr"/>
+          <a:lstStyle/>
+          <a:p>
+            <a:pPr indent="0" marL="0">
+              <a:buNone/>
+            </a:pPr>
+            <a:r>
+              <a:rPr lang="en-US" sz="1300" b="1" dirty="0">
+                <a:solidFill>
+                  <a:srgbClr val="0D1B2A"/>
+                </a:solidFill>
+              </a:rPr>
+              <a:t>Runtime facts</a:t>
+            </a:r>
+            <a:endParaRPr lang="en-US" sz="1300" dirty="0"/>
+          </a:p>
+        </p:txBody>
+      </p:sp>
+      <p:sp>
+        <p:nvSpPr>
+          <p:cNvPr id="10" name="Text 7"/>
+          <p:cNvSpPr/>
+          <p:nvPr/>
+        </p:nvSpPr>
+        <p:spPr>
+          <a:xfrm>
+            <a:off x="5715000" y="1572768"/>
+            <a:ext cx="2971800" cy="201168"/>
+          </a:xfrm>
+          <a:prstGeom prst="rect">
+            <a:avLst/>
+          </a:prstGeom>
+          <a:noFill/>
+          <a:ln/>
+        </p:spPr>
+        <p:txBody>
+          <a:bodyPr wrap="square" lIns="0" tIns="0" rIns="0" bIns="0" rtlCol="0" anchor="ctr"/>
+          <a:lstStyle/>
+          <a:p>
+            <a:pPr indent="0" marL="0">
+              <a:buNone/>
+            </a:pPr>
+            <a:r>
+              <a:rPr lang="en-US" sz="1000" b="1" dirty="0">
+                <a:solidFill>
+                  <a:srgbClr val="0D1B2A"/>
+                </a:solidFill>
+              </a:rPr>
+              <a:t>Serving</a:t>
+            </a:r>
+            <a:endParaRPr lang="en-US" sz="1000" dirty="0"/>
+          </a:p>
+        </p:txBody>
+      </p:sp>
+      <p:sp>
+        <p:nvSpPr>
+          <p:cNvPr id="11" name="Text 8"/>
+          <p:cNvSpPr/>
+          <p:nvPr/>
+        </p:nvSpPr>
+        <p:spPr>
+          <a:xfrm>
+            <a:off x="5715000" y="1773936"/>
+            <a:ext cx="2971800" cy="274320"/>
+          </a:xfrm>
+          <a:prstGeom prst="rect">
+            <a:avLst/>
+          </a:prstGeom>
+          <a:noFill/>
+          <a:ln/>
+        </p:spPr>
+        <p:txBody>
+          <a:bodyPr wrap="square" lIns="0" tIns="0" rIns="0" bIns="0" rtlCol="0" anchor="ctr"/>
+          <a:lstStyle/>
+          <a:p>
+            <a:pPr indent="0" marL="0">
+              <a:buNone/>
+            </a:pPr>
+            <a:r>
+              <a:rPr lang="en-US" sz="950" dirty="0">
+                <a:solidFill>
+                  <a:srgbClr val="475569"/>
+                </a:solidFill>
+              </a:rPr>
+              <a:t>Ollama, OpenAI-compatible at :11434</a:t>
+            </a:r>
+            <a:endParaRPr lang="en-US" sz="950" dirty="0"/>
+          </a:p>
+        </p:txBody>
+      </p:sp>
+      <p:sp>
+        <p:nvSpPr>
+          <p:cNvPr id="12" name="Text 9"/>
+          <p:cNvSpPr/>
+          <p:nvPr/>
+        </p:nvSpPr>
+        <p:spPr>
+          <a:xfrm>
+            <a:off x="5715000" y="2093976"/>
+            <a:ext cx="2971800" cy="201168"/>
+          </a:xfrm>
+          <a:prstGeom prst="rect">
+            <a:avLst/>
+          </a:prstGeom>
+          <a:noFill/>
+          <a:ln/>
+        </p:spPr>
+        <p:txBody>
+          <a:bodyPr wrap="square" lIns="0" tIns="0" rIns="0" bIns="0" rtlCol="0" anchor="ctr"/>
+          <a:lstStyle/>
+          <a:p>
+            <a:pPr indent="0" marL="0">
+              <a:buNone/>
+            </a:pPr>
+            <a:r>
+              <a:rPr lang="en-US" sz="1000" b="1" dirty="0">
+                <a:solidFill>
+                  <a:srgbClr val="0D1B2A"/>
+                </a:solidFill>
+              </a:rPr>
+              <a:t>7B throughput</a:t>
+            </a:r>
+            <a:endParaRPr lang="en-US" sz="1000" dirty="0"/>
+          </a:p>
+        </p:txBody>
+      </p:sp>
+      <p:sp>
+        <p:nvSpPr>
+          <p:cNvPr id="13" name="Text 10"/>
+          <p:cNvSpPr/>
+          <p:nvPr/>
+        </p:nvSpPr>
+        <p:spPr>
+          <a:xfrm>
+            <a:off x="5715000" y="2295144"/>
+            <a:ext cx="2971800" cy="274320"/>
+          </a:xfrm>
+          <a:prstGeom prst="rect">
+            <a:avLst/>
+          </a:prstGeom>
+          <a:noFill/>
+          <a:ln/>
+        </p:spPr>
+        <p:txBody>
+          <a:bodyPr wrap="square" lIns="0" tIns="0" rIns="0" bIns="0" rtlCol="0" anchor="ctr"/>
+          <a:lstStyle/>
+          <a:p>
+            <a:pPr indent="0" marL="0">
+              <a:buNone/>
+            </a:pPr>
+            <a:r>
+              <a:rPr lang="en-US" sz="950" dirty="0">
+                <a:solidFill>
+                  <a:srgbClr val="475569"/>
+                </a:solidFill>
+              </a:rPr>
+              <a:t>~7 req/min on this GPU</a:t>
+            </a:r>
+            <a:endParaRPr lang="en-US" sz="950" dirty="0"/>
+          </a:p>
+        </p:txBody>
+      </p:sp>
+      <p:sp>
+        <p:nvSpPr>
+          <p:cNvPr id="14" name="Text 11"/>
+          <p:cNvSpPr/>
+          <p:nvPr/>
+        </p:nvSpPr>
+        <p:spPr>
+          <a:xfrm>
+            <a:off x="5715000" y="2615184"/>
+            <a:ext cx="2971800" cy="201168"/>
+          </a:xfrm>
+          <a:prstGeom prst="rect">
+            <a:avLst/>
+          </a:prstGeom>
+          <a:noFill/>
+          <a:ln/>
+        </p:spPr>
+        <p:txBody>
+          <a:bodyPr wrap="square" lIns="0" tIns="0" rIns="0" bIns="0" rtlCol="0" anchor="ctr"/>
+          <a:lstStyle/>
+          <a:p>
+            <a:pPr indent="0" marL="0">
+              <a:buNone/>
+            </a:pPr>
+            <a:r>
+              <a:rPr lang="en-US" sz="1000" b="1" dirty="0">
+                <a:solidFill>
+                  <a:srgbClr val="0D1B2A"/>
+                </a:solidFill>
+              </a:rPr>
+              <a:t>32B throughput</a:t>
+            </a:r>
+            <a:endParaRPr lang="en-US" sz="1000" dirty="0"/>
+          </a:p>
+        </p:txBody>
+      </p:sp>
+      <p:sp>
+        <p:nvSpPr>
+          <p:cNvPr id="15" name="Text 12"/>
+          <p:cNvSpPr/>
+          <p:nvPr/>
+        </p:nvSpPr>
+        <p:spPr>
+          <a:xfrm>
+            <a:off x="5715000" y="2816352"/>
+            <a:ext cx="2971800" cy="274320"/>
+          </a:xfrm>
+          <a:prstGeom prst="rect">
+            <a:avLst/>
+          </a:prstGeom>
+          <a:noFill/>
+          <a:ln/>
+        </p:spPr>
+        <p:txBody>
+          <a:bodyPr wrap="square" lIns="0" tIns="0" rIns="0" bIns="0" rtlCol="0" anchor="ctr"/>
+          <a:lstStyle/>
+          <a:p>
+            <a:pPr indent="0" marL="0">
+              <a:buNone/>
+            </a:pPr>
+            <a:r>
+              <a:rPr lang="en-US" sz="950" dirty="0">
+                <a:solidFill>
+                  <a:srgbClr val="475569"/>
+                </a:solidFill>
+              </a:rPr>
+              <a:t>~1–2 req/min (offload)</a:t>
+            </a:r>
+            <a:endParaRPr lang="en-US" sz="950" dirty="0"/>
+          </a:p>
+        </p:txBody>
+      </p:sp>
+      <p:sp>
+        <p:nvSpPr>
+          <p:cNvPr id="16" name="Text 13"/>
+          <p:cNvSpPr/>
+          <p:nvPr/>
+        </p:nvSpPr>
+        <p:spPr>
+          <a:xfrm>
+            <a:off x="5715000" y="3136392"/>
+            <a:ext cx="2971800" cy="201168"/>
+          </a:xfrm>
+          <a:prstGeom prst="rect">
+            <a:avLst/>
+          </a:prstGeom>
+          <a:noFill/>
+          <a:ln/>
+        </p:spPr>
+        <p:txBody>
+          <a:bodyPr wrap="square" lIns="0" tIns="0" rIns="0" bIns="0" rtlCol="0" anchor="ctr"/>
+          <a:lstStyle/>
+          <a:p>
+            <a:pPr indent="0" marL="0">
+              <a:buNone/>
+            </a:pPr>
+            <a:r>
+              <a:rPr lang="en-US" sz="1000" b="1" dirty="0">
+                <a:solidFill>
+                  <a:srgbClr val="0D1B2A"/>
+                </a:solidFill>
+              </a:rPr>
+              <a:t>Timeout guard</a:t>
+            </a:r>
+            <a:endParaRPr lang="en-US" sz="1000" dirty="0"/>
+          </a:p>
+        </p:txBody>
+      </p:sp>
+      <p:sp>
+        <p:nvSpPr>
+          <p:cNvPr id="17" name="Text 14"/>
+          <p:cNvSpPr/>
+          <p:nvPr/>
+        </p:nvSpPr>
+        <p:spPr>
+          <a:xfrm>
+            <a:off x="5715000" y="3337560"/>
+            <a:ext cx="2971800" cy="274320"/>
+          </a:xfrm>
+          <a:prstGeom prst="rect">
+            <a:avLst/>
+          </a:prstGeom>
+          <a:noFill/>
+          <a:ln/>
+        </p:spPr>
+        <p:txBody>
+          <a:bodyPr wrap="square" lIns="0" tIns="0" rIns="0" bIns="0" rtlCol="0" anchor="ctr"/>
+          <a:lstStyle/>
+          <a:p>
+            <a:pPr indent="0" marL="0">
+              <a:buNone/>
+            </a:pPr>
+            <a:r>
+              <a:rPr lang="en-US" sz="950" dirty="0">
+                <a:solidFill>
+                  <a:srgbClr val="475569"/>
+                </a:solidFill>
+              </a:rPr>
+              <a:t>client 120s (7B) / 300s (32B)</a:t>
+            </a:r>
+            <a:endParaRPr lang="en-US" sz="950" dirty="0"/>
+          </a:p>
+        </p:txBody>
+      </p:sp>
+      <p:sp>
+        <p:nvSpPr>
+          <p:cNvPr id="18" name="Text 15"/>
+          <p:cNvSpPr/>
+          <p:nvPr/>
+        </p:nvSpPr>
+        <p:spPr>
+          <a:xfrm>
+            <a:off x="5715000" y="3657600"/>
+            <a:ext cx="2971800" cy="201168"/>
+          </a:xfrm>
+          <a:prstGeom prst="rect">
+            <a:avLst/>
+          </a:prstGeom>
+          <a:noFill/>
+          <a:ln/>
+        </p:spPr>
+        <p:txBody>
+          <a:bodyPr wrap="square" lIns="0" tIns="0" rIns="0" bIns="0" rtlCol="0" anchor="ctr"/>
+          <a:lstStyle/>
+          <a:p>
+            <a:pPr indent="0" marL="0">
+              <a:buNone/>
+            </a:pPr>
+            <a:r>
+              <a:rPr lang="en-US" sz="1000" b="1" dirty="0">
+                <a:solidFill>
+                  <a:srgbClr val="0D1B2A"/>
+                </a:solidFill>
+              </a:rPr>
+              <a:t>Exec sandbox</a:t>
+            </a:r>
+            <a:endParaRPr lang="en-US" sz="1000" dirty="0"/>
+          </a:p>
+        </p:txBody>
+      </p:sp>
+      <p:sp>
+        <p:nvSpPr>
+          <p:cNvPr id="19" name="Text 16"/>
+          <p:cNvSpPr/>
+          <p:nvPr/>
+        </p:nvSpPr>
+        <p:spPr>
+          <a:xfrm>
+            <a:off x="5715000" y="3858768"/>
+            <a:ext cx="2971800" cy="274320"/>
+          </a:xfrm>
+          <a:prstGeom prst="rect">
+            <a:avLst/>
+          </a:prstGeom>
+          <a:noFill/>
+          <a:ln/>
+        </p:spPr>
+        <p:txBody>
+          <a:bodyPr wrap="square" lIns="0" tIns="0" rIns="0" bIns="0" rtlCol="0" anchor="ctr"/>
+          <a:lstStyle/>
+          <a:p>
+            <a:pPr indent="0" marL="0">
+              <a:buNone/>
+            </a:pPr>
+            <a:r>
+              <a:rPr lang="en-US" sz="950" dirty="0">
+                <a:solidFill>
+                  <a:srgbClr val="475569"/>
+                </a:solidFill>
+              </a:rPr>
+              <a:t>worker thread, killed at 5s</a:t>
+            </a:r>
+            <a:endParaRPr lang="en-US" sz="950" dirty="0"/>
+          </a:p>
+        </p:txBody>
+      </p:sp>
+      <p:sp>
+        <p:nvSpPr>
+          <p:cNvPr id="20" name="Text 17"/>
+          <p:cNvSpPr/>
+          <p:nvPr/>
+        </p:nvSpPr>
+        <p:spPr>
+          <a:xfrm>
+            <a:off x="5715000" y="4178808"/>
+            <a:ext cx="2971800" cy="201168"/>
+          </a:xfrm>
+          <a:prstGeom prst="rect">
+            <a:avLst/>
+          </a:prstGeom>
+          <a:noFill/>
+          <a:ln/>
+        </p:spPr>
+        <p:txBody>
+          <a:bodyPr wrap="square" lIns="0" tIns="0" rIns="0" bIns="0" rtlCol="0" anchor="ctr"/>
+          <a:lstStyle/>
+          <a:p>
+            <a:pPr indent="0" marL="0">
+              <a:buNone/>
+            </a:pPr>
+            <a:r>
+              <a:rPr lang="en-US" sz="1000" b="1" dirty="0">
+                <a:solidFill>
+                  <a:srgbClr val="0D1B2A"/>
+                </a:solidFill>
+              </a:rPr>
+              <a:t>Cost / token</a:t>
+            </a:r>
+            <a:endParaRPr lang="en-US" sz="1000" dirty="0"/>
+          </a:p>
+        </p:txBody>
+      </p:sp>
+      <p:sp>
+        <p:nvSpPr>
+          <p:cNvPr id="21" name="Text 18"/>
+          <p:cNvSpPr/>
+          <p:nvPr/>
+        </p:nvSpPr>
+        <p:spPr>
+          <a:xfrm>
+            <a:off x="5715000" y="4379976"/>
+            <a:ext cx="2971800" cy="274320"/>
+          </a:xfrm>
+          <a:prstGeom prst="rect">
+            <a:avLst/>
+          </a:prstGeom>
+          <a:noFill/>
+          <a:ln/>
+        </p:spPr>
+        <p:txBody>
+          <a:bodyPr wrap="square" lIns="0" tIns="0" rIns="0" bIns="0" rtlCol="0" anchor="ctr"/>
+          <a:lstStyle/>
+          <a:p>
+            <a:pPr indent="0" marL="0">
+              <a:buNone/>
+            </a:pPr>
+            <a:r>
+              <a:rPr lang="en-US" sz="950" dirty="0">
+                <a:solidFill>
+                  <a:srgbClr val="475569"/>
+                </a:solidFill>
+              </a:rPr>
+              <a:t>$0 — local hardware only</a:t>
+            </a:r>
+            <a:endParaRPr lang="en-US" sz="950" dirty="0"/>
+          </a:p>
+        </p:txBody>
+      </p:sp>
+    </p:spTree>
+  </p:cSld>
+  <p:clrMapOvr>
+    <a:masterClrMapping/>
+  </p:clrMapOvr>
+</p:sld>
+</file>
+
+<file path=ppt/slides/slide17.xml><?xml version="1.0" encoding="utf-8"?>
+<p:sld xmlns:a="http://schemas.openxmlformats.org/drawingml/2006/main" xmlns:r="http://schemas.openxmlformats.org/officeDocument/2006/relationships" xmlns:p="http://schemas.openxmlformats.org/presentationml/2006/main">
+  <p:cSld name="Slide 17">
+    <p:bg>
+      <p:bgPr>
+        <a:solidFill>
+          <a:srgbClr val="F8FAFC"/>
+        </a:solidFill>
+      </p:bgPr>
+    </p:bg>
+    <p:spTree>
+      <p:nvGrpSpPr>
+        <p:cNvPr id="1" name=""/>
+        <p:cNvGrpSpPr/>
+        <p:nvPr/>
+      </p:nvGrpSpPr>
+      <p:grpSpPr>
+        <a:xfrm>
+          <a:off x="0" y="0"/>
+          <a:ext cx="0" cy="0"/>
+          <a:chOff x="0" y="0"/>
+          <a:chExt cx="0" cy="0"/>
+        </a:xfrm>
+      </p:grpSpPr>
+      <p:sp>
+        <p:nvSpPr>
+          <p:cNvPr id="2" name="Text 0"/>
+          <p:cNvSpPr/>
+          <p:nvPr/>
+        </p:nvSpPr>
+        <p:spPr>
+          <a:xfrm>
+            <a:off x="457200" y="201168"/>
+            <a:ext cx="8229600" cy="256032"/>
+          </a:xfrm>
+          <a:prstGeom prst="rect">
+            <a:avLst/>
+          </a:prstGeom>
+          <a:noFill/>
+          <a:ln/>
+        </p:spPr>
+        <p:txBody>
+          <a:bodyPr wrap="square" lIns="0" tIns="0" rIns="0" bIns="0" rtlCol="0" anchor="ctr"/>
+          <a:lstStyle/>
+          <a:p>
+            <a:pPr indent="0" marL="0">
+              <a:buNone/>
+            </a:pPr>
+            <a:r>
+              <a:rPr lang="en-US" sz="900" b="1" spc="300" kern="0" dirty="0">
+                <a:solidFill>
+                  <a:srgbClr val="00B4D8"/>
+                </a:solidFill>
+              </a:rPr>
+              <a:t>TEST SUITE — HIGH-LEVEL OVERVIEW</a:t>
+            </a:r>
+            <a:endParaRPr lang="en-US" sz="900" dirty="0"/>
+          </a:p>
+        </p:txBody>
+      </p:sp>
+      <p:sp>
+        <p:nvSpPr>
+          <p:cNvPr id="3" name="Text 1"/>
+          <p:cNvSpPr/>
+          <p:nvPr/>
+        </p:nvSpPr>
+        <p:spPr>
+          <a:xfrm>
+            <a:off x="457200" y="502920"/>
+            <a:ext cx="8229600" cy="457200"/>
+          </a:xfrm>
+          <a:prstGeom prst="rect">
+            <a:avLst/>
+          </a:prstGeom>
+          <a:noFill/>
+          <a:ln/>
+        </p:spPr>
+        <p:txBody>
+          <a:bodyPr wrap="square" lIns="0" tIns="0" rIns="0" bIns="0" rtlCol="0" anchor="ctr"/>
+          <a:lstStyle/>
+          <a:p>
+            <a:pPr indent="0" marL="0">
+              <a:buNone/>
+            </a:pPr>
+            <a:r>
+              <a:rPr lang="en-US" sz="2800" b="1" dirty="0">
+                <a:solidFill>
+                  <a:srgbClr val="0D1B2A"/>
+                </a:solidFill>
+                <a:latin typeface="Georgia" pitchFamily="34" charset="0"/>
+                <a:ea typeface="Georgia" pitchFamily="34" charset="-122"/>
+                <a:cs typeface="Georgia" pitchFamily="34" charset="-120"/>
+              </a:rPr>
+              <a:t>What Each Test Measures</a:t>
+            </a:r>
+            <a:endParaRPr lang="en-US" sz="2800" dirty="0"/>
+          </a:p>
+        </p:txBody>
+      </p:sp>
+      <p:sp>
+        <p:nvSpPr>
+          <p:cNvPr id="4" name="Shape 2"/>
+          <p:cNvSpPr/>
+          <p:nvPr/>
+        </p:nvSpPr>
+        <p:spPr>
+          <a:xfrm>
+            <a:off x="457200" y="1143000"/>
+            <a:ext cx="8321040" cy="822960"/>
+          </a:xfrm>
+          <a:prstGeom prst="rect">
+            <a:avLst/>
+          </a:prstGeom>
+          <a:solidFill>
+            <a:srgbClr val="FFFFFF"/>
+          </a:solidFill>
+          <a:ln w="6350">
+            <a:solidFill>
+              <a:srgbClr val="E2E8F0"/>
+            </a:solidFill>
+            <a:prstDash val="solid"/>
+          </a:ln>
+          <a:effectLst>
+            <a:outerShdw sx="100000" sy="100000" kx="0" ky="0" algn="bl" rotWithShape="0" blurRad="101600" dist="38100" dir="8100000">
+              <a:srgbClr val="000000">
+                <a:alpha val="10000"/>
+              </a:srgbClr>
+            </a:outerShdw>
+          </a:effectLst>
+        </p:spPr>
+      </p:sp>
+      <p:sp>
+        <p:nvSpPr>
+          <p:cNvPr id="5" name="Shape 3"/>
+          <p:cNvSpPr/>
+          <p:nvPr/>
+        </p:nvSpPr>
+        <p:spPr>
+          <a:xfrm>
+            <a:off x="457200" y="1143000"/>
+            <a:ext cx="54864" cy="822960"/>
+          </a:xfrm>
+          <a:prstGeom prst="rect">
+            <a:avLst/>
+          </a:prstGeom>
+          <a:solidFill>
+            <a:srgbClr val="065A82"/>
+          </a:solidFill>
+          <a:ln w="12700">
+            <a:solidFill>
+              <a:srgbClr val="065A82"/>
+            </a:solidFill>
+            <a:prstDash val="solid"/>
+          </a:ln>
+        </p:spPr>
+      </p:sp>
+      <p:sp>
+        <p:nvSpPr>
+          <p:cNvPr id="6" name="Text 4"/>
+          <p:cNvSpPr/>
+          <p:nvPr/>
+        </p:nvSpPr>
+        <p:spPr>
+          <a:xfrm>
+            <a:off x="685800" y="1252728"/>
+            <a:ext cx="7955280" cy="256032"/>
+          </a:xfrm>
+          <a:prstGeom prst="rect">
+            <a:avLst/>
+          </a:prstGeom>
+          <a:noFill/>
+          <a:ln/>
+        </p:spPr>
+        <p:txBody>
+          <a:bodyPr wrap="square" lIns="0" tIns="0" rIns="0" bIns="0" rtlCol="0" anchor="ctr"/>
+          <a:lstStyle/>
+          <a:p>
+            <a:pPr indent="0" marL="0">
+              <a:buNone/>
+            </a:pPr>
+            <a:r>
+              <a:rPr lang="en-US" sz="1300" b="1" dirty="0">
+                <a:solidFill>
+                  <a:srgbClr val="0D1B2A"/>
+                </a:solidFill>
+              </a:rPr>
+              <a:t>LeetCode — algorithmic correctness</a:t>
+            </a:r>
+            <a:endParaRPr lang="en-US" sz="1300" dirty="0"/>
+          </a:p>
+        </p:txBody>
+      </p:sp>
+      <p:sp>
+        <p:nvSpPr>
+          <p:cNvPr id="7" name="Text 5"/>
+          <p:cNvSpPr/>
+          <p:nvPr/>
+        </p:nvSpPr>
+        <p:spPr>
+          <a:xfrm>
+            <a:off x="685800" y="1527048"/>
+            <a:ext cx="7955280" cy="411480"/>
+          </a:xfrm>
+          <a:prstGeom prst="rect">
+            <a:avLst/>
+          </a:prstGeom>
+          <a:noFill/>
+          <a:ln/>
+        </p:spPr>
+        <p:txBody>
+          <a:bodyPr wrap="square" lIns="0" tIns="0" rIns="0" bIns="0" rtlCol="0" anchor="ctr"/>
+          <a:lstStyle/>
+          <a:p>
+            <a:pPr indent="0" marL="0">
+              <a:buNone/>
+            </a:pPr>
+            <a:r>
+              <a:rPr lang="en-US" sz="1000" dirty="0">
+                <a:solidFill>
+                  <a:srgbClr val="475569"/>
+                </a:solidFill>
+              </a:rPr>
+              <a:t>10 problems, Easy→Hard. Model writes a TS function; we transpile, sandbox-execute, and assert exact outputs across 38 test cases. Measures raw problem-solving + edge-case handling.</a:t>
+            </a:r>
+            <a:endParaRPr lang="en-US" sz="1000" dirty="0"/>
+          </a:p>
+        </p:txBody>
+      </p:sp>
+      <p:sp>
+        <p:nvSpPr>
+          <p:cNvPr id="8" name="Shape 6"/>
+          <p:cNvSpPr/>
+          <p:nvPr/>
+        </p:nvSpPr>
+        <p:spPr>
+          <a:xfrm>
+            <a:off x="457200" y="2057400"/>
+            <a:ext cx="8321040" cy="822960"/>
+          </a:xfrm>
+          <a:prstGeom prst="rect">
+            <a:avLst/>
+          </a:prstGeom>
+          <a:solidFill>
+            <a:srgbClr val="FFFFFF"/>
+          </a:solidFill>
+          <a:ln w="6350">
+            <a:solidFill>
+              <a:srgbClr val="E2E8F0"/>
+            </a:solidFill>
+            <a:prstDash val="solid"/>
+          </a:ln>
+          <a:effectLst>
+            <a:outerShdw sx="100000" sy="100000" kx="0" ky="0" algn="bl" rotWithShape="0" blurRad="101600" dist="38100" dir="8100000">
+              <a:srgbClr val="000000">
+                <a:alpha val="10000"/>
+              </a:srgbClr>
+            </a:outerShdw>
+          </a:effectLst>
+        </p:spPr>
+      </p:sp>
+      <p:sp>
+        <p:nvSpPr>
+          <p:cNvPr id="9" name="Shape 7"/>
+          <p:cNvSpPr/>
+          <p:nvPr/>
+        </p:nvSpPr>
+        <p:spPr>
+          <a:xfrm>
+            <a:off x="457200" y="2057400"/>
+            <a:ext cx="54864" cy="822960"/>
+          </a:xfrm>
+          <a:prstGeom prst="rect">
+            <a:avLst/>
+          </a:prstGeom>
+          <a:solidFill>
+            <a:srgbClr val="1C7293"/>
+          </a:solidFill>
+          <a:ln w="12700">
+            <a:solidFill>
+              <a:srgbClr val="1C7293"/>
+            </a:solidFill>
+            <a:prstDash val="solid"/>
+          </a:ln>
+        </p:spPr>
+      </p:sp>
+      <p:sp>
+        <p:nvSpPr>
+          <p:cNvPr id="10" name="Text 8"/>
+          <p:cNvSpPr/>
+          <p:nvPr/>
+        </p:nvSpPr>
+        <p:spPr>
+          <a:xfrm>
+            <a:off x="685800" y="2167128"/>
+            <a:ext cx="7955280" cy="256032"/>
+          </a:xfrm>
+          <a:prstGeom prst="rect">
+            <a:avLst/>
+          </a:prstGeom>
+          <a:noFill/>
+          <a:ln/>
+        </p:spPr>
+        <p:txBody>
+          <a:bodyPr wrap="square" lIns="0" tIns="0" rIns="0" bIns="0" rtlCol="0" anchor="ctr"/>
+          <a:lstStyle/>
+          <a:p>
+            <a:pPr indent="0" marL="0">
+              <a:buNone/>
+            </a:pPr>
+            <a:r>
+              <a:rPr lang="en-US" sz="1300" b="1" dirty="0">
+                <a:solidFill>
+                  <a:srgbClr val="0D1B2A"/>
+                </a:solidFill>
+              </a:rPr>
+              <a:t>Scheduler app — real-world code generation</a:t>
+            </a:r>
+            <a:endParaRPr lang="en-US" sz="1300" dirty="0"/>
+          </a:p>
+        </p:txBody>
+      </p:sp>
+      <p:sp>
+        <p:nvSpPr>
+          <p:cNvPr id="11" name="Text 9"/>
+          <p:cNvSpPr/>
+          <p:nvPr/>
+        </p:nvSpPr>
+        <p:spPr>
+          <a:xfrm>
+            <a:off x="685800" y="2441448"/>
+            <a:ext cx="7955280" cy="411480"/>
+          </a:xfrm>
+          <a:prstGeom prst="rect">
+            <a:avLst/>
+          </a:prstGeom>
+          <a:noFill/>
+          <a:ln/>
+        </p:spPr>
+        <p:txBody>
+          <a:bodyPr wrap="square" lIns="0" tIns="0" rIns="0" bIns="0" rtlCol="0" anchor="ctr"/>
+          <a:lstStyle/>
+          <a:p>
+            <a:pPr indent="0" marL="0">
+              <a:buNone/>
+            </a:pPr>
+            <a:r>
+              <a:rPr lang="en-US" sz="1000" dirty="0">
+                <a:solidFill>
+                  <a:srgbClr val="475569"/>
+                </a:solidFill>
+              </a:rPr>
+              <a:t>Model generates a full ReminderService class from a spec. 26 behavioural tests drive CRUD, time-window filters, and an integration scenario. Measures multi-method design + correct Node stdlib use.</a:t>
+            </a:r>
+            <a:endParaRPr lang="en-US" sz="1000" dirty="0"/>
+          </a:p>
+        </p:txBody>
+      </p:sp>
+      <p:sp>
+        <p:nvSpPr>
+          <p:cNvPr id="12" name="Shape 10"/>
+          <p:cNvSpPr/>
+          <p:nvPr/>
+        </p:nvSpPr>
+        <p:spPr>
+          <a:xfrm>
+            <a:off x="457200" y="2971800"/>
+            <a:ext cx="8321040" cy="822960"/>
+          </a:xfrm>
+          <a:prstGeom prst="rect">
+            <a:avLst/>
+          </a:prstGeom>
+          <a:solidFill>
+            <a:srgbClr val="FFFFFF"/>
+          </a:solidFill>
+          <a:ln w="6350">
+            <a:solidFill>
+              <a:srgbClr val="E2E8F0"/>
+            </a:solidFill>
+            <a:prstDash val="solid"/>
+          </a:ln>
+          <a:effectLst>
+            <a:outerShdw sx="100000" sy="100000" kx="0" ky="0" algn="bl" rotWithShape="0" blurRad="101600" dist="38100" dir="8100000">
+              <a:srgbClr val="000000">
+                <a:alpha val="10000"/>
+              </a:srgbClr>
+            </a:outerShdw>
+          </a:effectLst>
+        </p:spPr>
+      </p:sp>
+      <p:sp>
+        <p:nvSpPr>
+          <p:cNvPr id="13" name="Shape 11"/>
+          <p:cNvSpPr/>
+          <p:nvPr/>
+        </p:nvSpPr>
+        <p:spPr>
+          <a:xfrm>
+            <a:off x="457200" y="2971800"/>
+            <a:ext cx="54864" cy="822960"/>
+          </a:xfrm>
+          <a:prstGeom prst="rect">
+            <a:avLst/>
+          </a:prstGeom>
+          <a:solidFill>
+            <a:srgbClr val="FF6B35"/>
+          </a:solidFill>
+          <a:ln w="12700">
+            <a:solidFill>
+              <a:srgbClr val="FF6B35"/>
+            </a:solidFill>
+            <a:prstDash val="solid"/>
+          </a:ln>
+        </p:spPr>
+      </p:sp>
+      <p:sp>
+        <p:nvSpPr>
+          <p:cNvPr id="14" name="Text 12"/>
+          <p:cNvSpPr/>
+          <p:nvPr/>
+        </p:nvSpPr>
+        <p:spPr>
+          <a:xfrm>
+            <a:off x="685800" y="3081528"/>
+            <a:ext cx="7955280" cy="256032"/>
+          </a:xfrm>
+          <a:prstGeom prst="rect">
+            <a:avLst/>
+          </a:prstGeom>
+          <a:noFill/>
+          <a:ln/>
+        </p:spPr>
+        <p:txBody>
+          <a:bodyPr wrap="square" lIns="0" tIns="0" rIns="0" bIns="0" rtlCol="0" anchor="ctr"/>
+          <a:lstStyle/>
+          <a:p>
+            <a:pPr indent="0" marL="0">
+              <a:buNone/>
+            </a:pPr>
+            <a:r>
+              <a:rPr lang="en-US" sz="1300" b="1" dirty="0">
+                <a:solidFill>
+                  <a:srgbClr val="0D1B2A"/>
+                </a:solidFill>
+              </a:rPr>
+              <a:t>Latency &amp; tokens — efficiency</a:t>
+            </a:r>
+            <a:endParaRPr lang="en-US" sz="1300" dirty="0"/>
+          </a:p>
+        </p:txBody>
+      </p:sp>
+      <p:sp>
+        <p:nvSpPr>
+          <p:cNvPr id="15" name="Text 13"/>
+          <p:cNvSpPr/>
+          <p:nvPr/>
+        </p:nvSpPr>
+        <p:spPr>
+          <a:xfrm>
+            <a:off x="685800" y="3355848"/>
+            <a:ext cx="7955280" cy="411480"/>
+          </a:xfrm>
+          <a:prstGeom prst="rect">
+            <a:avLst/>
+          </a:prstGeom>
+          <a:noFill/>
+          <a:ln/>
+        </p:spPr>
+        <p:txBody>
+          <a:bodyPr wrap="square" lIns="0" tIns="0" rIns="0" bIns="0" rtlCol="0" anchor="ctr"/>
+          <a:lstStyle/>
+          <a:p>
+            <a:pPr indent="0" marL="0">
+              <a:buNone/>
+            </a:pPr>
+            <a:r>
+              <a:rPr lang="en-US" sz="1000" dirty="0">
+                <a:solidFill>
+                  <a:srgbClr val="475569"/>
+                </a:solidFill>
+              </a:rPr>
+              <a:t>Wall-clock per response and token count per solution. Shows responsiveness and verbosity — directly drives cost and throughput at scale.</a:t>
+            </a:r>
+            <a:endParaRPr lang="en-US" sz="1000" dirty="0"/>
+          </a:p>
+        </p:txBody>
+      </p:sp>
+      <p:sp>
+        <p:nvSpPr>
+          <p:cNvPr id="16" name="Shape 14"/>
+          <p:cNvSpPr/>
+          <p:nvPr/>
+        </p:nvSpPr>
+        <p:spPr>
+          <a:xfrm>
+            <a:off x="457200" y="3886200"/>
+            <a:ext cx="8321040" cy="822960"/>
+          </a:xfrm>
+          <a:prstGeom prst="rect">
+            <a:avLst/>
+          </a:prstGeom>
+          <a:solidFill>
+            <a:srgbClr val="FFFFFF"/>
+          </a:solidFill>
+          <a:ln w="6350">
+            <a:solidFill>
+              <a:srgbClr val="E2E8F0"/>
+            </a:solidFill>
+            <a:prstDash val="solid"/>
+          </a:ln>
+          <a:effectLst>
+            <a:outerShdw sx="100000" sy="100000" kx="0" ky="0" algn="bl" rotWithShape="0" blurRad="101600" dist="38100" dir="8100000">
+              <a:srgbClr val="000000">
+                <a:alpha val="10000"/>
+              </a:srgbClr>
+            </a:outerShdw>
+          </a:effectLst>
+        </p:spPr>
+      </p:sp>
+      <p:sp>
+        <p:nvSpPr>
+          <p:cNvPr id="17" name="Shape 15"/>
+          <p:cNvSpPr/>
+          <p:nvPr/>
+        </p:nvSpPr>
+        <p:spPr>
+          <a:xfrm>
+            <a:off x="457200" y="3886200"/>
+            <a:ext cx="54864" cy="822960"/>
+          </a:xfrm>
+          <a:prstGeom prst="rect">
+            <a:avLst/>
+          </a:prstGeom>
+          <a:solidFill>
+            <a:srgbClr val="5E8BFF"/>
+          </a:solidFill>
+          <a:ln w="12700">
+            <a:solidFill>
+              <a:srgbClr val="5E8BFF"/>
+            </a:solidFill>
+            <a:prstDash val="solid"/>
+          </a:ln>
+        </p:spPr>
+      </p:sp>
+      <p:sp>
+        <p:nvSpPr>
+          <p:cNvPr id="18" name="Text 16"/>
+          <p:cNvSpPr/>
+          <p:nvPr/>
+        </p:nvSpPr>
+        <p:spPr>
+          <a:xfrm>
+            <a:off x="685800" y="3995928"/>
+            <a:ext cx="7955280" cy="256032"/>
+          </a:xfrm>
+          <a:prstGeom prst="rect">
+            <a:avLst/>
+          </a:prstGeom>
+          <a:noFill/>
+          <a:ln/>
+        </p:spPr>
+        <p:txBody>
+          <a:bodyPr wrap="square" lIns="0" tIns="0" rIns="0" bIns="0" rtlCol="0" anchor="ctr"/>
+          <a:lstStyle/>
+          <a:p>
+            <a:pPr indent="0" marL="0">
+              <a:buNone/>
+            </a:pPr>
+            <a:r>
+              <a:rPr lang="en-US" sz="1300" b="1" dirty="0">
+                <a:solidFill>
+                  <a:srgbClr val="0D1B2A"/>
+                </a:solidFill>
+              </a:rPr>
+              <a:t>Reliability — run-to-run stability</a:t>
+            </a:r>
+            <a:endParaRPr lang="en-US" sz="1300" dirty="0"/>
+          </a:p>
+        </p:txBody>
+      </p:sp>
+      <p:sp>
+        <p:nvSpPr>
+          <p:cNvPr id="19" name="Text 17"/>
+          <p:cNvSpPr/>
+          <p:nvPr/>
+        </p:nvSpPr>
+        <p:spPr>
+          <a:xfrm>
+            <a:off x="685800" y="4270248"/>
+            <a:ext cx="7955280" cy="411480"/>
+          </a:xfrm>
+          <a:prstGeom prst="rect">
+            <a:avLst/>
+          </a:prstGeom>
+          <a:noFill/>
+          <a:ln/>
+        </p:spPr>
+        <p:txBody>
+          <a:bodyPr wrap="square" lIns="0" tIns="0" rIns="0" bIns="0" rtlCol="0" anchor="ctr"/>
+          <a:lstStyle/>
+          <a:p>
+            <a:pPr indent="0" marL="0">
+              <a:buNone/>
+            </a:pPr>
+            <a:r>
+              <a:rPr lang="en-US" sz="1000" dirty="0">
+                <a:solidFill>
+                  <a:srgbClr val="475569"/>
+                </a:solidFill>
+              </a:rPr>
+              <a:t>Repeated generations expose intermittent failures (e.g. hallucinated imports, infinite loops) that a single run would hide.</a:t>
+            </a:r>
+            <a:endParaRPr lang="en-US" sz="1000" dirty="0"/>
+          </a:p>
+        </p:txBody>
+      </p:sp>
+    </p:spTree>
+  </p:cSld>
+  <p:clrMapOvr>
+    <a:masterClrMapping/>
+  </p:clrMapOvr>
+</p:sld>
+</file>
+
+<file path=ppt/slides/slide18.xml><?xml version="1.0" encoding="utf-8"?>
+<p:sld xmlns:a="http://schemas.openxmlformats.org/drawingml/2006/main" xmlns:r="http://schemas.openxmlformats.org/officeDocument/2006/relationships" xmlns:p="http://schemas.openxmlformats.org/presentationml/2006/main">
+  <p:cSld name="Slide 18">
+    <p:bg>
+      <p:bgPr>
+        <a:solidFill>
+          <a:srgbClr val="F8FAFC"/>
+        </a:solidFill>
+      </p:bgPr>
+    </p:bg>
+    <p:spTree>
+      <p:nvGrpSpPr>
+        <p:cNvPr id="1" name=""/>
+        <p:cNvGrpSpPr/>
+        <p:nvPr/>
+      </p:nvGrpSpPr>
+      <p:grpSpPr>
+        <a:xfrm>
+          <a:off x="0" y="0"/>
+          <a:ext cx="0" cy="0"/>
+          <a:chOff x="0" y="0"/>
+          <a:chExt cx="0" cy="0"/>
+        </a:xfrm>
+      </p:grpSpPr>
+      <p:sp>
+        <p:nvSpPr>
+          <p:cNvPr id="2" name="Text 0"/>
+          <p:cNvSpPr/>
+          <p:nvPr/>
+        </p:nvSpPr>
+        <p:spPr>
+          <a:xfrm>
+            <a:off x="457200" y="201168"/>
+            <a:ext cx="8229600" cy="256032"/>
+          </a:xfrm>
+          <a:prstGeom prst="rect">
+            <a:avLst/>
+          </a:prstGeom>
+          <a:noFill/>
+          <a:ln/>
+        </p:spPr>
+        <p:txBody>
+          <a:bodyPr wrap="square" lIns="0" tIns="0" rIns="0" bIns="0" rtlCol="0" anchor="ctr"/>
+          <a:lstStyle/>
+          <a:p>
+            <a:pPr indent="0" marL="0">
+              <a:buNone/>
+            </a:pPr>
+            <a:r>
+              <a:rPr lang="en-US" sz="900" b="1" spc="300" kern="0" dirty="0">
+                <a:solidFill>
+                  <a:srgbClr val="00B4D8"/>
+                </a:solidFill>
+              </a:rPr>
+              <a:t>RETRIEVING &amp; RUNNING MODEL ANSWERS</a:t>
+            </a:r>
+            <a:endParaRPr lang="en-US" sz="900" dirty="0"/>
+          </a:p>
+        </p:txBody>
+      </p:sp>
+      <p:sp>
+        <p:nvSpPr>
+          <p:cNvPr id="3" name="Text 1"/>
+          <p:cNvSpPr/>
+          <p:nvPr/>
+        </p:nvSpPr>
+        <p:spPr>
+          <a:xfrm>
+            <a:off x="457200" y="502920"/>
+            <a:ext cx="8229600" cy="457200"/>
+          </a:xfrm>
+          <a:prstGeom prst="rect">
+            <a:avLst/>
+          </a:prstGeom>
+          <a:noFill/>
+          <a:ln/>
+        </p:spPr>
+        <p:txBody>
+          <a:bodyPr wrap="square" lIns="0" tIns="0" rIns="0" bIns="0" rtlCol="0" anchor="ctr"/>
+          <a:lstStyle/>
+          <a:p>
+            <a:pPr indent="0" marL="0">
+              <a:buNone/>
+            </a:pPr>
+            <a:r>
+              <a:rPr lang="en-US" sz="2800" b="1" dirty="0">
+                <a:solidFill>
+                  <a:srgbClr val="0D1B2A"/>
+                </a:solidFill>
+                <a:latin typeface="Georgia" pitchFamily="34" charset="0"/>
+                <a:ea typeface="Georgia" pitchFamily="34" charset="-122"/>
+                <a:cs typeface="Georgia" pitchFamily="34" charset="-120"/>
+              </a:rPr>
+              <a:t>Every Answer Is Saved &amp; Re-Runnable</a:t>
+            </a:r>
+            <a:endParaRPr lang="en-US" sz="2800" dirty="0"/>
+          </a:p>
+        </p:txBody>
+      </p:sp>
+      <p:sp>
+        <p:nvSpPr>
+          <p:cNvPr id="4" name="Text 2"/>
+          <p:cNvSpPr/>
+          <p:nvPr/>
+        </p:nvSpPr>
+        <p:spPr>
+          <a:xfrm>
+            <a:off x="457200" y="1024128"/>
+            <a:ext cx="8229600" cy="228600"/>
+          </a:xfrm>
+          <a:prstGeom prst="rect">
+            <a:avLst/>
+          </a:prstGeom>
+          <a:noFill/>
+          <a:ln/>
+        </p:spPr>
+        <p:txBody>
+          <a:bodyPr wrap="square" lIns="0" tIns="0" rIns="0" bIns="0" rtlCol="0" anchor="ctr"/>
+          <a:lstStyle/>
+          <a:p>
+            <a:pPr indent="0" marL="0">
+              <a:buNone/>
+            </a:pPr>
+            <a:r>
+              <a:rPr lang="en-US" sz="1100" dirty="0">
+                <a:solidFill>
+                  <a:srgbClr val="475569"/>
+                </a:solidFill>
+              </a:rPr>
+              <a:t>Each run writes every generated solution to disk, keyed by model and problem:</a:t>
+            </a:r>
+            <a:endParaRPr lang="en-US" sz="1100" dirty="0"/>
+          </a:p>
+        </p:txBody>
+      </p:sp>
+      <p:sp>
+        <p:nvSpPr>
+          <p:cNvPr id="5" name="Shape 3"/>
+          <p:cNvSpPr/>
+          <p:nvPr/>
+        </p:nvSpPr>
+        <p:spPr>
+          <a:xfrm>
+            <a:off x="457200" y="1371600"/>
+            <a:ext cx="4023360" cy="1600200"/>
+          </a:xfrm>
+          <a:prstGeom prst="rect">
+            <a:avLst/>
+          </a:prstGeom>
+          <a:solidFill>
+            <a:srgbClr val="FFFFFF"/>
+          </a:solidFill>
+          <a:ln w="6350">
+            <a:solidFill>
+              <a:srgbClr val="E2E8F0"/>
+            </a:solidFill>
+            <a:prstDash val="solid"/>
+          </a:ln>
+          <a:effectLst>
+            <a:outerShdw sx="100000" sy="100000" kx="0" ky="0" algn="bl" rotWithShape="0" blurRad="101600" dist="38100" dir="8100000">
+              <a:srgbClr val="000000">
+                <a:alpha val="10000"/>
+              </a:srgbClr>
+            </a:outerShdw>
+          </a:effectLst>
+        </p:spPr>
+      </p:sp>
+      <p:sp>
+        <p:nvSpPr>
+          <p:cNvPr id="6" name="Text 4"/>
+          <p:cNvSpPr/>
+          <p:nvPr/>
+        </p:nvSpPr>
+        <p:spPr>
+          <a:xfrm>
+            <a:off x="594360" y="1481328"/>
+            <a:ext cx="365760" cy="365760"/>
+          </a:xfrm>
+          <a:prstGeom prst="rect">
+            <a:avLst/>
+          </a:prstGeom>
+          <a:noFill/>
+          <a:ln/>
+        </p:spPr>
+        <p:txBody>
+          <a:bodyPr wrap="square" lIns="0" tIns="0" rIns="0" bIns="0" rtlCol="0" anchor="ctr"/>
+          <a:lstStyle/>
+          <a:p>
+            <a:pPr indent="0" marL="0">
+              <a:buNone/>
+            </a:pPr>
+            <a:r>
+              <a:rPr lang="en-US" sz="2200" b="1" dirty="0">
+                <a:solidFill>
+                  <a:srgbClr val="00B4D8"/>
+                </a:solidFill>
+                <a:latin typeface="Georgia" pitchFamily="34" charset="0"/>
+                <a:ea typeface="Georgia" pitchFamily="34" charset="-122"/>
+                <a:cs typeface="Georgia" pitchFamily="34" charset="-120"/>
+              </a:rPr>
+              <a:t>1</a:t>
+            </a:r>
+            <a:endParaRPr lang="en-US" sz="2200" dirty="0"/>
+          </a:p>
+        </p:txBody>
+      </p:sp>
+      <p:sp>
+        <p:nvSpPr>
+          <p:cNvPr id="7" name="Text 5"/>
+          <p:cNvSpPr/>
+          <p:nvPr/>
+        </p:nvSpPr>
+        <p:spPr>
+          <a:xfrm>
+            <a:off x="1005840" y="1517904"/>
+            <a:ext cx="3383280" cy="365760"/>
+          </a:xfrm>
+          <a:prstGeom prst="rect">
+            <a:avLst/>
+          </a:prstGeom>
+          <a:noFill/>
+          <a:ln/>
+        </p:spPr>
+        <p:txBody>
+          <a:bodyPr wrap="square" lIns="0" tIns="0" rIns="0" bIns="0" rtlCol="0" anchor="ctr"/>
+          <a:lstStyle/>
+          <a:p>
+            <a:pPr indent="0" marL="0">
+              <a:buNone/>
+            </a:pPr>
+            <a:r>
+              <a:rPr lang="en-US" sz="1150" b="1" dirty="0">
+                <a:solidFill>
+                  <a:srgbClr val="0D1B2A"/>
+                </a:solidFill>
+              </a:rPr>
+              <a:t>Where answers live</a:t>
+            </a:r>
+            <a:endParaRPr lang="en-US" sz="1150" dirty="0"/>
+          </a:p>
+        </p:txBody>
+      </p:sp>
+      <p:sp>
+        <p:nvSpPr>
+          <p:cNvPr id="8" name="Shape 6"/>
+          <p:cNvSpPr/>
+          <p:nvPr/>
+        </p:nvSpPr>
+        <p:spPr>
+          <a:xfrm>
+            <a:off x="594360" y="1938528"/>
+            <a:ext cx="3749040" cy="914400"/>
+          </a:xfrm>
+          <a:prstGeom prst="rect">
+            <a:avLst/>
+          </a:prstGeom>
+          <a:solidFill>
+            <a:srgbClr val="0D1B2A"/>
+          </a:solidFill>
+          <a:ln w="6350">
+            <a:solidFill>
+              <a:srgbClr val="1E3A5F"/>
+            </a:solidFill>
+            <a:prstDash val="solid"/>
+          </a:ln>
+        </p:spPr>
+      </p:sp>
+      <p:sp>
+        <p:nvSpPr>
+          <p:cNvPr id="9" name="Text 7"/>
+          <p:cNvSpPr/>
+          <p:nvPr/>
+        </p:nvSpPr>
+        <p:spPr>
+          <a:xfrm>
+            <a:off x="685800" y="1993392"/>
+            <a:ext cx="3566160" cy="822960"/>
+          </a:xfrm>
+          <a:prstGeom prst="rect">
+            <a:avLst/>
+          </a:prstGeom>
+          <a:noFill/>
+          <a:ln/>
+        </p:spPr>
+        <p:txBody>
+          <a:bodyPr wrap="square" lIns="0" tIns="0" rIns="0" bIns="0" rtlCol="0" anchor="t"/>
+          <a:lstStyle/>
+          <a:p>
+            <a:pPr indent="0" marL="0">
+              <a:buNone/>
+            </a:pPr>
+            <a:r>
+              <a:rPr lang="en-US" sz="800" dirty="0">
+                <a:solidFill>
+                  <a:srgbClr val="7DD3FC"/>
+                </a:solidFill>
+                <a:latin typeface="Consolas" pitchFamily="34" charset="0"/>
+                <a:ea typeface="Consolas" pitchFamily="34" charset="-122"/>
+                <a:cs typeface="Consolas" pitchFamily="34" charset="-120"/>
+              </a:rPr>
+              <a:t>answers-7b/qwen7b/LC1-two-sum.ts</a:t>
+            </a:r>
+            <a:endParaRPr lang="en-US" sz="800" dirty="0"/>
+          </a:p>
+          <a:p>
+            <a:pPr indent="0" marL="0">
+              <a:buNone/>
+            </a:pPr>
+            <a:r>
+              <a:rPr lang="en-US" sz="800" dirty="0">
+                <a:solidFill>
+                  <a:srgbClr val="7DD3FC"/>
+                </a:solidFill>
+                <a:latin typeface="Consolas" pitchFamily="34" charset="0"/>
+                <a:ea typeface="Consolas" pitchFamily="34" charset="-122"/>
+                <a:cs typeface="Consolas" pitchFamily="34" charset="-120"/>
+              </a:rPr>
+              <a:t>answers-7b/deepseek/scheduler-ReminderService.ts</a:t>
+            </a:r>
+            <a:endParaRPr lang="en-US" sz="800" dirty="0"/>
+          </a:p>
+          <a:p>
+            <a:pPr indent="0" marL="0">
+              <a:buNone/>
+            </a:pPr>
+            <a:r>
+              <a:rPr lang="en-US" sz="800" dirty="0">
+                <a:solidFill>
+                  <a:srgbClr val="7DD3FC"/>
+                </a:solidFill>
+                <a:latin typeface="Consolas" pitchFamily="34" charset="0"/>
+                <a:ea typeface="Consolas" pitchFamily="34" charset="-122"/>
+                <a:cs typeface="Consolas" pitchFamily="34" charset="-120"/>
+              </a:rPr>
+              <a:t>answers-32b/qwen7b/LC42-trapping-rain-water.ts</a:t>
+            </a:r>
+            <a:endParaRPr lang="en-US" sz="800" dirty="0"/>
+          </a:p>
+        </p:txBody>
+      </p:sp>
+      <p:sp>
+        <p:nvSpPr>
+          <p:cNvPr id="10" name="Shape 8"/>
+          <p:cNvSpPr/>
+          <p:nvPr/>
+        </p:nvSpPr>
+        <p:spPr>
+          <a:xfrm>
+            <a:off x="4709160" y="1371600"/>
+            <a:ext cx="4023360" cy="1600200"/>
+          </a:xfrm>
+          <a:prstGeom prst="rect">
+            <a:avLst/>
+          </a:prstGeom>
+          <a:solidFill>
+            <a:srgbClr val="FFFFFF"/>
+          </a:solidFill>
+          <a:ln w="6350">
+            <a:solidFill>
+              <a:srgbClr val="E2E8F0"/>
+            </a:solidFill>
+            <a:prstDash val="solid"/>
+          </a:ln>
+          <a:effectLst>
+            <a:outerShdw sx="100000" sy="100000" kx="0" ky="0" algn="bl" rotWithShape="0" blurRad="101600" dist="38100" dir="8100000">
+              <a:srgbClr val="000000">
+                <a:alpha val="10000"/>
+              </a:srgbClr>
+            </a:outerShdw>
+          </a:effectLst>
+        </p:spPr>
+      </p:sp>
+      <p:sp>
+        <p:nvSpPr>
+          <p:cNvPr id="11" name="Text 9"/>
+          <p:cNvSpPr/>
+          <p:nvPr/>
+        </p:nvSpPr>
+        <p:spPr>
+          <a:xfrm>
+            <a:off x="4846320" y="1481328"/>
+            <a:ext cx="365760" cy="365760"/>
+          </a:xfrm>
+          <a:prstGeom prst="rect">
+            <a:avLst/>
+          </a:prstGeom>
+          <a:noFill/>
+          <a:ln/>
+        </p:spPr>
+        <p:txBody>
+          <a:bodyPr wrap="square" lIns="0" tIns="0" rIns="0" bIns="0" rtlCol="0" anchor="ctr"/>
+          <a:lstStyle/>
+          <a:p>
+            <a:pPr indent="0" marL="0">
+              <a:buNone/>
+            </a:pPr>
+            <a:r>
+              <a:rPr lang="en-US" sz="2200" b="1" dirty="0">
+                <a:solidFill>
+                  <a:srgbClr val="00B4D8"/>
+                </a:solidFill>
+                <a:latin typeface="Georgia" pitchFamily="34" charset="0"/>
+                <a:ea typeface="Georgia" pitchFamily="34" charset="-122"/>
+                <a:cs typeface="Georgia" pitchFamily="34" charset="-120"/>
+              </a:rPr>
+              <a:t>2</a:t>
+            </a:r>
+            <a:endParaRPr lang="en-US" sz="2200" dirty="0"/>
+          </a:p>
+        </p:txBody>
+      </p:sp>
+      <p:sp>
+        <p:nvSpPr>
+          <p:cNvPr id="12" name="Text 10"/>
+          <p:cNvSpPr/>
+          <p:nvPr/>
+        </p:nvSpPr>
+        <p:spPr>
+          <a:xfrm>
+            <a:off x="5257800" y="1517904"/>
+            <a:ext cx="3383280" cy="365760"/>
+          </a:xfrm>
+          <a:prstGeom prst="rect">
+            <a:avLst/>
+          </a:prstGeom>
+          <a:noFill/>
+          <a:ln/>
+        </p:spPr>
+        <p:txBody>
+          <a:bodyPr wrap="square" lIns="0" tIns="0" rIns="0" bIns="0" rtlCol="0" anchor="ctr"/>
+          <a:lstStyle/>
+          <a:p>
+            <a:pPr indent="0" marL="0">
+              <a:buNone/>
+            </a:pPr>
+            <a:r>
+              <a:rPr lang="en-US" sz="1150" b="1" dirty="0">
+                <a:solidFill>
+                  <a:srgbClr val="0D1B2A"/>
+                </a:solidFill>
+              </a:rPr>
+              <a:t>Retrieve / view an answer</a:t>
+            </a:r>
+            <a:endParaRPr lang="en-US" sz="1150" dirty="0"/>
+          </a:p>
+        </p:txBody>
+      </p:sp>
+      <p:sp>
+        <p:nvSpPr>
+          <p:cNvPr id="13" name="Shape 11"/>
+          <p:cNvSpPr/>
+          <p:nvPr/>
+        </p:nvSpPr>
+        <p:spPr>
+          <a:xfrm>
+            <a:off x="4846320" y="1938528"/>
+            <a:ext cx="3749040" cy="914400"/>
+          </a:xfrm>
+          <a:prstGeom prst="rect">
+            <a:avLst/>
+          </a:prstGeom>
+          <a:solidFill>
+            <a:srgbClr val="0D1B2A"/>
+          </a:solidFill>
+          <a:ln w="6350">
+            <a:solidFill>
+              <a:srgbClr val="1E3A5F"/>
+            </a:solidFill>
+            <a:prstDash val="solid"/>
+          </a:ln>
+        </p:spPr>
+      </p:sp>
+      <p:sp>
+        <p:nvSpPr>
+          <p:cNvPr id="14" name="Text 12"/>
+          <p:cNvSpPr/>
+          <p:nvPr/>
+        </p:nvSpPr>
+        <p:spPr>
+          <a:xfrm>
+            <a:off x="4937760" y="1993392"/>
+            <a:ext cx="3566160" cy="822960"/>
+          </a:xfrm>
+          <a:prstGeom prst="rect">
+            <a:avLst/>
+          </a:prstGeom>
+          <a:noFill/>
+          <a:ln/>
+        </p:spPr>
+        <p:txBody>
+          <a:bodyPr wrap="square" lIns="0" tIns="0" rIns="0" bIns="0" rtlCol="0" anchor="t"/>
+          <a:lstStyle/>
+          <a:p>
+            <a:pPr indent="0" marL="0">
+              <a:buNone/>
+            </a:pPr>
+            <a:r>
+              <a:rPr lang="en-US" sz="800" dirty="0">
+                <a:solidFill>
+                  <a:srgbClr val="7DD3FC"/>
+                </a:solidFill>
+                <a:latin typeface="Consolas" pitchFamily="34" charset="0"/>
+                <a:ea typeface="Consolas" pitchFamily="34" charset="-122"/>
+                <a:cs typeface="Consolas" pitchFamily="34" charset="-120"/>
+              </a:rPr>
+              <a:t>type answers-7b\qwen7b\LC1-two-sum.ts</a:t>
+            </a:r>
+            <a:endParaRPr lang="en-US" sz="800" dirty="0"/>
+          </a:p>
+          <a:p>
+            <a:pPr indent="0" marL="0">
+              <a:buNone/>
+            </a:pPr>
+            <a:r>
+              <a:rPr lang="en-US" sz="800" dirty="0">
+                <a:solidFill>
+                  <a:srgbClr val="7DD3FC"/>
+                </a:solidFill>
+                <a:latin typeface="Consolas" pitchFamily="34" charset="0"/>
+                <a:ea typeface="Consolas" pitchFamily="34" charset="-122"/>
+                <a:cs typeface="Consolas" pitchFamily="34" charset="-120"/>
+              </a:rPr>
+              <a:t># (or just open the .ts file in your editor)</a:t>
+            </a:r>
+            <a:endParaRPr lang="en-US" sz="800" dirty="0"/>
+          </a:p>
+        </p:txBody>
+      </p:sp>
+      <p:sp>
+        <p:nvSpPr>
+          <p:cNvPr id="15" name="Shape 13"/>
+          <p:cNvSpPr/>
+          <p:nvPr/>
+        </p:nvSpPr>
+        <p:spPr>
+          <a:xfrm>
+            <a:off x="457200" y="3154680"/>
+            <a:ext cx="4023360" cy="1600200"/>
+          </a:xfrm>
+          <a:prstGeom prst="rect">
+            <a:avLst/>
+          </a:prstGeom>
+          <a:solidFill>
+            <a:srgbClr val="FFFFFF"/>
+          </a:solidFill>
+          <a:ln w="6350">
+            <a:solidFill>
+              <a:srgbClr val="E2E8F0"/>
+            </a:solidFill>
+            <a:prstDash val="solid"/>
+          </a:ln>
+          <a:effectLst>
+            <a:outerShdw sx="100000" sy="100000" kx="0" ky="0" algn="bl" rotWithShape="0" blurRad="101600" dist="38100" dir="8100000">
+              <a:srgbClr val="000000">
+                <a:alpha val="10000"/>
+              </a:srgbClr>
+            </a:outerShdw>
+          </a:effectLst>
+        </p:spPr>
+      </p:sp>
+      <p:sp>
+        <p:nvSpPr>
+          <p:cNvPr id="16" name="Text 14"/>
+          <p:cNvSpPr/>
+          <p:nvPr/>
+        </p:nvSpPr>
+        <p:spPr>
+          <a:xfrm>
+            <a:off x="594360" y="3264408"/>
+            <a:ext cx="365760" cy="365760"/>
+          </a:xfrm>
+          <a:prstGeom prst="rect">
+            <a:avLst/>
+          </a:prstGeom>
+          <a:noFill/>
+          <a:ln/>
+        </p:spPr>
+        <p:txBody>
+          <a:bodyPr wrap="square" lIns="0" tIns="0" rIns="0" bIns="0" rtlCol="0" anchor="ctr"/>
+          <a:lstStyle/>
+          <a:p>
+            <a:pPr indent="0" marL="0">
+              <a:buNone/>
+            </a:pPr>
+            <a:r>
+              <a:rPr lang="en-US" sz="2200" b="1" dirty="0">
+                <a:solidFill>
+                  <a:srgbClr val="00B4D8"/>
+                </a:solidFill>
+                <a:latin typeface="Georgia" pitchFamily="34" charset="0"/>
+                <a:ea typeface="Georgia" pitchFamily="34" charset="-122"/>
+                <a:cs typeface="Georgia" pitchFamily="34" charset="-120"/>
+              </a:rPr>
+              <a:t>3</a:t>
+            </a:r>
+            <a:endParaRPr lang="en-US" sz="2200" dirty="0"/>
+          </a:p>
+        </p:txBody>
+      </p:sp>
+      <p:sp>
+        <p:nvSpPr>
+          <p:cNvPr id="17" name="Text 15"/>
+          <p:cNvSpPr/>
+          <p:nvPr/>
+        </p:nvSpPr>
+        <p:spPr>
+          <a:xfrm>
+            <a:off x="1005840" y="3300984"/>
+            <a:ext cx="3383280" cy="365760"/>
+          </a:xfrm>
+          <a:prstGeom prst="rect">
+            <a:avLst/>
+          </a:prstGeom>
+          <a:noFill/>
+          <a:ln/>
+        </p:spPr>
+        <p:txBody>
+          <a:bodyPr wrap="square" lIns="0" tIns="0" rIns="0" bIns="0" rtlCol="0" anchor="ctr"/>
+          <a:lstStyle/>
+          <a:p>
+            <a:pPr indent="0" marL="0">
+              <a:buNone/>
+            </a:pPr>
+            <a:r>
+              <a:rPr lang="en-US" sz="1150" b="1" dirty="0">
+                <a:solidFill>
+                  <a:srgbClr val="0D1B2A"/>
+                </a:solidFill>
+              </a:rPr>
+              <a:t>Re-run a LeetCode answer vs its test cases</a:t>
+            </a:r>
+            <a:endParaRPr lang="en-US" sz="1150" dirty="0"/>
+          </a:p>
+        </p:txBody>
+      </p:sp>
+      <p:sp>
+        <p:nvSpPr>
+          <p:cNvPr id="18" name="Shape 16"/>
+          <p:cNvSpPr/>
+          <p:nvPr/>
+        </p:nvSpPr>
+        <p:spPr>
+          <a:xfrm>
+            <a:off x="594360" y="3721608"/>
+            <a:ext cx="3749040" cy="914400"/>
+          </a:xfrm>
+          <a:prstGeom prst="rect">
+            <a:avLst/>
+          </a:prstGeom>
+          <a:solidFill>
+            <a:srgbClr val="0D1B2A"/>
+          </a:solidFill>
+          <a:ln w="6350">
+            <a:solidFill>
+              <a:srgbClr val="1E3A5F"/>
+            </a:solidFill>
+            <a:prstDash val="solid"/>
+          </a:ln>
+        </p:spPr>
+      </p:sp>
+      <p:sp>
+        <p:nvSpPr>
+          <p:cNvPr id="19" name="Text 17"/>
+          <p:cNvSpPr/>
+          <p:nvPr/>
+        </p:nvSpPr>
+        <p:spPr>
+          <a:xfrm>
+            <a:off x="685800" y="3776472"/>
+            <a:ext cx="3566160" cy="822960"/>
+          </a:xfrm>
+          <a:prstGeom prst="rect">
+            <a:avLst/>
+          </a:prstGeom>
+          <a:noFill/>
+          <a:ln/>
+        </p:spPr>
+        <p:txBody>
+          <a:bodyPr wrap="square" lIns="0" tIns="0" rIns="0" bIns="0" rtlCol="0" anchor="t"/>
+          <a:lstStyle/>
+          <a:p>
+            <a:pPr indent="0" marL="0">
+              <a:buNone/>
+            </a:pPr>
+            <a:r>
+              <a:rPr lang="en-US" sz="800" dirty="0">
+                <a:solidFill>
+                  <a:srgbClr val="7DD3FC"/>
+                </a:solidFill>
+                <a:latin typeface="Consolas" pitchFamily="34" charset="0"/>
+                <a:ea typeface="Consolas" pitchFamily="34" charset="-122"/>
+                <a:cs typeface="Consolas" pitchFamily="34" charset="-120"/>
+              </a:rPr>
+              <a:t>npx ts-node src/run-answer.ts \</a:t>
+            </a:r>
+            <a:endParaRPr lang="en-US" sz="800" dirty="0"/>
+          </a:p>
+          <a:p>
+            <a:pPr indent="0" marL="0">
+              <a:buNone/>
+            </a:pPr>
+            <a:r>
+              <a:rPr lang="en-US" sz="800" dirty="0">
+                <a:solidFill>
+                  <a:srgbClr val="7DD3FC"/>
+                </a:solidFill>
+                <a:latin typeface="Consolas" pitchFamily="34" charset="0"/>
+                <a:ea typeface="Consolas" pitchFamily="34" charset="-122"/>
+                <a:cs typeface="Consolas" pitchFamily="34" charset="-120"/>
+              </a:rPr>
+              <a:t>  answers-7b/qwen7b/LC1-two-sum.ts</a:t>
+            </a:r>
+            <a:endParaRPr lang="en-US" sz="800" dirty="0"/>
+          </a:p>
+        </p:txBody>
+      </p:sp>
+      <p:sp>
+        <p:nvSpPr>
+          <p:cNvPr id="20" name="Shape 18"/>
+          <p:cNvSpPr/>
+          <p:nvPr/>
+        </p:nvSpPr>
+        <p:spPr>
+          <a:xfrm>
+            <a:off x="4709160" y="3154680"/>
+            <a:ext cx="4023360" cy="1600200"/>
+          </a:xfrm>
+          <a:prstGeom prst="rect">
+            <a:avLst/>
+          </a:prstGeom>
+          <a:solidFill>
+            <a:srgbClr val="FFFFFF"/>
+          </a:solidFill>
+          <a:ln w="6350">
+            <a:solidFill>
+              <a:srgbClr val="E2E8F0"/>
+            </a:solidFill>
+            <a:prstDash val="solid"/>
+          </a:ln>
+          <a:effectLst>
+            <a:outerShdw sx="100000" sy="100000" kx="0" ky="0" algn="bl" rotWithShape="0" blurRad="101600" dist="38100" dir="8100000">
+              <a:srgbClr val="000000">
+                <a:alpha val="10000"/>
+              </a:srgbClr>
+            </a:outerShdw>
+          </a:effectLst>
+        </p:spPr>
+      </p:sp>
+      <p:sp>
+        <p:nvSpPr>
+          <p:cNvPr id="21" name="Text 19"/>
+          <p:cNvSpPr/>
+          <p:nvPr/>
+        </p:nvSpPr>
+        <p:spPr>
+          <a:xfrm>
+            <a:off x="4846320" y="3264408"/>
+            <a:ext cx="365760" cy="365760"/>
+          </a:xfrm>
+          <a:prstGeom prst="rect">
+            <a:avLst/>
+          </a:prstGeom>
+          <a:noFill/>
+          <a:ln/>
+        </p:spPr>
+        <p:txBody>
+          <a:bodyPr wrap="square" lIns="0" tIns="0" rIns="0" bIns="0" rtlCol="0" anchor="ctr"/>
+          <a:lstStyle/>
+          <a:p>
+            <a:pPr indent="0" marL="0">
+              <a:buNone/>
+            </a:pPr>
+            <a:r>
+              <a:rPr lang="en-US" sz="2200" b="1" dirty="0">
+                <a:solidFill>
+                  <a:srgbClr val="00B4D8"/>
+                </a:solidFill>
+                <a:latin typeface="Georgia" pitchFamily="34" charset="0"/>
+                <a:ea typeface="Georgia" pitchFamily="34" charset="-122"/>
+                <a:cs typeface="Georgia" pitchFamily="34" charset="-120"/>
+              </a:rPr>
+              <a:t>4</a:t>
+            </a:r>
+            <a:endParaRPr lang="en-US" sz="2200" dirty="0"/>
+          </a:p>
+        </p:txBody>
+      </p:sp>
+      <p:sp>
+        <p:nvSpPr>
+          <p:cNvPr id="22" name="Text 20"/>
+          <p:cNvSpPr/>
+          <p:nvPr/>
+        </p:nvSpPr>
+        <p:spPr>
+          <a:xfrm>
+            <a:off x="5257800" y="3300984"/>
+            <a:ext cx="3383280" cy="365760"/>
+          </a:xfrm>
+          <a:prstGeom prst="rect">
+            <a:avLst/>
+          </a:prstGeom>
+          <a:noFill/>
+          <a:ln/>
+        </p:spPr>
+        <p:txBody>
+          <a:bodyPr wrap="square" lIns="0" tIns="0" rIns="0" bIns="0" rtlCol="0" anchor="ctr"/>
+          <a:lstStyle/>
+          <a:p>
+            <a:pPr indent="0" marL="0">
+              <a:buNone/>
+            </a:pPr>
+            <a:r>
+              <a:rPr lang="en-US" sz="1150" b="1" dirty="0">
+                <a:solidFill>
+                  <a:srgbClr val="0D1B2A"/>
+                </a:solidFill>
+              </a:rPr>
+              <a:t>Re-run a saved scheduler class (26 checks)</a:t>
+            </a:r>
+            <a:endParaRPr lang="en-US" sz="1150" dirty="0"/>
+          </a:p>
+        </p:txBody>
+      </p:sp>
+      <p:sp>
+        <p:nvSpPr>
+          <p:cNvPr id="23" name="Shape 21"/>
+          <p:cNvSpPr/>
+          <p:nvPr/>
+        </p:nvSpPr>
+        <p:spPr>
+          <a:xfrm>
+            <a:off x="4846320" y="3721608"/>
+            <a:ext cx="3749040" cy="914400"/>
+          </a:xfrm>
+          <a:prstGeom prst="rect">
+            <a:avLst/>
+          </a:prstGeom>
+          <a:solidFill>
+            <a:srgbClr val="0D1B2A"/>
+          </a:solidFill>
+          <a:ln w="6350">
+            <a:solidFill>
+              <a:srgbClr val="1E3A5F"/>
+            </a:solidFill>
+            <a:prstDash val="solid"/>
+          </a:ln>
+        </p:spPr>
+      </p:sp>
+      <p:sp>
+        <p:nvSpPr>
+          <p:cNvPr id="24" name="Text 22"/>
+          <p:cNvSpPr/>
+          <p:nvPr/>
+        </p:nvSpPr>
+        <p:spPr>
+          <a:xfrm>
+            <a:off x="4937760" y="3776472"/>
+            <a:ext cx="3566160" cy="822960"/>
+          </a:xfrm>
+          <a:prstGeom prst="rect">
+            <a:avLst/>
+          </a:prstGeom>
+          <a:noFill/>
+          <a:ln/>
+        </p:spPr>
+        <p:txBody>
+          <a:bodyPr wrap="square" lIns="0" tIns="0" rIns="0" bIns="0" rtlCol="0" anchor="t"/>
+          <a:lstStyle/>
+          <a:p>
+            <a:pPr indent="0" marL="0">
+              <a:buNone/>
+            </a:pPr>
+            <a:r>
+              <a:rPr lang="en-US" sz="800" dirty="0">
+                <a:solidFill>
+                  <a:srgbClr val="7DD3FC"/>
+                </a:solidFill>
+                <a:latin typeface="Consolas" pitchFamily="34" charset="0"/>
+                <a:ea typeface="Consolas" pitchFamily="34" charset="-122"/>
+                <a:cs typeface="Consolas" pitchFamily="34" charset="-120"/>
+              </a:rPr>
+              <a:t>npx ts-node src/run-answer.ts \</a:t>
+            </a:r>
+            <a:endParaRPr lang="en-US" sz="800" dirty="0"/>
+          </a:p>
+          <a:p>
+            <a:pPr indent="0" marL="0">
+              <a:buNone/>
+            </a:pPr>
+            <a:r>
+              <a:rPr lang="en-US" sz="800" dirty="0">
+                <a:solidFill>
+                  <a:srgbClr val="7DD3FC"/>
+                </a:solidFill>
+                <a:latin typeface="Consolas" pitchFamily="34" charset="0"/>
+                <a:ea typeface="Consolas" pitchFamily="34" charset="-122"/>
+                <a:cs typeface="Consolas" pitchFamily="34" charset="-120"/>
+              </a:rPr>
+              <a:t>  answers-32b/deepseek/scheduler-ReminderService.ts</a:t>
+            </a:r>
+            <a:endParaRPr lang="en-US" sz="800" dirty="0"/>
+          </a:p>
+        </p:txBody>
+      </p:sp>
+      <p:sp>
+        <p:nvSpPr>
+          <p:cNvPr id="25" name="Text 23"/>
+          <p:cNvSpPr/>
+          <p:nvPr/>
+        </p:nvSpPr>
+        <p:spPr>
+          <a:xfrm>
+            <a:off x="457200" y="4937760"/>
+            <a:ext cx="8229600" cy="228600"/>
+          </a:xfrm>
+          <a:prstGeom prst="rect">
+            <a:avLst/>
+          </a:prstGeom>
+          <a:noFill/>
+          <a:ln/>
+        </p:spPr>
+        <p:txBody>
+          <a:bodyPr wrap="square" lIns="0" tIns="0" rIns="0" bIns="0" rtlCol="0" anchor="ctr"/>
+          <a:lstStyle/>
+          <a:p>
+            <a:pPr indent="0" marL="0">
+              <a:buNone/>
+            </a:pPr>
+            <a:r>
+              <a:rPr lang="en-US" sz="900" i="1" dirty="0">
+                <a:solidFill>
+                  <a:srgbClr val="94A3B8"/>
+                </a:solidFill>
+              </a:rPr>
+              <a:t>run-answer.ts infers the problem from the filename, transpiles the saved TS, and prints expected vs actual for every test case.</a:t>
+            </a:r>
+            <a:endParaRPr lang="en-US" sz="900" dirty="0"/>
+          </a:p>
+        </p:txBody>
+      </p:sp>
+    </p:spTree>
+  </p:cSld>
+  <p:clrMapOvr>
+    <a:masterClrMapping/>
+  </p:clrMapOvr>
+</p:sld>
+</file>
+
+<file path=ppt/slides/slide19.xml><?xml version="1.0" encoding="utf-8"?>
+<p:sld xmlns:a="http://schemas.openxmlformats.org/drawingml/2006/main" xmlns:r="http://schemas.openxmlformats.org/officeDocument/2006/relationships" xmlns:p="http://schemas.openxmlformats.org/presentationml/2006/main">
+  <p:cSld name="Slide 19">
+    <p:bg>
+      <p:bgPr>
+        <a:solidFill>
           <a:srgbClr val="0D1B2A"/>
         </a:solidFill>
       </p:bgPr>
@@ -10886,11 +18518,11 @@
             <a:avLst/>
           </a:prstGeom>
           <a:solidFill>
-            <a:srgbClr val="FF6B35"/>
+            <a:srgbClr val="5E8BFF"/>
           </a:solidFill>
           <a:ln w="12700">
             <a:solidFill>
-              <a:srgbClr val="FF6B35"/>
+              <a:srgbClr val="5E8BFF"/>
             </a:solidFill>
             <a:prstDash val="solid"/>
           </a:ln>
@@ -10926,7 +18558,7 @@
                   <a:srgbClr val="FFFFFF"/>
                 </a:solidFill>
               </a:rPr>
-              <a:t>Primary: Qwen3-Coder 32B on-prem</a:t>
+              <a:t>On a 16 GB GPU today: DeepSeek-Coder 6.7B</a:t>
             </a:r>
             <a:endParaRPr lang="en-US" sz="1300" dirty="0"/>
           </a:p>
@@ -10962,7 +18594,7 @@
                   <a:srgbClr val="94A3B8"/>
                 </a:solidFill>
               </a:rPr>
-              <a:t>Deploy on internal A100/RTX 4090 servers. Apache 2.0, $0/token, 87% avg pass rate on our LeetCode suite. Best long-term ROI.</a:t>
+              <a:t>Fits fully on-device, 87–97% LeetCode, 26/26 scheduler with correct stdlib use. Stable out of the box. Apache/MIT, $0 per token.</a:t>
             </a:r>
             <a:endParaRPr lang="en-US" sz="1000" dirty="0"/>
           </a:p>
@@ -11008,11 +18640,11 @@
             <a:avLst/>
           </a:prstGeom>
           <a:solidFill>
-            <a:srgbClr val="5E8BFF"/>
+            <a:srgbClr val="FF6B35"/>
           </a:solidFill>
           <a:ln w="12700">
             <a:solidFill>
-              <a:srgbClr val="5E8BFF"/>
+              <a:srgbClr val="FF6B35"/>
             </a:solidFill>
             <a:prstDash val="solid"/>
           </a:ln>
@@ -11048,7 +18680,7 @@
                   <a:srgbClr val="FFFFFF"/>
                 </a:solidFill>
               </a:rPr>
-              <a:t>Overflow: DeepSeek V3 API</a:t>
+              <a:t>If you want raw speed: Qwen2.5-Coder 7B</a:t>
             </a:r>
             <a:endParaRPr lang="en-US" sz="1300" dirty="0"/>
           </a:p>
@@ -11084,7 +18716,7 @@
                   <a:srgbClr val="94A3B8"/>
                 </a:solidFill>
               </a:rPr>
-              <a:t>When local GPU is saturated, route to DeepSeek's free 1M token/month tier ($0.23/M after). MIT license, 90% LeetCode pass rate.</a:t>
+              <a:t>Fastest (1.8s/problem) and most token-efficient, 89% LeetCode — but watch the intermittent hallucinated-import bug on full-app generation.</a:t>
             </a:r>
             <a:endParaRPr lang="en-US" sz="1000" dirty="0"/>
           </a:p>
@@ -11130,11 +18762,11 @@
             <a:avLst/>
           </a:prstGeom>
           <a:solidFill>
-            <a:srgbClr val="34D399"/>
+            <a:srgbClr val="00B4D8"/>
           </a:solidFill>
           <a:ln w="12700">
             <a:solidFill>
-              <a:srgbClr val="34D399"/>
+              <a:srgbClr val="00B4D8"/>
             </a:solidFill>
             <a:prstDash val="solid"/>
           </a:ln>
@@ -11170,7 +18802,7 @@
                   <a:srgbClr val="FFFFFF"/>
                 </a:solidFill>
               </a:rPr>
-              <a:t>Fallback: GLM-4-Flash API</a:t>
+              <a:t>For max accuracy: Qwen 32B / DeepSeek 33B on a 24 GB+ GPU</a:t>
             </a:r>
             <a:endParaRPr lang="en-US" sz="1300" dirty="0"/>
           </a:p>
@@ -11206,7 +18838,7 @@
                   <a:srgbClr val="94A3B8"/>
                 </a:solidFill>
               </a:rPr>
-              <a:t>For burst traffic: 6M free tokens/month. 75% LeetCode pass rate. Good for simpler code-gen tasks.</a:t>
+              <a:t>Both hit 37/38 LeetCode + 26/26 scheduler, fixing every 7B-tier failure. Needs more VRAM to avoid the CPU-offload slowdown seen here.</a:t>
             </a:r>
             <a:endParaRPr lang="en-US" sz="1000" dirty="0"/>
           </a:p>
